--- a/course/lectures/act-1-foundations/08-validation/1-8-Validation.pptx
+++ b/course/lectures/act-1-foundations/08-validation/1-8-Validation.pptx
@@ -5,46 +5,46 @@
     <p:sldMasterId id="2147483708" r:id="rId1"/>
   </p:sldMasterIdLst>
   <p:notesMasterIdLst>
-    <p:notesMasterId r:id="rId31"/>
+    <p:notesMasterId r:id="rId39"/>
   </p:notesMasterIdLst>
   <p:sldIdLst>
-    <p:sldId id="257" r:id="rId101"/>
-    <p:sldId id="258" r:id="rId102"/>
-    <p:sldId id="259" r:id="rId103"/>
-    <p:sldId id="260" r:id="rId104"/>
-    <p:sldId id="261" r:id="rId105"/>
-    <p:sldId id="262" r:id="rId106"/>
-    <p:sldId id="263" r:id="rId107"/>
-    <p:sldId id="264" r:id="rId108"/>
-    <p:sldId id="265" r:id="rId109"/>
-    <p:sldId id="266" r:id="rId110"/>
-    <p:sldId id="267" r:id="rId111"/>
-    <p:sldId id="268" r:id="rId112"/>
-    <p:sldId id="269" r:id="rId113"/>
-    <p:sldId id="270" r:id="rId114"/>
-    <p:sldId id="271" r:id="rId115"/>
-    <p:sldId id="272" r:id="rId116"/>
-    <p:sldId id="273" r:id="rId117"/>
-    <p:sldId id="274" r:id="rId118"/>
-    <p:sldId id="275" r:id="rId119"/>
-    <p:sldId id="276" r:id="rId120"/>
-    <p:sldId id="277" r:id="rId121"/>
-    <p:sldId id="278" r:id="rId122"/>
-    <p:sldId id="279" r:id="rId123"/>
-    <p:sldId id="280" r:id="rId124"/>
-    <p:sldId id="281" r:id="rId125"/>
-    <p:sldId id="282" r:id="rId126"/>
-    <p:sldId id="283" r:id="rId127"/>
-    <p:sldId id="284" r:id="rId128"/>
-    <p:sldId id="285" r:id="rId129"/>
-    <p:sldId id="286" r:id="rId130"/>
-    <p:sldId id="287" r:id="rId131"/>
-    <p:sldId id="288" r:id="rId132"/>
-    <p:sldId id="289" r:id="rId133"/>
-    <p:sldId id="290" r:id="rId134"/>
-    <p:sldId id="291" r:id="rId135"/>
-    <p:sldId id="292" r:id="rId136"/>
-    <p:sldId id="293" r:id="rId137"/>
+    <p:sldId id="257" r:id="rId2"/>
+    <p:sldId id="258" r:id="rId3"/>
+    <p:sldId id="259" r:id="rId4"/>
+    <p:sldId id="260" r:id="rId5"/>
+    <p:sldId id="261" r:id="rId6"/>
+    <p:sldId id="262" r:id="rId7"/>
+    <p:sldId id="263" r:id="rId8"/>
+    <p:sldId id="264" r:id="rId9"/>
+    <p:sldId id="265" r:id="rId10"/>
+    <p:sldId id="266" r:id="rId11"/>
+    <p:sldId id="267" r:id="rId12"/>
+    <p:sldId id="268" r:id="rId13"/>
+    <p:sldId id="269" r:id="rId14"/>
+    <p:sldId id="270" r:id="rId15"/>
+    <p:sldId id="271" r:id="rId16"/>
+    <p:sldId id="272" r:id="rId17"/>
+    <p:sldId id="273" r:id="rId18"/>
+    <p:sldId id="274" r:id="rId19"/>
+    <p:sldId id="275" r:id="rId20"/>
+    <p:sldId id="276" r:id="rId21"/>
+    <p:sldId id="277" r:id="rId22"/>
+    <p:sldId id="278" r:id="rId23"/>
+    <p:sldId id="279" r:id="rId24"/>
+    <p:sldId id="280" r:id="rId25"/>
+    <p:sldId id="281" r:id="rId26"/>
+    <p:sldId id="282" r:id="rId27"/>
+    <p:sldId id="283" r:id="rId28"/>
+    <p:sldId id="284" r:id="rId29"/>
+    <p:sldId id="285" r:id="rId30"/>
+    <p:sldId id="286" r:id="rId31"/>
+    <p:sldId id="287" r:id="rId32"/>
+    <p:sldId id="288" r:id="rId33"/>
+    <p:sldId id="289" r:id="rId34"/>
+    <p:sldId id="290" r:id="rId35"/>
+    <p:sldId id="291" r:id="rId36"/>
+    <p:sldId id="292" r:id="rId37"/>
+    <p:sldId id="293" r:id="rId38"/>
   </p:sldIdLst>
   <p:sldSz cx="9144000" cy="6858000" type="screen4x3"/>
   <p:notesSz cx="6858000" cy="9144000"/>
@@ -235,7 +235,7 @@
           </a:lstStyle>
           <a:p>
             <a:fld id="{27E8B4C4-0720-F64E-9EEE-9472CF165DC6}" type="datetimeFigureOut">
-              <a:t>9/11/26</a:t>
+              <a:t>9/18/26</a:t>
             </a:fld>
             <a:endParaRPr lang="en-US"/>
           </a:p>
@@ -3066,7 +3066,7 @@
             </a:r>
             <a:r>
               <a:rPr lang="en-US" b="1" u="none" dirty="0"/>
-              <a:t xml:space="preserve">		Details</a:t>
+              <a:t>		Details</a:t>
             </a:r>
           </a:p>
           <a:p>
@@ -3243,7 +3243,7 @@
             </a:r>
             <a:r>
               <a:rPr lang="en-US" b="1" u="none" dirty="0"/>
-              <a:t xml:space="preserve">		Details</a:t>
+              <a:t>		Details</a:t>
             </a:r>
           </a:p>
           <a:p>
@@ -4536,7 +4536,7 @@
           <a:p>
             <a:fld id="{B7EB45DA-9A0D-DC49-8E02-F30A5DDC21C3}" type="slidenum">
               <a:rPr lang="en-US" smtClean="0"/>
-              <a:t>1</a:t>
+              <a:t>10</a:t>
             </a:fld>
             <a:endParaRPr lang="en-US"/>
           </a:p>
@@ -4921,7 +4921,7 @@
           <a:p>
             <a:fld id="{B7EB45DA-9A0D-DC49-8E02-F30A5DDC21C3}" type="slidenum">
               <a:rPr lang="en-US" smtClean="0"/>
-              <a:t>1</a:t>
+              <a:t>11</a:t>
             </a:fld>
             <a:endParaRPr lang="en-US"/>
           </a:p>
@@ -4962,6 +4962,13 @@
             </a:solidFill>
           </a:ln>
         </p:spPr>
+        <p:txBody>
+          <a:bodyPr/>
+          <a:lstStyle/>
+          <a:p>
+            <a:endParaRPr lang="en-US"/>
+          </a:p>
+        </p:txBody>
       </p:sp>
       <p:sp>
         <p:nvSpPr>
@@ -4998,6 +5005,13 @@
             </a:solidFill>
           </a:ln>
         </p:spPr>
+        <p:txBody>
+          <a:bodyPr/>
+          <a:lstStyle/>
+          <a:p>
+            <a:endParaRPr lang="en-US"/>
+          </a:p>
+        </p:txBody>
       </p:sp>
       <p:sp>
         <p:nvSpPr>
@@ -5402,7 +5416,7 @@
       </p:sp>
       <p:sp>
         <p:nvSpPr>
-          <p:cNvPr id="113" name="FooterBand"/>
+          <p:cNvPr id="4" name="FooterBand"/>
           <p:cNvSpPr/>
           <p:nvPr/>
         </p:nvSpPr>
@@ -5453,19 +5467,19 @@
               <p:cTn id="2" dur="indefinite" nodeType="mainSeq">
                 <p:childTnLst>
                   <p:par>
-                    <p:cTn id="9" fill="hold">
+                    <p:cTn id="3" fill="hold">
                       <p:stCondLst>
                         <p:cond delay="indefinite"/>
                       </p:stCondLst>
                       <p:childTnLst>
                         <p:par>
-                          <p:cTn id="5" fill="hold">
+                          <p:cTn id="4" fill="hold">
                             <p:stCondLst>
                               <p:cond delay="0"/>
                             </p:stCondLst>
                             <p:childTnLst>
                               <p:par>
-                                <p:cTn id="8" presetID="10" presetClass="entr" presetSubtype="0" fill="hold" grpId="0" nodeType="clickEffect">
+                                <p:cTn id="5" presetID="10" presetClass="entr" presetSubtype="0" fill="hold" grpId="0" nodeType="clickEffect">
                                   <p:stCondLst>
                                     <p:cond delay="0"/>
                                   </p:stCondLst>
@@ -5506,19 +5520,19 @@
                     </p:cTn>
                   </p:par>
                   <p:par>
-                    <p:cTn id="14" fill="hold">
+                    <p:cTn id="8" fill="hold">
                       <p:stCondLst>
                         <p:cond delay="indefinite"/>
                       </p:stCondLst>
                       <p:childTnLst>
                         <p:par>
-                          <p:cTn id="10" fill="hold">
+                          <p:cTn id="9" fill="hold">
                             <p:stCondLst>
                               <p:cond delay="0"/>
                             </p:stCondLst>
                             <p:childTnLst>
                               <p:par>
-                                <p:cTn id="13" presetID="10" presetClass="entr" presetSubtype="0" fill="hold" grpId="1" nodeType="clickEffect">
+                                <p:cTn id="10" presetID="10" presetClass="entr" presetSubtype="0" fill="hold" grpId="1" nodeType="clickEffect">
                                   <p:stCondLst>
                                     <p:cond delay="0"/>
                                   </p:stCondLst>
@@ -5559,19 +5573,19 @@
                     </p:cTn>
                   </p:par>
                   <p:par>
-                    <p:cTn id="19" fill="hold">
+                    <p:cTn id="13" fill="hold">
                       <p:stCondLst>
                         <p:cond delay="indefinite"/>
                       </p:stCondLst>
                       <p:childTnLst>
                         <p:par>
-                          <p:cTn id="15" fill="hold">
+                          <p:cTn id="14" fill="hold">
                             <p:stCondLst>
                               <p:cond delay="0"/>
                             </p:stCondLst>
                             <p:childTnLst>
                               <p:par>
-                                <p:cTn id="18" presetID="10" presetClass="entr" presetSubtype="0" fill="hold" grpId="2" nodeType="clickEffect">
+                                <p:cTn id="15" presetID="10" presetClass="entr" presetSubtype="0" fill="hold" grpId="2" nodeType="clickEffect">
                                   <p:stCondLst>
                                     <p:cond delay="0"/>
                                   </p:stCondLst>
@@ -5612,19 +5626,19 @@
                     </p:cTn>
                   </p:par>
                   <p:par>
-                    <p:cTn id="36" fill="hold">
+                    <p:cTn id="18" fill="hold">
                       <p:stCondLst>
                         <p:cond delay="indefinite"/>
                       </p:stCondLst>
                       <p:childTnLst>
                         <p:par>
-                          <p:cTn id="20" fill="hold">
+                          <p:cTn id="19" fill="hold">
                             <p:stCondLst>
                               <p:cond delay="0"/>
                             </p:stCondLst>
                             <p:childTnLst>
                               <p:par>
-                                <p:cTn id="23" presetID="10" presetClass="entr" presetSubtype="0" fill="hold" grpId="3" nodeType="clickEffect">
+                                <p:cTn id="20" presetID="10" presetClass="entr" presetSubtype="0" fill="hold" grpId="3" nodeType="clickEffect">
                                   <p:stCondLst>
                                     <p:cond delay="0"/>
                                   </p:stCondLst>
@@ -5662,13 +5676,13 @@
                           </p:cTn>
                         </p:par>
                         <p:par>
-                          <p:cTn id="24" fill="hold">
+                          <p:cTn id="23" fill="hold">
                             <p:stCondLst>
                               <p:cond delay="0"/>
                             </p:stCondLst>
                             <p:childTnLst>
                               <p:par>
-                                <p:cTn id="27" presetID="10" presetClass="entr" presetSubtype="0" fill="hold" grpId="4" nodeType="withEffect">
+                                <p:cTn id="24" presetID="10" presetClass="entr" presetSubtype="0" fill="hold" grpId="4" nodeType="withEffect">
                                   <p:stCondLst>
                                     <p:cond delay="0"/>
                                   </p:stCondLst>
@@ -5706,13 +5720,13 @@
                           </p:cTn>
                         </p:par>
                         <p:par>
-                          <p:cTn id="28" fill="hold">
+                          <p:cTn id="27" fill="hold">
                             <p:stCondLst>
                               <p:cond delay="0"/>
                             </p:stCondLst>
                             <p:childTnLst>
                               <p:par>
-                                <p:cTn id="31" presetID="10" presetClass="entr" presetSubtype="0" fill="hold" grpId="5" nodeType="withEffect">
+                                <p:cTn id="28" presetID="10" presetClass="entr" presetSubtype="0" fill="hold" grpId="5" nodeType="withEffect">
                                   <p:stCondLst>
                                     <p:cond delay="0"/>
                                   </p:stCondLst>
@@ -5750,13 +5764,13 @@
                           </p:cTn>
                         </p:par>
                         <p:par>
-                          <p:cTn id="32" fill="hold">
+                          <p:cTn id="31" fill="hold">
                             <p:stCondLst>
                               <p:cond delay="0"/>
                             </p:stCondLst>
                             <p:childTnLst>
                               <p:par>
-                                <p:cTn id="35" presetID="10" presetClass="entr" presetSubtype="0" fill="hold" grpId="6" nodeType="withEffect">
+                                <p:cTn id="32" presetID="10" presetClass="entr" presetSubtype="0" fill="hold" grpId="6" nodeType="withEffect">
                                   <p:stCondLst>
                                     <p:cond delay="0"/>
                                   </p:stCondLst>
@@ -5821,9 +5835,9 @@
       <p:bldP spid="110" grpId="0"/>
       <p:bldP spid="111" grpId="1"/>
       <p:bldP spid="112" grpId="2"/>
-      <p:bldP spid="113" grpId="3"/>
-      <p:bldP spid="114" grpId="4"/>
-      <p:bldP spid="115" grpId="5"/>
+      <p:bldP spid="113" grpId="3" animBg="1"/>
+      <p:bldP spid="114" grpId="4" animBg="1"/>
+      <p:bldP spid="115" grpId="5" animBg="1"/>
       <p:bldP spid="116" grpId="6"/>
     </p:bldLst>
   </p:timing>
@@ -5901,7 +5915,7 @@
           <a:p>
             <a:fld id="{B7EB45DA-9A0D-DC49-8E02-F30A5DDC21C3}" type="slidenum">
               <a:rPr lang="en-US" smtClean="0"/>
-              <a:t>1</a:t>
+              <a:t>12</a:t>
             </a:fld>
             <a:endParaRPr lang="en-US"/>
           </a:p>
@@ -5942,6 +5956,13 @@
             </a:solidFill>
           </a:ln>
         </p:spPr>
+        <p:txBody>
+          <a:bodyPr/>
+          <a:lstStyle/>
+          <a:p>
+            <a:endParaRPr lang="en-US"/>
+          </a:p>
+        </p:txBody>
       </p:sp>
       <p:sp>
         <p:nvSpPr>
@@ -5978,6 +5999,13 @@
             </a:solidFill>
           </a:ln>
         </p:spPr>
+        <p:txBody>
+          <a:bodyPr/>
+          <a:lstStyle/>
+          <a:p>
+            <a:endParaRPr lang="en-US"/>
+          </a:p>
+        </p:txBody>
       </p:sp>
       <p:sp>
         <p:nvSpPr>
@@ -6641,7 +6669,7 @@
       </p:sp>
       <p:sp>
         <p:nvSpPr>
-          <p:cNvPr id="113" name="FooterBand"/>
+          <p:cNvPr id="4" name="FooterBand"/>
           <p:cNvSpPr/>
           <p:nvPr/>
         </p:nvSpPr>
@@ -6692,19 +6720,19 @@
               <p:cTn id="2" dur="indefinite" nodeType="mainSeq">
                 <p:childTnLst>
                   <p:par>
-                    <p:cTn id="21" fill="hold">
+                    <p:cTn id="3" fill="hold">
                       <p:stCondLst>
                         <p:cond delay="indefinite"/>
                       </p:stCondLst>
                       <p:childTnLst>
                         <p:par>
-                          <p:cTn id="5" fill="hold">
+                          <p:cTn id="4" fill="hold">
                             <p:stCondLst>
                               <p:cond delay="0"/>
                             </p:stCondLst>
                             <p:childTnLst>
                               <p:par>
-                                <p:cTn id="8" presetID="10" presetClass="entr" presetSubtype="0" fill="hold" grpId="0" nodeType="clickEffect">
+                                <p:cTn id="5" presetID="10" presetClass="entr" presetSubtype="0" fill="hold" grpId="0" nodeType="clickEffect">
                                   <p:stCondLst>
                                     <p:cond delay="0"/>
                                   </p:stCondLst>
@@ -6742,13 +6770,13 @@
                           </p:cTn>
                         </p:par>
                         <p:par>
-                          <p:cTn id="9" fill="hold">
+                          <p:cTn id="8" fill="hold">
                             <p:stCondLst>
                               <p:cond delay="0"/>
                             </p:stCondLst>
                             <p:childTnLst>
                               <p:par>
-                                <p:cTn id="12" presetID="10" presetClass="entr" presetSubtype="0" fill="hold" grpId="1" nodeType="withEffect">
+                                <p:cTn id="9" presetID="10" presetClass="entr" presetSubtype="0" fill="hold" grpId="1" nodeType="withEffect">
                                   <p:stCondLst>
                                     <p:cond delay="0"/>
                                   </p:stCondLst>
@@ -6786,13 +6814,13 @@
                           </p:cTn>
                         </p:par>
                         <p:par>
-                          <p:cTn id="13" fill="hold">
+                          <p:cTn id="12" fill="hold">
                             <p:stCondLst>
                               <p:cond delay="0"/>
                             </p:stCondLst>
                             <p:childTnLst>
                               <p:par>
-                                <p:cTn id="16" presetID="10" presetClass="entr" presetSubtype="0" fill="hold" grpId="2" nodeType="withEffect">
+                                <p:cTn id="13" presetID="10" presetClass="entr" presetSubtype="0" fill="hold" grpId="2" nodeType="withEffect">
                                   <p:stCondLst>
                                     <p:cond delay="0"/>
                                   </p:stCondLst>
@@ -6830,13 +6858,13 @@
                           </p:cTn>
                         </p:par>
                         <p:par>
-                          <p:cTn id="17" fill="hold">
+                          <p:cTn id="16" fill="hold">
                             <p:stCondLst>
                               <p:cond delay="0"/>
                             </p:stCondLst>
                             <p:childTnLst>
                               <p:par>
-                                <p:cTn id="20" presetID="10" presetClass="entr" presetSubtype="0" fill="hold" grpId="3" nodeType="withEffect">
+                                <p:cTn id="17" presetID="10" presetClass="entr" presetSubtype="0" fill="hold" grpId="3" nodeType="withEffect">
                                   <p:stCondLst>
                                     <p:cond delay="0"/>
                                   </p:stCondLst>
@@ -6877,19 +6905,19 @@
                     </p:cTn>
                   </p:par>
                   <p:par>
-                    <p:cTn id="38" fill="hold">
+                    <p:cTn id="20" fill="hold">
                       <p:stCondLst>
                         <p:cond delay="indefinite"/>
                       </p:stCondLst>
                       <p:childTnLst>
                         <p:par>
-                          <p:cTn id="22" fill="hold">
+                          <p:cTn id="21" fill="hold">
                             <p:stCondLst>
                               <p:cond delay="0"/>
                             </p:stCondLst>
                             <p:childTnLst>
                               <p:par>
-                                <p:cTn id="25" presetID="10" presetClass="entr" presetSubtype="0" fill="hold" grpId="4" nodeType="clickEffect">
+                                <p:cTn id="22" presetID="10" presetClass="entr" presetSubtype="0" fill="hold" grpId="4" nodeType="clickEffect">
                                   <p:stCondLst>
                                     <p:cond delay="0"/>
                                   </p:stCondLst>
@@ -6927,13 +6955,13 @@
                           </p:cTn>
                         </p:par>
                         <p:par>
-                          <p:cTn id="26" fill="hold">
+                          <p:cTn id="25" fill="hold">
                             <p:stCondLst>
                               <p:cond delay="0"/>
                             </p:stCondLst>
                             <p:childTnLst>
                               <p:par>
-                                <p:cTn id="29" presetID="10" presetClass="entr" presetSubtype="0" fill="hold" grpId="5" nodeType="withEffect">
+                                <p:cTn id="26" presetID="10" presetClass="entr" presetSubtype="0" fill="hold" grpId="5" nodeType="withEffect">
                                   <p:stCondLst>
                                     <p:cond delay="0"/>
                                   </p:stCondLst>
@@ -6971,13 +6999,13 @@
                           </p:cTn>
                         </p:par>
                         <p:par>
-                          <p:cTn id="30" fill="hold">
+                          <p:cTn id="29" fill="hold">
                             <p:stCondLst>
                               <p:cond delay="0"/>
                             </p:stCondLst>
                             <p:childTnLst>
                               <p:par>
-                                <p:cTn id="33" presetID="10" presetClass="entr" presetSubtype="0" fill="hold" grpId="6" nodeType="withEffect">
+                                <p:cTn id="30" presetID="10" presetClass="entr" presetSubtype="0" fill="hold" grpId="6" nodeType="withEffect">
                                   <p:stCondLst>
                                     <p:cond delay="0"/>
                                   </p:stCondLst>
@@ -7015,13 +7043,13 @@
                           </p:cTn>
                         </p:par>
                         <p:par>
-                          <p:cTn id="34" fill="hold">
+                          <p:cTn id="33" fill="hold">
                             <p:stCondLst>
                               <p:cond delay="0"/>
                             </p:stCondLst>
                             <p:childTnLst>
                               <p:par>
-                                <p:cTn id="37" presetID="10" presetClass="entr" presetSubtype="0" fill="hold" grpId="7" nodeType="withEffect">
+                                <p:cTn id="34" presetID="10" presetClass="entr" presetSubtype="0" fill="hold" grpId="7" nodeType="withEffect">
                                   <p:stCondLst>
                                     <p:cond delay="0"/>
                                   </p:stCondLst>
@@ -7167,7 +7195,7 @@
           <a:p>
             <a:fld id="{B7EB45DA-9A0D-DC49-8E02-F30A5DDC21C3}" type="slidenum">
               <a:rPr lang="en-US" smtClean="0"/>
-              <a:t>1</a:t>
+              <a:t>13</a:t>
             </a:fld>
             <a:endParaRPr lang="en-US"/>
           </a:p>
@@ -7648,7 +7676,7 @@
           <a:p>
             <a:fld id="{B7EB45DA-9A0D-DC49-8E02-F30A5DDC21C3}" type="slidenum">
               <a:rPr lang="en-US" smtClean="0"/>
-              <a:t>1</a:t>
+              <a:t>14</a:t>
             </a:fld>
             <a:endParaRPr lang="en-US"/>
           </a:p>
@@ -7932,7 +7960,7 @@
           <a:p>
             <a:fld id="{B7EB45DA-9A0D-DC49-8E02-F30A5DDC21C3}" type="slidenum">
               <a:rPr lang="en-US" smtClean="0"/>
-              <a:t>1</a:t>
+              <a:t>15</a:t>
             </a:fld>
             <a:endParaRPr lang="en-US"/>
           </a:p>
@@ -8351,7 +8379,7 @@
           <a:p>
             <a:fld id="{B7EB45DA-9A0D-DC49-8E02-F30A5DDC21C3}" type="slidenum">
               <a:rPr lang="en-US" smtClean="0"/>
-              <a:t>1</a:t>
+              <a:t>16</a:t>
             </a:fld>
             <a:endParaRPr lang="en-US"/>
           </a:p>
@@ -8953,7 +8981,7 @@
       </p:sp>
       <p:sp>
         <p:nvSpPr>
-          <p:cNvPr id="113" name="FooterBand"/>
+          <p:cNvPr id="4" name="FooterBand"/>
           <p:cNvSpPr/>
           <p:nvPr/>
         </p:nvSpPr>
@@ -9069,7 +9097,7 @@
           <a:p>
             <a:fld id="{B7EB45DA-9A0D-DC49-8E02-F30A5DDC21C3}" type="slidenum">
               <a:rPr lang="en-US" smtClean="0"/>
-              <a:t>1</a:t>
+              <a:t>17</a:t>
             </a:fld>
             <a:endParaRPr lang="en-US"/>
           </a:p>
@@ -9349,7 +9377,7 @@
         </p:spPr>
         <p:txBody>
           <a:bodyPr>
-            <a:normAutofit fontScale="90000"/>
+            <a:normAutofit/>
           </a:bodyPr>
           <a:lstStyle/>
           <a:p>
@@ -9385,7 +9413,7 @@
           <a:p>
             <a:fld id="{B7EB45DA-9A0D-DC49-8E02-F30A5DDC21C3}" type="slidenum">
               <a:rPr lang="en-US" smtClean="0"/>
-              <a:t>1</a:t>
+              <a:t>18</a:t>
             </a:fld>
             <a:endParaRPr lang="en-US"/>
           </a:p>
@@ -9576,7 +9604,7 @@
           <a:p>
             <a:fld id="{B7EB45DA-9A0D-DC49-8E02-F30A5DDC21C3}" type="slidenum">
               <a:rPr lang="en-US" smtClean="0"/>
-              <a:t>1</a:t>
+              <a:t>19</a:t>
             </a:fld>
             <a:endParaRPr lang="en-US"/>
           </a:p>
@@ -9955,7 +9983,7 @@
         </p:spPr>
         <p:txBody>
           <a:bodyPr>
-            <a:normAutofit fontScale="90000"/>
+            <a:normAutofit/>
           </a:bodyPr>
           <a:lstStyle/>
           <a:p>
@@ -9991,7 +10019,7 @@
           <a:p>
             <a:fld id="{B7EB45DA-9A0D-DC49-8E02-F30A5DDC21C3}" type="slidenum">
               <a:rPr lang="en-US" smtClean="0"/>
-              <a:t>1</a:t>
+              <a:t>2</a:t>
             </a:fld>
             <a:endParaRPr lang="en-US"/>
           </a:p>
@@ -10182,7 +10210,7 @@
           <a:p>
             <a:fld id="{B7EB45DA-9A0D-DC49-8E02-F30A5DDC21C3}" type="slidenum">
               <a:rPr lang="en-US" smtClean="0"/>
-              <a:t>1</a:t>
+              <a:t>20</a:t>
             </a:fld>
             <a:endParaRPr lang="en-US"/>
           </a:p>
@@ -10550,7 +10578,7 @@
           <a:p>
             <a:fld id="{B7EB45DA-9A0D-DC49-8E02-F30A5DDC21C3}" type="slidenum">
               <a:rPr lang="en-US" smtClean="0"/>
-              <a:t>1</a:t>
+              <a:t>21</a:t>
             </a:fld>
             <a:endParaRPr lang="en-US"/>
           </a:p>
@@ -10918,7 +10946,7 @@
           <a:p>
             <a:fld id="{B7EB45DA-9A0D-DC49-8E02-F30A5DDC21C3}" type="slidenum">
               <a:rPr lang="en-US" smtClean="0"/>
-              <a:t>1</a:t>
+              <a:t>22</a:t>
             </a:fld>
             <a:endParaRPr lang="en-US"/>
           </a:p>
@@ -11353,7 +11381,7 @@
           <a:p>
             <a:fld id="{B7EB45DA-9A0D-DC49-8E02-F30A5DDC21C3}" type="slidenum">
               <a:rPr lang="en-US" smtClean="0"/>
-              <a:t>1</a:t>
+              <a:t>23</a:t>
             </a:fld>
             <a:endParaRPr lang="en-US"/>
           </a:p>
@@ -11721,7 +11749,7 @@
           <a:p>
             <a:fld id="{B7EB45DA-9A0D-DC49-8E02-F30A5DDC21C3}" type="slidenum">
               <a:rPr lang="en-US" smtClean="0"/>
-              <a:t>1</a:t>
+              <a:t>24</a:t>
             </a:fld>
             <a:endParaRPr lang="en-US"/>
           </a:p>
@@ -12089,7 +12117,7 @@
           <a:p>
             <a:fld id="{B7EB45DA-9A0D-DC49-8E02-F30A5DDC21C3}" type="slidenum">
               <a:rPr lang="en-US" smtClean="0"/>
-              <a:t>1</a:t>
+              <a:t>25</a:t>
             </a:fld>
             <a:endParaRPr lang="en-US"/>
           </a:p>
@@ -12457,7 +12485,7 @@
           <a:p>
             <a:fld id="{B7EB45DA-9A0D-DC49-8E02-F30A5DDC21C3}" type="slidenum">
               <a:rPr lang="en-US" smtClean="0"/>
-              <a:t>1</a:t>
+              <a:t>26</a:t>
             </a:fld>
             <a:endParaRPr lang="en-US"/>
           </a:p>
@@ -12825,7 +12853,7 @@
           <a:p>
             <a:fld id="{B7EB45DA-9A0D-DC49-8E02-F30A5DDC21C3}" type="slidenum">
               <a:rPr lang="en-US" smtClean="0"/>
-              <a:t>1</a:t>
+              <a:t>27</a:t>
             </a:fld>
             <a:endParaRPr lang="en-US"/>
           </a:p>
@@ -13241,7 +13269,7 @@
         </p:spPr>
         <p:txBody>
           <a:bodyPr>
-            <a:normAutofit fontScale="90000"/>
+            <a:normAutofit/>
           </a:bodyPr>
           <a:lstStyle/>
           <a:p>
@@ -13277,7 +13305,7 @@
           <a:p>
             <a:fld id="{B7EB45DA-9A0D-DC49-8E02-F30A5DDC21C3}" type="slidenum">
               <a:rPr lang="en-US" smtClean="0"/>
-              <a:t>1</a:t>
+              <a:t>28</a:t>
             </a:fld>
             <a:endParaRPr lang="en-US"/>
           </a:p>
@@ -13468,7 +13496,7 @@
           <a:p>
             <a:fld id="{B7EB45DA-9A0D-DC49-8E02-F30A5DDC21C3}" type="slidenum">
               <a:rPr lang="en-US" smtClean="0"/>
-              <a:t>1</a:t>
+              <a:t>29</a:t>
             </a:fld>
             <a:endParaRPr lang="en-US"/>
           </a:p>
@@ -13757,7 +13785,7 @@
           <a:p>
             <a:fld id="{B7EB45DA-9A0D-DC49-8E02-F30A5DDC21C3}" type="slidenum">
               <a:rPr lang="en-US" smtClean="0"/>
-              <a:t>1</a:t>
+              <a:t>3</a:t>
             </a:fld>
             <a:endParaRPr lang="en-US"/>
           </a:p>
@@ -13908,7 +13936,7 @@
               <a:buNone/>
             </a:pPr>
             <a:r>
-              <a:rPr lang="en-US" sz="1500" b="0" i="1" dirty="0">
+              <a:rPr lang="en-US" b="0" i="1" dirty="0">
                 <a:solidFill>
                   <a:srgbClr val="555960"/>
                 </a:solidFill>
@@ -13967,8 +13995,8 @@
         </p:nvSpPr>
         <p:spPr>
           <a:xfrm>
-            <a:off x="685800" y="4460000"/>
-            <a:ext cx="7772400" cy="900000"/>
+            <a:off x="514350" y="4502160"/>
+            <a:ext cx="8001000" cy="900000"/>
           </a:xfrm>
           <a:prstGeom prst="rect">
             <a:avLst/>
@@ -13979,19 +14007,19 @@
           </a:ln>
         </p:spPr>
         <p:txBody>
-          <a:bodyPr wrap="square" lIns="0" tIns="0" rIns="0" bIns="0" anchor="t"/>
-          <a:lstStyle/>
-          <a:p>
-            <a:pPr algn="ctr">
-              <a:buNone/>
-            </a:pPr>
-            <a:r>
-              <a:rPr lang="en-US" sz="1700" b="0" i="1" dirty="0">
+          <a:bodyPr wrap="square" lIns="0" tIns="0" rIns="0" bIns="0" anchor="ctr"/>
+          <a:lstStyle/>
+          <a:p>
+            <a:pPr algn="ctr">
+              <a:buNone/>
+            </a:pPr>
+            <a:r>
+              <a:rPr lang="en-US" sz="2000" b="0" i="1" dirty="0">
                 <a:solidFill>
                   <a:srgbClr val="555960"/>
                 </a:solidFill>
               </a:rPr>
-              <a:t>Validation is the discipline of building this argument — and judging whether it is strong enough for what is at stake.</a:t>
+              <a:t>Validation is the discipline of building the appropriate argument for the claim</a:t>
             </a:r>
           </a:p>
         </p:txBody>
@@ -14114,7 +14142,7 @@
           <a:p>
             <a:fld id="{B7EB45DA-9A0D-DC49-8E02-F30A5DDC21C3}" type="slidenum">
               <a:rPr lang="en-US" smtClean="0"/>
-              <a:t>1</a:t>
+              <a:t>30</a:t>
             </a:fld>
             <a:endParaRPr lang="en-US"/>
           </a:p>
@@ -14196,86 +14224,13 @@
       </p:sp>
       <p:sp>
         <p:nvSpPr>
-          <p:cNvPr id="101" name="TPSbadge"/>
-          <p:cNvSpPr/>
-          <p:nvPr/>
-        </p:nvSpPr>
-        <p:spPr>
-          <a:xfrm>
-            <a:off x="2972000" y="2260000"/>
-            <a:ext cx="3200000" cy="640000"/>
-          </a:xfrm>
-          <a:prstGeom prst="roundRect">
-            <a:avLst/>
-          </a:prstGeom>
-          <a:solidFill>
-            <a:srgbClr val="FBF8F2"/>
-          </a:solidFill>
-          <a:ln w="15875">
-            <a:solidFill>
-              <a:srgbClr val="8E6F3E"/>
-            </a:solidFill>
-          </a:ln>
-        </p:spPr>
-        <p:txBody>
-          <a:bodyPr wrap="square" lIns="91440" tIns="45720" rIns="91440" bIns="45720" anchor="ctr"/>
-          <a:lstStyle/>
-          <a:p>
-            <a:pPr algn="ctr">
-              <a:buNone/>
-            </a:pPr>
-            <a:r>
-              <a:rPr lang="en-US" sz="2200" b="1" i="0" dirty="0">
-                <a:solidFill>
-                  <a:srgbClr val="6B3FA0"/>
-                </a:solidFill>
-              </a:rPr>
-              <a:t>THINK</a:t>
-            </a:r>
-            <a:r>
-              <a:rPr lang="en-US" sz="2200" b="1" i="0" dirty="0">
-                <a:solidFill>
-                  <a:srgbClr val="9A9A9A"/>
-                </a:solidFill>
-              </a:rPr>
-              <a:t xml:space="preserve">  ·  </a:t>
-            </a:r>
-            <a:r>
-              <a:rPr lang="en-US" sz="2200" b="1" i="0" dirty="0">
-                <a:solidFill>
-                  <a:srgbClr val="2E74B5"/>
-                </a:solidFill>
-              </a:rPr>
-              <a:t>PAIR</a:t>
-            </a:r>
-            <a:r>
-              <a:rPr lang="en-US" sz="2200" b="1" i="0" dirty="0">
-                <a:solidFill>
-                  <a:srgbClr val="9A9A9A"/>
-                </a:solidFill>
-              </a:rPr>
-              <a:t xml:space="preserve">  ·  </a:t>
-            </a:r>
-            <a:r>
-              <a:rPr lang="en-US" sz="2200" b="1" i="0" dirty="0">
-                <a:solidFill>
-                  <a:srgbClr val="B8860B"/>
-                </a:solidFill>
-              </a:rPr>
-              <a:t>SHARE</a:t>
-            </a:r>
-          </a:p>
-        </p:txBody>
-      </p:sp>
-      <p:sp>
-        <p:nvSpPr>
           <p:cNvPr id="102" name="T102"/>
           <p:cNvSpPr txBox="1"/>
           <p:nvPr/>
         </p:nvSpPr>
         <p:spPr>
           <a:xfrm>
-            <a:off x="685800" y="3080000"/>
+            <a:off x="685800" y="3537201"/>
             <a:ext cx="7772400" cy="460000"/>
           </a:xfrm>
           <a:prstGeom prst="rect">
@@ -14312,7 +14267,7 @@
         </p:nvSpPr>
         <p:spPr>
           <a:xfrm>
-            <a:off x="1372000" y="3620000"/>
+            <a:off x="1372000" y="4077201"/>
             <a:ext cx="6400000" cy="1080000"/>
           </a:xfrm>
           <a:prstGeom prst="rect">
@@ -14400,6 +14355,36 @@
           </a:p>
         </p:txBody>
       </p:sp>
+      <p:pic>
+        <p:nvPicPr>
+          <p:cNvPr id="4" name="Think Pair Share banner" descr="Think, Pair, Share">
+            <a:extLst>
+              <a:ext uri="{FF2B5EF4-FFF2-40B4-BE49-F238E27FC236}">
+                <a16:creationId xmlns:a16="http://schemas.microsoft.com/office/drawing/2014/main" id="{4153810E-47AC-3B70-1311-0F23CAE82167}"/>
+              </a:ext>
+            </a:extLst>
+          </p:cNvPr>
+          <p:cNvPicPr>
+            <a:picLocks noChangeAspect="1"/>
+          </p:cNvPicPr>
+          <p:nvPr/>
+        </p:nvPicPr>
+        <p:blipFill>
+          <a:blip r:embed="rId2"/>
+          <a:stretch>
+            <a:fillRect/>
+          </a:stretch>
+        </p:blipFill>
+        <p:spPr>
+          <a:xfrm>
+            <a:off x="2476500" y="2153804"/>
+            <a:ext cx="4191000" cy="1206500"/>
+          </a:xfrm>
+          <a:prstGeom prst="rect">
+            <a:avLst/>
+          </a:prstGeom>
+        </p:spPr>
+      </p:pic>
     </p:spTree>
   </p:cSld>
   <p:clrMapOvr>
@@ -14414,19 +14399,19 @@
               <p:cTn id="2" dur="indefinite" nodeType="mainSeq">
                 <p:childTnLst>
                   <p:par>
-                    <p:cTn id="9" fill="hold">
+                    <p:cTn id="3" fill="hold">
                       <p:stCondLst>
                         <p:cond delay="indefinite"/>
                       </p:stCondLst>
                       <p:childTnLst>
                         <p:par>
-                          <p:cTn id="5" fill="hold">
+                          <p:cTn id="4" fill="hold">
                             <p:stCondLst>
                               <p:cond delay="0"/>
                             </p:stCondLst>
                             <p:childTnLst>
                               <p:par>
-                                <p:cTn id="8" presetID="10" presetClass="entr" presetSubtype="0" fill="hold" grpId="0" nodeType="clickEffect">
+                                <p:cTn id="5" presetID="10" presetClass="entr" presetSubtype="0" fill="hold" grpId="0" nodeType="clickEffect">
                                   <p:stCondLst>
                                     <p:cond delay="0"/>
                                   </p:stCondLst>
@@ -14488,7 +14473,7 @@
       </p:par>
     </p:tnLst>
     <p:bldLst>
-      <p:bldP spid="103" grpId="0"/>
+      <p:bldP spid="103" grpId="0" animBg="1"/>
     </p:bldLst>
   </p:timing>
 </p:sld>
@@ -14565,7 +14550,7 @@
           <a:p>
             <a:fld id="{B7EB45DA-9A0D-DC49-8E02-F30A5DDC21C3}" type="slidenum">
               <a:rPr lang="en-US" smtClean="0"/>
-              <a:t>1</a:t>
+              <a:t>31</a:t>
             </a:fld>
             <a:endParaRPr lang="en-US"/>
           </a:p>
@@ -14869,7 +14854,7 @@
           <a:p>
             <a:fld id="{B7EB45DA-9A0D-DC49-8E02-F30A5DDC21C3}" type="slidenum">
               <a:rPr lang="en-US" smtClean="0"/>
-              <a:t>1</a:t>
+              <a:t>32</a:t>
             </a:fld>
             <a:endParaRPr lang="en-US"/>
           </a:p>
@@ -15287,6 +15272,13 @@
             <a:tailEnd type="triangle" w="med" len="med"/>
           </a:ln>
         </p:spPr>
+        <p:txBody>
+          <a:bodyPr/>
+          <a:lstStyle/>
+          <a:p>
+            <a:endParaRPr lang="en-US"/>
+          </a:p>
+        </p:txBody>
       </p:sp>
       <p:sp>
         <p:nvSpPr>
@@ -15327,6 +15319,13 @@
             <a:tailEnd type="triangle" w="med" len="med"/>
           </a:ln>
         </p:spPr>
+        <p:txBody>
+          <a:bodyPr/>
+          <a:lstStyle/>
+          <a:p>
+            <a:endParaRPr lang="en-US"/>
+          </a:p>
+        </p:txBody>
       </p:sp>
       <p:sp>
         <p:nvSpPr>
@@ -15367,7 +15366,7 @@
       </p:sp>
       <p:sp>
         <p:nvSpPr>
-          <p:cNvPr id="113" name="FooterBand"/>
+          <p:cNvPr id="4" name="FooterBand"/>
           <p:cNvSpPr/>
           <p:nvPr/>
         </p:nvSpPr>
@@ -15463,7 +15462,7 @@
         </p:spPr>
         <p:txBody>
           <a:bodyPr>
-            <a:normAutofit fontScale="90000"/>
+            <a:normAutofit/>
           </a:bodyPr>
           <a:lstStyle/>
           <a:p>
@@ -15499,7 +15498,7 @@
           <a:p>
             <a:fld id="{B7EB45DA-9A0D-DC49-8E02-F30A5DDC21C3}" type="slidenum">
               <a:rPr lang="en-US" smtClean="0"/>
-              <a:t>1</a:t>
+              <a:t>33</a:t>
             </a:fld>
             <a:endParaRPr lang="en-US"/>
           </a:p>
@@ -15690,7 +15689,7 @@
           <a:p>
             <a:fld id="{B7EB45DA-9A0D-DC49-8E02-F30A5DDC21C3}" type="slidenum">
               <a:rPr lang="en-US" smtClean="0"/>
-              <a:t>1</a:t>
+              <a:t>34</a:t>
             </a:fld>
             <a:endParaRPr lang="en-US"/>
           </a:p>
@@ -15985,7 +15984,7 @@
           <a:p>
             <a:fld id="{B7EB45DA-9A0D-DC49-8E02-F30A5DDC21C3}" type="slidenum">
               <a:rPr lang="en-US" smtClean="0"/>
-              <a:t>1</a:t>
+              <a:t>35</a:t>
             </a:fld>
             <a:endParaRPr lang="en-US"/>
           </a:p>
@@ -16066,86 +16065,13 @@
       </p:sp>
       <p:sp>
         <p:nvSpPr>
-          <p:cNvPr id="101" name="TPSbadge"/>
-          <p:cNvSpPr/>
-          <p:nvPr/>
-        </p:nvSpPr>
-        <p:spPr>
-          <a:xfrm>
-            <a:off x="2972000" y="2320000"/>
-            <a:ext cx="3200000" cy="560000"/>
-          </a:xfrm>
-          <a:prstGeom prst="roundRect">
-            <a:avLst/>
-          </a:prstGeom>
-          <a:solidFill>
-            <a:srgbClr val="FBF8F2"/>
-          </a:solidFill>
-          <a:ln w="15875">
-            <a:solidFill>
-              <a:srgbClr val="8E6F3E"/>
-            </a:solidFill>
-          </a:ln>
-        </p:spPr>
-        <p:txBody>
-          <a:bodyPr wrap="square" lIns="91440" tIns="45720" rIns="91440" bIns="45720" anchor="ctr"/>
-          <a:lstStyle/>
-          <a:p>
-            <a:pPr algn="ctr">
-              <a:buNone/>
-            </a:pPr>
-            <a:r>
-              <a:rPr lang="en-US" sz="2200" b="1" i="0" dirty="0">
-                <a:solidFill>
-                  <a:srgbClr val="6B3FA0"/>
-                </a:solidFill>
-              </a:rPr>
-              <a:t>THINK</a:t>
-            </a:r>
-            <a:r>
-              <a:rPr lang="en-US" sz="2200" b="1" i="0" dirty="0">
-                <a:solidFill>
-                  <a:srgbClr val="9A9A9A"/>
-                </a:solidFill>
-              </a:rPr>
-              <a:t xml:space="preserve">  ·  </a:t>
-            </a:r>
-            <a:r>
-              <a:rPr lang="en-US" sz="2200" b="1" i="0" dirty="0">
-                <a:solidFill>
-                  <a:srgbClr val="2E74B5"/>
-                </a:solidFill>
-              </a:rPr>
-              <a:t>PAIR</a:t>
-            </a:r>
-            <a:r>
-              <a:rPr lang="en-US" sz="2200" b="1" i="0" dirty="0">
-                <a:solidFill>
-                  <a:srgbClr val="9A9A9A"/>
-                </a:solidFill>
-              </a:rPr>
-              <a:t xml:space="preserve">  ·  </a:t>
-            </a:r>
-            <a:r>
-              <a:rPr lang="en-US" sz="2200" b="1" i="0" dirty="0">
-                <a:solidFill>
-                  <a:srgbClr val="B8860B"/>
-                </a:solidFill>
-              </a:rPr>
-              <a:t>SHARE</a:t>
-            </a:r>
-          </a:p>
-        </p:txBody>
-      </p:sp>
-      <p:sp>
-        <p:nvSpPr>
           <p:cNvPr id="110" name="B110"/>
           <p:cNvSpPr/>
           <p:nvPr/>
         </p:nvSpPr>
         <p:spPr>
           <a:xfrm>
-            <a:off x="432000" y="3120000"/>
+            <a:off x="432000" y="3736227"/>
             <a:ext cx="1560000" cy="820000"/>
           </a:xfrm>
           <a:prstGeom prst="rect">
@@ -16184,7 +16110,7 @@
         </p:nvSpPr>
         <p:spPr>
           <a:xfrm>
-            <a:off x="2112000" y="3120000"/>
+            <a:off x="2112000" y="3736227"/>
             <a:ext cx="1560000" cy="820000"/>
           </a:xfrm>
           <a:prstGeom prst="rect">
@@ -16223,7 +16149,7 @@
         </p:nvSpPr>
         <p:spPr>
           <a:xfrm>
-            <a:off x="3792000" y="3120000"/>
+            <a:off x="3792000" y="3736227"/>
             <a:ext cx="1560000" cy="820000"/>
           </a:xfrm>
           <a:prstGeom prst="rect">
@@ -16262,7 +16188,7 @@
         </p:nvSpPr>
         <p:spPr>
           <a:xfrm>
-            <a:off x="5472000" y="3120000"/>
+            <a:off x="5472000" y="3736227"/>
             <a:ext cx="1560000" cy="820000"/>
           </a:xfrm>
           <a:prstGeom prst="rect">
@@ -16301,7 +16227,7 @@
         </p:nvSpPr>
         <p:spPr>
           <a:xfrm>
-            <a:off x="7152000" y="3120000"/>
+            <a:off x="7152000" y="3736227"/>
             <a:ext cx="1560000" cy="820000"/>
           </a:xfrm>
           <a:prstGeom prst="rect">
@@ -16340,7 +16266,7 @@
         </p:nvSpPr>
         <p:spPr>
           <a:xfrm>
-            <a:off x="620000" y="4100000"/>
+            <a:off x="620000" y="4716227"/>
             <a:ext cx="8000000" cy="520000"/>
           </a:xfrm>
           <a:prstGeom prst="rect">
@@ -16371,7 +16297,7 @@
       </p:sp>
       <p:sp>
         <p:nvSpPr>
-          <p:cNvPr id="113" name="FooterBand"/>
+          <p:cNvPr id="4" name="FooterBand"/>
           <p:cNvSpPr/>
           <p:nvPr/>
         </p:nvSpPr>
@@ -16408,6 +16334,36 @@
           </a:p>
         </p:txBody>
       </p:sp>
+      <p:pic>
+        <p:nvPicPr>
+          <p:cNvPr id="7" name="Think Pair Share banner" descr="Think, Pair, Share">
+            <a:extLst>
+              <a:ext uri="{FF2B5EF4-FFF2-40B4-BE49-F238E27FC236}">
+                <a16:creationId xmlns:a16="http://schemas.microsoft.com/office/drawing/2014/main" id="{0EFA98E1-0C18-D839-ECB8-B98ADB983623}"/>
+              </a:ext>
+            </a:extLst>
+          </p:cNvPr>
+          <p:cNvPicPr>
+            <a:picLocks noChangeAspect="1"/>
+          </p:cNvPicPr>
+          <p:nvPr/>
+        </p:nvPicPr>
+        <p:blipFill>
+          <a:blip r:embed="rId2"/>
+          <a:stretch>
+            <a:fillRect/>
+          </a:stretch>
+        </p:blipFill>
+        <p:spPr>
+          <a:xfrm>
+            <a:off x="2524500" y="2332830"/>
+            <a:ext cx="4191000" cy="1206500"/>
+          </a:xfrm>
+          <a:prstGeom prst="rect">
+            <a:avLst/>
+          </a:prstGeom>
+        </p:spPr>
+      </p:pic>
     </p:spTree>
   </p:cSld>
   <p:clrMapOvr>
@@ -16422,19 +16378,19 @@
               <p:cTn id="2" dur="indefinite" nodeType="mainSeq">
                 <p:childTnLst>
                   <p:par>
-                    <p:cTn id="25" fill="hold">
+                    <p:cTn id="3" fill="hold">
                       <p:stCondLst>
                         <p:cond delay="indefinite"/>
                       </p:stCondLst>
                       <p:childTnLst>
                         <p:par>
-                          <p:cTn id="5" fill="hold">
+                          <p:cTn id="4" fill="hold">
                             <p:stCondLst>
                               <p:cond delay="0"/>
                             </p:stCondLst>
                             <p:childTnLst>
                               <p:par>
-                                <p:cTn id="8" presetID="10" presetClass="entr" presetSubtype="0" fill="hold" grpId="0" nodeType="clickEffect">
+                                <p:cTn id="5" presetID="10" presetClass="entr" presetSubtype="0" fill="hold" grpId="0" nodeType="clickEffect">
                                   <p:stCondLst>
                                     <p:cond delay="0"/>
                                   </p:stCondLst>
@@ -16472,13 +16428,13 @@
                           </p:cTn>
                         </p:par>
                         <p:par>
-                          <p:cTn id="9" fill="hold">
+                          <p:cTn id="8" fill="hold">
                             <p:stCondLst>
                               <p:cond delay="0"/>
                             </p:stCondLst>
                             <p:childTnLst>
                               <p:par>
-                                <p:cTn id="12" presetID="10" presetClass="entr" presetSubtype="0" fill="hold" grpId="1" nodeType="withEffect">
+                                <p:cTn id="9" presetID="10" presetClass="entr" presetSubtype="0" fill="hold" grpId="1" nodeType="withEffect">
                                   <p:stCondLst>
                                     <p:cond delay="0"/>
                                   </p:stCondLst>
@@ -16516,13 +16472,13 @@
                           </p:cTn>
                         </p:par>
                         <p:par>
-                          <p:cTn id="13" fill="hold">
+                          <p:cTn id="12" fill="hold">
                             <p:stCondLst>
                               <p:cond delay="0"/>
                             </p:stCondLst>
                             <p:childTnLst>
                               <p:par>
-                                <p:cTn id="16" presetID="10" presetClass="entr" presetSubtype="0" fill="hold" grpId="2" nodeType="withEffect">
+                                <p:cTn id="13" presetID="10" presetClass="entr" presetSubtype="0" fill="hold" grpId="2" nodeType="withEffect">
                                   <p:stCondLst>
                                     <p:cond delay="0"/>
                                   </p:stCondLst>
@@ -16560,13 +16516,13 @@
                           </p:cTn>
                         </p:par>
                         <p:par>
-                          <p:cTn id="17" fill="hold">
+                          <p:cTn id="16" fill="hold">
                             <p:stCondLst>
                               <p:cond delay="0"/>
                             </p:stCondLst>
                             <p:childTnLst>
                               <p:par>
-                                <p:cTn id="20" presetID="10" presetClass="entr" presetSubtype="0" fill="hold" grpId="3" nodeType="withEffect">
+                                <p:cTn id="17" presetID="10" presetClass="entr" presetSubtype="0" fill="hold" grpId="3" nodeType="withEffect">
                                   <p:stCondLst>
                                     <p:cond delay="0"/>
                                   </p:stCondLst>
@@ -16604,13 +16560,13 @@
                           </p:cTn>
                         </p:par>
                         <p:par>
-                          <p:cTn id="21" fill="hold">
+                          <p:cTn id="20" fill="hold">
                             <p:stCondLst>
                               <p:cond delay="0"/>
                             </p:stCondLst>
                             <p:childTnLst>
                               <p:par>
-                                <p:cTn id="24" presetID="10" presetClass="entr" presetSubtype="0" fill="hold" grpId="4" nodeType="withEffect">
+                                <p:cTn id="21" presetID="10" presetClass="entr" presetSubtype="0" fill="hold" grpId="4" nodeType="withEffect">
                                   <p:stCondLst>
                                     <p:cond delay="0"/>
                                   </p:stCondLst>
@@ -16672,11 +16628,11 @@
       </p:par>
     </p:tnLst>
     <p:bldLst>
-      <p:bldP spid="110" grpId="0"/>
-      <p:bldP spid="111" grpId="1"/>
-      <p:bldP spid="112" grpId="2"/>
-      <p:bldP spid="113" grpId="3"/>
-      <p:bldP spid="114" grpId="4"/>
+      <p:bldP spid="110" grpId="0" animBg="1"/>
+      <p:bldP spid="111" grpId="1" animBg="1"/>
+      <p:bldP spid="112" grpId="2" animBg="1"/>
+      <p:bldP spid="113" grpId="3" animBg="1"/>
+      <p:bldP spid="114" grpId="4" animBg="1"/>
     </p:bldLst>
   </p:timing>
 </p:sld>
@@ -16753,7 +16709,7 @@
           <a:p>
             <a:fld id="{B7EB45DA-9A0D-DC49-8E02-F30A5DDC21C3}" type="slidenum">
               <a:rPr lang="en-US" smtClean="0"/>
-              <a:t>1</a:t>
+              <a:t>36</a:t>
             </a:fld>
             <a:endParaRPr lang="en-US"/>
           </a:p>
@@ -16797,86 +16753,6 @@
             </a:r>
           </a:p>
         </p:txBody>
-      </p:sp>
-      <p:sp>
-        <p:nvSpPr>
-          <p:cNvPr id="101" name="L101"/>
-          <p:cNvSpPr/>
-          <p:nvPr/>
-        </p:nvSpPr>
-        <p:spPr>
-          <a:xfrm>
-            <a:off x="2300000" y="1500000"/>
-            <a:ext cx="2272000" cy="360000"/>
-          </a:xfrm>
-          <a:custGeom>
-            <a:avLst/>
-            <a:gdLst/>
-            <a:ahLst/>
-            <a:cxnLst/>
-            <a:rect l="l" t="t" r="r" b="b"/>
-            <a:pathLst>
-              <a:path w="2272000" h="360000" fill="none">
-                <a:moveTo>
-                  <a:pt x="2272000" y="0"/>
-                </a:moveTo>
-                <a:lnTo>
-                  <a:pt x="0" y="0"/>
-                </a:lnTo>
-                <a:lnTo>
-                  <a:pt x="0" y="360000"/>
-                </a:lnTo>
-              </a:path>
-            </a:pathLst>
-          </a:custGeom>
-          <a:noFill/>
-          <a:ln w="38100">
-            <a:solidFill>
-              <a:srgbClr val="8E6F3E"/>
-            </a:solidFill>
-            <a:tailEnd type="triangle" w="med" len="med"/>
-          </a:ln>
-        </p:spPr>
-      </p:sp>
-      <p:sp>
-        <p:nvSpPr>
-          <p:cNvPr id="102" name="L102"/>
-          <p:cNvSpPr/>
-          <p:nvPr/>
-        </p:nvSpPr>
-        <p:spPr>
-          <a:xfrm>
-            <a:off x="4572000" y="1500000"/>
-            <a:ext cx="2272000" cy="360000"/>
-          </a:xfrm>
-          <a:custGeom>
-            <a:avLst/>
-            <a:gdLst/>
-            <a:ahLst/>
-            <a:cxnLst/>
-            <a:rect l="l" t="t" r="r" b="b"/>
-            <a:pathLst>
-              <a:path w="2272000" h="360000" fill="none">
-                <a:moveTo>
-                  <a:pt x="0" y="0"/>
-                </a:moveTo>
-                <a:lnTo>
-                  <a:pt x="2272000" y="0"/>
-                </a:lnTo>
-                <a:lnTo>
-                  <a:pt x="2272000" y="360000"/>
-                </a:lnTo>
-              </a:path>
-            </a:pathLst>
-          </a:custGeom>
-          <a:noFill/>
-          <a:ln w="38100">
-            <a:solidFill>
-              <a:srgbClr val="8E6F3E"/>
-            </a:solidFill>
-            <a:tailEnd type="triangle" w="med" len="med"/>
-          </a:ln>
-        </p:spPr>
       </p:sp>
       <p:sp>
         <p:nvSpPr>
@@ -17512,6 +17388,91 @@
           </a:p>
         </p:txBody>
       </p:sp>
+      <p:cxnSp>
+        <p:nvCxnSpPr>
+          <p:cNvPr id="5" name="Elbow Connector 4">
+            <a:extLst>
+              <a:ext uri="{FF2B5EF4-FFF2-40B4-BE49-F238E27FC236}">
+                <a16:creationId xmlns:a16="http://schemas.microsoft.com/office/drawing/2014/main" id="{782FD6B7-3E42-E711-C90C-27E6D1360FA6}"/>
+              </a:ext>
+            </a:extLst>
+          </p:cNvPr>
+          <p:cNvCxnSpPr>
+            <a:stCxn id="100" idx="1"/>
+            <a:endCxn id="110" idx="0"/>
+          </p:cNvCxnSpPr>
+          <p:nvPr/>
+        </p:nvCxnSpPr>
+        <p:spPr>
+          <a:xfrm rot="10800000" flipV="1">
+            <a:off x="2300000" y="1200000"/>
+            <a:ext cx="972000" cy="720000"/>
+          </a:xfrm>
+          <a:prstGeom prst="bentConnector2">
+            <a:avLst/>
+          </a:prstGeom>
+          <a:ln w="38100">
+            <a:tailEnd type="triangle"/>
+          </a:ln>
+        </p:spPr>
+        <p:style>
+          <a:lnRef idx="1">
+            <a:schemeClr val="accent1"/>
+          </a:lnRef>
+          <a:fillRef idx="0">
+            <a:schemeClr val="accent1"/>
+          </a:fillRef>
+          <a:effectRef idx="0">
+            <a:schemeClr val="accent1"/>
+          </a:effectRef>
+          <a:fontRef idx="minor">
+            <a:schemeClr val="tx1"/>
+          </a:fontRef>
+        </p:style>
+      </p:cxnSp>
+      <p:cxnSp>
+        <p:nvCxnSpPr>
+          <p:cNvPr id="6" name="Elbow Connector 5">
+            <a:extLst>
+              <a:ext uri="{FF2B5EF4-FFF2-40B4-BE49-F238E27FC236}">
+                <a16:creationId xmlns:a16="http://schemas.microsoft.com/office/drawing/2014/main" id="{21C0A1B5-59B7-1E91-456F-6E32303C7D37}"/>
+              </a:ext>
+            </a:extLst>
+          </p:cNvPr>
+          <p:cNvCxnSpPr>
+            <a:cxnSpLocks/>
+            <a:stCxn id="100" idx="3"/>
+            <a:endCxn id="111" idx="0"/>
+          </p:cNvCxnSpPr>
+          <p:nvPr/>
+        </p:nvCxnSpPr>
+        <p:spPr>
+          <a:xfrm>
+            <a:off x="5872000" y="1200000"/>
+            <a:ext cx="248000" cy="720000"/>
+          </a:xfrm>
+          <a:prstGeom prst="bentConnector2">
+            <a:avLst/>
+          </a:prstGeom>
+          <a:ln w="38100">
+            <a:tailEnd type="triangle"/>
+          </a:ln>
+        </p:spPr>
+        <p:style>
+          <a:lnRef idx="1">
+            <a:schemeClr val="accent1"/>
+          </a:lnRef>
+          <a:fillRef idx="0">
+            <a:schemeClr val="accent1"/>
+          </a:fillRef>
+          <a:effectRef idx="0">
+            <a:schemeClr val="accent1"/>
+          </a:effectRef>
+          <a:fontRef idx="minor">
+            <a:schemeClr val="tx1"/>
+          </a:fontRef>
+        </p:style>
+      </p:cxnSp>
     </p:spTree>
   </p:cSld>
   <p:clrMapOvr>
@@ -17591,7 +17552,7 @@
           <a:p>
             <a:fld id="{B7EB45DA-9A0D-DC49-8E02-F30A5DDC21C3}" type="slidenum">
               <a:rPr lang="en-US" smtClean="0"/>
-              <a:t>1</a:t>
+              <a:t>37</a:t>
             </a:fld>
             <a:endParaRPr lang="en-US"/>
           </a:p>
@@ -18008,7 +17969,7 @@
           <a:p>
             <a:fld id="{B7EB45DA-9A0D-DC49-8E02-F30A5DDC21C3}" type="slidenum">
               <a:rPr lang="en-US" smtClean="0"/>
-              <a:t>1</a:t>
+              <a:t>4</a:t>
             </a:fld>
             <a:endParaRPr lang="en-US"/>
           </a:p>
@@ -18022,8 +17983,8 @@
         </p:nvSpPr>
         <p:spPr>
           <a:xfrm>
-            <a:off x="685800" y="1500000"/>
-            <a:ext cx="7772400" cy="900000"/>
+            <a:off x="408948" y="3036911"/>
+            <a:ext cx="8458200" cy="900000"/>
           </a:xfrm>
           <a:prstGeom prst="rect">
             <a:avLst/>
@@ -18046,8 +18007,42 @@
                   <a:srgbClr val="000000"/>
                 </a:solidFill>
               </a:rPr>
-              <a:t>How confident must you be before delivering software?</a:t>
-            </a:r>
+              <a:t>How confident must you be before </a:t>
+            </a:r>
+            <a:r>
+              <a:rPr lang="en-US" sz="2800" dirty="0">
+                <a:solidFill>
+                  <a:srgbClr val="000000"/>
+                </a:solidFill>
+              </a:rPr>
+              <a:t>shipping a product</a:t>
+            </a:r>
+            <a:r>
+              <a:rPr lang="en-US" sz="2800" b="0" i="0" dirty="0">
+                <a:solidFill>
+                  <a:srgbClr val="000000"/>
+                </a:solidFill>
+              </a:rPr>
+              <a:t>?</a:t>
+            </a:r>
+          </a:p>
+          <a:p>
+            <a:pPr algn="ctr">
+              <a:buNone/>
+            </a:pPr>
+            <a:r>
+              <a:rPr lang="en-US" sz="2800" dirty="0">
+                <a:solidFill>
+                  <a:srgbClr val="000000"/>
+                </a:solidFill>
+              </a:rPr>
+              <a:t>What kind of confidence is needed?</a:t>
+            </a:r>
+            <a:endParaRPr lang="en-US" sz="2800" b="0" i="0" dirty="0">
+              <a:solidFill>
+                <a:srgbClr val="000000"/>
+              </a:solidFill>
+            </a:endParaRPr>
           </a:p>
         </p:txBody>
       </p:sp>
@@ -18059,8 +18054,8 @@
         </p:nvSpPr>
         <p:spPr>
           <a:xfrm>
-            <a:off x="685800" y="2700000"/>
-            <a:ext cx="7772400" cy="500000"/>
+            <a:off x="547374" y="4092529"/>
+            <a:ext cx="8181348" cy="500000"/>
           </a:xfrm>
           <a:prstGeom prst="rect">
             <a:avLst/>
@@ -18088,155 +18083,36 @@
           </a:p>
         </p:txBody>
       </p:sp>
-      <p:sp>
-        <p:nvSpPr>
-          <p:cNvPr id="102" name="TPSbadge"/>
-          <p:cNvSpPr/>
-          <p:nvPr/>
-        </p:nvSpPr>
-        <p:spPr>
-          <a:xfrm>
-            <a:off x="2972000" y="3560000"/>
-            <a:ext cx="3200000" cy="640000"/>
-          </a:xfrm>
-          <a:prstGeom prst="roundRect">
-            <a:avLst/>
-          </a:prstGeom>
-          <a:solidFill>
-            <a:srgbClr val="FBF8F2"/>
-          </a:solidFill>
-          <a:ln w="15875">
-            <a:solidFill>
-              <a:srgbClr val="8E6F3E"/>
-            </a:solidFill>
-          </a:ln>
-        </p:spPr>
-        <p:txBody>
-          <a:bodyPr wrap="square" lIns="91440" tIns="45720" rIns="91440" bIns="45720" anchor="ctr"/>
-          <a:lstStyle/>
-          <a:p>
-            <a:pPr algn="ctr">
-              <a:buNone/>
-            </a:pPr>
-            <a:r>
-              <a:rPr lang="en-US" sz="2200" b="1" i="0" dirty="0">
-                <a:solidFill>
-                  <a:srgbClr val="6B3FA0"/>
-                </a:solidFill>
-              </a:rPr>
-              <a:t>THINK</a:t>
-            </a:r>
-            <a:r>
-              <a:rPr lang="en-US" sz="2200" b="1" i="0" dirty="0">
-                <a:solidFill>
-                  <a:srgbClr val="9A9A9A"/>
-                </a:solidFill>
-              </a:rPr>
-              <a:t xml:space="preserve">  ·  </a:t>
-            </a:r>
-            <a:r>
-              <a:rPr lang="en-US" sz="2200" b="1" i="0" dirty="0">
-                <a:solidFill>
-                  <a:srgbClr val="2E74B5"/>
-                </a:solidFill>
-              </a:rPr>
-              <a:t>PAIR</a:t>
-            </a:r>
-            <a:r>
-              <a:rPr lang="en-US" sz="2200" b="1" i="0" dirty="0">
-                <a:solidFill>
-                  <a:srgbClr val="9A9A9A"/>
-                </a:solidFill>
-              </a:rPr>
-              <a:t xml:space="preserve">  ·  </a:t>
-            </a:r>
-            <a:r>
-              <a:rPr lang="en-US" sz="2200" b="1" i="0" dirty="0">
-                <a:solidFill>
-                  <a:srgbClr val="B8860B"/>
-                </a:solidFill>
-              </a:rPr>
-              <a:t>SHARE</a:t>
-            </a:r>
-          </a:p>
-        </p:txBody>
-      </p:sp>
-      <p:sp>
-        <p:nvSpPr>
-          <p:cNvPr id="103" name="T103"/>
-          <p:cNvSpPr txBox="1"/>
-          <p:nvPr/>
-        </p:nvSpPr>
-        <p:spPr>
-          <a:xfrm>
-            <a:off x="685800" y="4460000"/>
-            <a:ext cx="7772400" cy="600000"/>
-          </a:xfrm>
-          <a:prstGeom prst="rect">
-            <a:avLst/>
-          </a:prstGeom>
-          <a:noFill/>
-          <a:ln>
-            <a:noFill/>
-          </a:ln>
-        </p:spPr>
-        <p:txBody>
-          <a:bodyPr wrap="square" lIns="0" tIns="0" rIns="0" bIns="0" anchor="t"/>
-          <a:lstStyle/>
-          <a:p>
-            <a:pPr algn="ctr">
-              <a:buNone/>
-            </a:pPr>
-            <a:r>
-              <a:rPr lang="en-US" sz="1900" b="0" i="0" dirty="0">
-                <a:solidFill>
-                  <a:srgbClr val="5C4826"/>
-                </a:solidFill>
-              </a:rPr>
-              <a:t>Should they receive the same validation strategy? Why not?</a:t>
-            </a:r>
-          </a:p>
-        </p:txBody>
-      </p:sp>
-      <p:sp>
-        <p:nvSpPr>
-          <p:cNvPr id="113" name="FooterBand"/>
-          <p:cNvSpPr/>
-          <p:nvPr/>
-        </p:nvSpPr>
-        <p:spPr>
-          <a:xfrm>
-            <a:off x="274320" y="5852160"/>
-            <a:ext cx="8595360" cy="566928"/>
-          </a:xfrm>
-          <a:prstGeom prst="rect">
-            <a:avLst/>
-          </a:prstGeom>
-          <a:solidFill>
-            <a:srgbClr val="8E6F3E"/>
-          </a:solidFill>
-          <a:ln>
-            <a:noFill/>
-          </a:ln>
-        </p:spPr>
-        <p:txBody>
-          <a:bodyPr wrap="square" lIns="91440" tIns="45720" rIns="91440" bIns="45720" anchor="ctr"/>
-          <a:lstStyle/>
-          <a:p>
-            <a:pPr algn="ctr">
-              <a:buNone/>
-            </a:pPr>
-            <a:r>
-              <a:rPr lang="en-US" sz="2000" b="1" i="0" dirty="0">
-                <a:solidFill>
-                  <a:srgbClr val="FFFFFF"/>
-                </a:solidFill>
-              </a:rPr>
-              <a:t>Reach for the honest first answer. Then we make it precise.</a:t>
-            </a:r>
-          </a:p>
-        </p:txBody>
-      </p:sp>
+      <p:pic>
+        <p:nvPicPr>
+          <p:cNvPr id="4" name="Think Pair Share banner" descr="Think, Pair, Share">
+            <a:extLst>
+              <a:ext uri="{FF2B5EF4-FFF2-40B4-BE49-F238E27FC236}">
+                <a16:creationId xmlns:a16="http://schemas.microsoft.com/office/drawing/2014/main" id="{9ED59124-F5ED-9B82-55A8-6D593C16C538}"/>
+              </a:ext>
+            </a:extLst>
+          </p:cNvPr>
+          <p:cNvPicPr>
+            <a:picLocks noChangeAspect="1"/>
+          </p:cNvPicPr>
+          <p:nvPr/>
+        </p:nvPicPr>
+        <p:blipFill>
+          <a:blip r:embed="rId2"/>
+          <a:stretch>
+            <a:fillRect/>
+          </a:stretch>
+        </p:blipFill>
+        <p:spPr>
+          <a:xfrm>
+            <a:off x="2476500" y="1308972"/>
+            <a:ext cx="4191000" cy="1206500"/>
+          </a:xfrm>
+          <a:prstGeom prst="rect">
+            <a:avLst/>
+          </a:prstGeom>
+        </p:spPr>
+      </p:pic>
     </p:spTree>
   </p:cSld>
   <p:clrMapOvr>
@@ -18294,7 +18170,7 @@
                   <a:srgbClr val="000000"/>
                 </a:solidFill>
               </a:rPr>
-              <a:t>“It depends” is the beginning of the engineering answer, not the end</a:t>
+              <a:t>“It depends” is the beginning of the answer, not the end</a:t>
             </a:r>
           </a:p>
         </p:txBody>
@@ -18316,7 +18192,7 @@
           <a:p>
             <a:fld id="{B7EB45DA-9A0D-DC49-8E02-F30A5DDC21C3}" type="slidenum">
               <a:rPr lang="en-US" smtClean="0"/>
-              <a:t>1</a:t>
+              <a:t>5</a:t>
             </a:fld>
             <a:endParaRPr lang="en-US"/>
           </a:p>
@@ -18595,7 +18471,7 @@
                   <a:srgbClr val="000000"/>
                 </a:solidFill>
               </a:rPr>
-              <a:t>Radiation control</a:t>
+              <a:t>X-Ray control</a:t>
             </a:r>
           </a:p>
           <a:p>
@@ -18661,8 +18537,8 @@
         </p:nvSpPr>
         <p:spPr>
           <a:xfrm>
-            <a:off x="274320" y="5852160"/>
-            <a:ext cx="8595360" cy="566928"/>
+            <a:off x="274320" y="5519088"/>
+            <a:ext cx="8595360" cy="900000"/>
           </a:xfrm>
           <a:prstGeom prst="rect">
             <a:avLst/>
@@ -18682,12 +18558,49 @@
               <a:buNone/>
             </a:pPr>
             <a:r>
-              <a:rPr lang="en-US" sz="2000" b="1" i="0" dirty="0">
+              <a:rPr lang="en-US" sz="2400" i="0" dirty="0">
                 <a:solidFill>
                   <a:srgbClr val="FFFFFF"/>
                 </a:solidFill>
               </a:rPr>
-              <a:t>Our job: say what it depends on, and how that changes the evidence we require.</a:t>
+              <a:t>Engineers say what it depends </a:t>
+            </a:r>
+            <a:r>
+              <a:rPr lang="en-US" sz="2400" b="1" i="1" dirty="0">
+                <a:solidFill>
+                  <a:srgbClr val="FFFFFF"/>
+                </a:solidFill>
+              </a:rPr>
+              <a:t>on</a:t>
+            </a:r>
+            <a:r>
+              <a:rPr lang="en-US" sz="2400" b="1" i="0" dirty="0">
+                <a:solidFill>
+                  <a:srgbClr val="FFFFFF"/>
+                </a:solidFill>
+              </a:rPr>
+              <a:t>, </a:t>
+            </a:r>
+            <a:r>
+              <a:rPr lang="en-US" sz="2400" i="0" dirty="0">
+                <a:solidFill>
+                  <a:srgbClr val="FFFFFF"/>
+                </a:solidFill>
+              </a:rPr>
+              <a:t>and</a:t>
+            </a:r>
+          </a:p>
+          <a:p>
+            <a:pPr algn="ctr">
+              <a:buNone/>
+            </a:pPr>
+            <a:r>
+              <a:rPr lang="en-US" sz="2400" i="0" dirty="0">
+                <a:solidFill>
+                  <a:srgbClr val="FFFFFF"/>
+                </a:solidFill>
+              </a:rPr>
+              <a:t>how that changes the evidence we require.</a:t>
             </a:r>
           </a:p>
         </p:txBody>
@@ -18771,7 +18684,7 @@
           <a:p>
             <a:fld id="{B7EB45DA-9A0D-DC49-8E02-F30A5DDC21C3}" type="slidenum">
               <a:rPr lang="en-US" smtClean="0"/>
-              <a:t>1</a:t>
+              <a:t>6</a:t>
             </a:fld>
             <a:endParaRPr lang="en-US"/>
           </a:p>
@@ -19035,7 +18948,7 @@
                   <a:srgbClr val="FFFFFF"/>
                 </a:solidFill>
               </a:rPr>
-              <a:t>MEDICAL DEVICE</a:t>
+              <a:t>X-Ray Control</a:t>
             </a:r>
           </a:p>
         </p:txBody>
@@ -19284,7 +19197,7 @@
           <a:p>
             <a:fld id="{B7EB45DA-9A0D-DC49-8E02-F30A5DDC21C3}" type="slidenum">
               <a:rPr lang="en-US" smtClean="0"/>
-              <a:t>1</a:t>
+              <a:t>7</a:t>
             </a:fld>
             <a:endParaRPr lang="en-US"/>
           </a:p>
@@ -19559,7 +19472,7 @@
         </p:spPr>
         <p:txBody>
           <a:bodyPr>
-            <a:normAutofit fontScale="90000"/>
+            <a:normAutofit/>
           </a:bodyPr>
           <a:lstStyle/>
           <a:p>
@@ -19595,7 +19508,7 @@
           <a:p>
             <a:fld id="{B7EB45DA-9A0D-DC49-8E02-F30A5DDC21C3}" type="slidenum">
               <a:rPr lang="en-US" smtClean="0"/>
-              <a:t>1</a:t>
+              <a:t>8</a:t>
             </a:fld>
             <a:endParaRPr lang="en-US"/>
           </a:p>
@@ -19786,7 +19699,7 @@
           <a:p>
             <a:fld id="{B7EB45DA-9A0D-DC49-8E02-F30A5DDC21C3}" type="slidenum">
               <a:rPr lang="en-US" smtClean="0"/>
-              <a:t>1</a:t>
+              <a:t>9</a:t>
             </a:fld>
             <a:endParaRPr lang="en-US"/>
           </a:p>

--- a/course/lectures/act-1-foundations/08-validation/1-8-Validation.pptx
+++ b/course/lectures/act-1-foundations/08-validation/1-8-Validation.pptx
@@ -6826,43 +6826,6 @@
       </p:sp>
       <p:sp>
         <p:nvSpPr>
-          <p:cNvPr id="116" name="T116"/>
-          <p:cNvSpPr txBox="1"/>
-          <p:nvPr/>
-        </p:nvSpPr>
-        <p:spPr>
-          <a:xfrm>
-            <a:off x="1780000" y="4090000"/>
-            <a:ext cx="1700000" cy="300000"/>
-          </a:xfrm>
-          <a:prstGeom prst="rect">
-            <a:avLst/>
-          </a:prstGeom>
-          <a:noFill/>
-          <a:ln>
-            <a:noFill/>
-          </a:ln>
-        </p:spPr>
-        <p:txBody>
-          <a:bodyPr wrap="square" lIns="0" tIns="0" rIns="0" bIns="0" anchor="t"/>
-          <a:lstStyle/>
-          <a:p>
-            <a:pPr algn="l">
-              <a:buNone/>
-            </a:pPr>
-            <a:r>
-              <a:rPr lang="en-US" sz="1050" b="0" i="1" dirty="0">
-                <a:solidFill>
-                  <a:srgbClr val="555960"/>
-                </a:solidFill>
-              </a:rPr>
-              <a:t>(no fixed number of levels)</a:t>
-            </a:r>
-          </a:p>
-        </p:txBody>
-      </p:sp>
-      <p:sp>
-        <p:nvSpPr>
           <p:cNvPr id="117" name="T117"/>
           <p:cNvSpPr txBox="1"/>
           <p:nvPr/>
@@ -6986,7 +6949,7 @@
                   <a:srgbClr val="57534E"/>
                 </a:solidFill>
               </a:rPr>
-              <a:t>READ IT AS A CHAIN OF MODELS</a:t>
+              <a:t>A CHAIN OF MODELS</a:t>
             </a:r>
           </a:p>
           <a:p>
@@ -7333,50 +7296,6 @@
                             </p:childTnLst>
                           </p:cTn>
                         </p:par>
-                        <p:par>
-                          <p:cTn id="31" fill="hold">
-                            <p:stCondLst>
-                              <p:cond delay="0"/>
-                            </p:stCondLst>
-                            <p:childTnLst>
-                              <p:par>
-                                <p:cTn id="32" presetID="10" presetClass="entr" presetSubtype="0" fill="hold" grpId="6" nodeType="withEffect">
-                                  <p:stCondLst>
-                                    <p:cond delay="0"/>
-                                  </p:stCondLst>
-                                  <p:childTnLst>
-                                    <p:set>
-                                      <p:cBhvr>
-                                        <p:cTn id="33" dur="1" fill="hold">
-                                          <p:stCondLst>
-                                            <p:cond delay="0"/>
-                                          </p:stCondLst>
-                                        </p:cTn>
-                                        <p:tgtEl>
-                                          <p:spTgt spid="116"/>
-                                        </p:tgtEl>
-                                        <p:attrNameLst>
-                                          <p:attrName>style.visibility</p:attrName>
-                                        </p:attrNameLst>
-                                      </p:cBhvr>
-                                      <p:to>
-                                        <p:strVal val="visible"/>
-                                      </p:to>
-                                    </p:set>
-                                    <p:animEffect transition="in" filter="fade">
-                                      <p:cBhvr>
-                                        <p:cTn id="34" dur="500"/>
-                                        <p:tgtEl>
-                                          <p:spTgt spid="116"/>
-                                        </p:tgtEl>
-                                      </p:cBhvr>
-                                    </p:animEffect>
-                                  </p:childTnLst>
-                                </p:cTn>
-                              </p:par>
-                            </p:childTnLst>
-                          </p:cTn>
-                        </p:par>
                       </p:childTnLst>
                     </p:cTn>
                   </p:par>
@@ -7408,7 +7327,6 @@
       <p:bldP spid="113" grpId="3" animBg="1"/>
       <p:bldP spid="114" grpId="4" animBg="1"/>
       <p:bldP spid="115" grpId="5" animBg="1"/>
-      <p:bldP spid="116" grpId="6"/>
     </p:bldLst>
   </p:timing>
 </p:sld>
@@ -7463,7 +7381,7 @@
                   <a:srgbClr val="000000"/>
                 </a:solidFill>
               </a:rPr>
-              <a:t>The V is the summary: models left, evidence at matching scopes right</a:t>
+              <a:t>The V: models left, evidence at matching scopes right</a:t>
             </a:r>
           </a:p>
         </p:txBody>
@@ -8060,7 +7978,7 @@
         </p:nvSpPr>
         <p:spPr>
           <a:xfrm>
-            <a:off x="6420000" y="3560000"/>
+            <a:off x="6420000" y="3438144"/>
             <a:ext cx="2300000" cy="560000"/>
           </a:xfrm>
           <a:prstGeom prst="rect">
@@ -8546,7 +8464,7 @@
                   <a:srgbClr val="000000"/>
                 </a:solidFill>
               </a:rPr>
-              <a:t>evidence that the system is acceptable for its intended use</a:t>
+              <a:t>evidence that the delivered system achieves its purpose in the world</a:t>
             </a:r>
           </a:p>
         </p:txBody>
@@ -8940,7 +8858,7 @@
                   <a:srgbClr val="000000"/>
                 </a:solidFill>
               </a:rPr>
-              <a:t>Check a property at the lowest scope that can establish it</a:t>
+              <a:t>How low can the evidence go?</a:t>
             </a:r>
           </a:p>
         </p:txBody>
@@ -9214,12 +9132,12 @@
               <a:buNone/>
             </a:pPr>
             <a:r>
-              <a:rPr lang="en-US" sz="1700" b="1" i="0" dirty="0">
+              <a:rPr lang="en-US" sz="2000" b="1" i="0" dirty="0">
                 <a:solidFill>
                   <a:srgbClr val="FFFFFF"/>
                 </a:solidFill>
               </a:rPr>
-              <a:t>The cheapest scope that can establish the property — never cheaper than the property itself.</a:t>
+              <a:t>As cheap as the property allows — and no cheaper.</a:t>
             </a:r>
           </a:p>
         </p:txBody>
@@ -18594,7 +18512,7 @@
                   <a:srgbClr val="000000"/>
                 </a:solidFill>
               </a:rPr>
-              <a:t>Assemble the service, submit a payment, and check that exactly one charge appears.</a:t>
+              <a:t>Assemble the service, submit a payment, and check that no more than one charge appears.</a:t>
             </a:r>
           </a:p>
         </p:txBody>
@@ -19261,7 +19179,7 @@
           </a:ln>
         </p:spPr>
         <p:txBody>
-          <a:bodyPr wrap="square" lIns="91440" tIns="45720" rIns="91440" bIns="45720" anchor="t"/>
+          <a:bodyPr wrap="square" lIns="91440" tIns="45720" rIns="91440" bIns="45720" anchor="ctr"/>
           <a:lstStyle/>
           <a:p>
             <a:pPr algn="ctr">
@@ -19318,7 +19236,7 @@
           </a:ln>
         </p:spPr>
         <p:txBody>
-          <a:bodyPr wrap="square" lIns="91440" tIns="45720" rIns="91440" bIns="45720" anchor="t"/>
+          <a:bodyPr wrap="square" lIns="91440" tIns="45720" rIns="91440" bIns="45720" anchor="ctr"/>
           <a:lstStyle/>
           <a:p>
             <a:pPr algn="ctr">
@@ -19375,7 +19293,7 @@
           </a:ln>
         </p:spPr>
         <p:txBody>
-          <a:bodyPr wrap="square" lIns="91440" tIns="45720" rIns="91440" bIns="45720" anchor="t"/>
+          <a:bodyPr wrap="square" lIns="91440" tIns="45720" rIns="91440" bIns="45720" anchor="ctr"/>
           <a:lstStyle/>
           <a:p>
             <a:pPr algn="ctr">
@@ -19444,7 +19362,7 @@
                   <a:srgbClr val="000000"/>
                 </a:solidFill>
               </a:rPr>
-              <a:t>And some properties are far cheaper to exercise at a smaller scope: rejecting a duplicate payment id needs one component, not a deployment.</a:t>
+              <a:t>Some properties are also far cheaper to exercise at a smaller scope: rejecting a duplicate payment ID needs one component, not a deployment.</a:t>
             </a:r>
           </a:p>
         </p:txBody>
@@ -19838,8 +19756,8 @@
         </p:nvSpPr>
         <p:spPr>
           <a:xfrm>
-            <a:off x="566928" y="896112"/>
-            <a:ext cx="8010144" cy="566928"/>
+            <a:off x="676656" y="896112"/>
+            <a:ext cx="7936992" cy="566928"/>
           </a:xfrm>
           <a:prstGeom prst="rect">
             <a:avLst/>
@@ -19866,7 +19784,7 @@
                   <a:srgbClr val="5C4826"/>
                 </a:solidFill>
               </a:rPr>
-              <a:t>SPECIFICATION:  a submitted payment shall cause at most one charge.</a:t>
+              <a:t>SPECIFICATION: a submitted payment shall cause at most one charge.</a:t>
             </a:r>
           </a:p>
         </p:txBody>
@@ -19879,8 +19797,8 @@
         </p:nvSpPr>
         <p:spPr>
           <a:xfrm>
-            <a:off x="566928" y="1645920"/>
-            <a:ext cx="2011680" cy="566928"/>
+            <a:off x="676656" y="1627632"/>
+            <a:ext cx="2395728" cy="640080"/>
           </a:xfrm>
           <a:prstGeom prst="rect">
             <a:avLst/>
@@ -19918,8 +19836,8 @@
         </p:nvSpPr>
         <p:spPr>
           <a:xfrm>
-            <a:off x="2743200" y="1645920"/>
-            <a:ext cx="5833872" cy="566928"/>
+            <a:off x="3163824" y="1627632"/>
+            <a:ext cx="5458968" cy="640080"/>
           </a:xfrm>
           <a:prstGeom prst="rect">
             <a:avLst/>
@@ -19946,7 +19864,7 @@
                   <a:srgbClr val="000000"/>
                 </a:solidFill>
               </a:rPr>
-              <a:t>Does the idempotency component reject a duplicate payment id?</a:t>
+              <a:t>Does the idempotency component reject a duplicate payment ID?</a:t>
             </a:r>
           </a:p>
         </p:txBody>
@@ -19959,8 +19877,8 @@
         </p:nvSpPr>
         <p:spPr>
           <a:xfrm>
-            <a:off x="566928" y="2313432"/>
-            <a:ext cx="2011680" cy="566928"/>
+            <a:off x="676656" y="2340864"/>
+            <a:ext cx="2395728" cy="640080"/>
           </a:xfrm>
           <a:prstGeom prst="rect">
             <a:avLst/>
@@ -19998,8 +19916,8 @@
         </p:nvSpPr>
         <p:spPr>
           <a:xfrm>
-            <a:off x="2743200" y="2313432"/>
-            <a:ext cx="5833872" cy="566928"/>
+            <a:off x="3163824" y="2340864"/>
+            <a:ext cx="5458968" cy="640080"/>
           </a:xfrm>
           <a:prstGeom prst="rect">
             <a:avLst/>
@@ -20039,8 +19957,8 @@
         </p:nvSpPr>
         <p:spPr>
           <a:xfrm>
-            <a:off x="566928" y="2980944"/>
-            <a:ext cx="2011680" cy="566928"/>
+            <a:off x="676656" y="3054096"/>
+            <a:ext cx="2395728" cy="640080"/>
           </a:xfrm>
           <a:prstGeom prst="rect">
             <a:avLst/>
@@ -20078,8 +19996,8 @@
         </p:nvSpPr>
         <p:spPr>
           <a:xfrm>
-            <a:off x="2743200" y="2980944"/>
-            <a:ext cx="5833872" cy="566928"/>
+            <a:off x="3163824" y="3054096"/>
+            <a:ext cx="5458968" cy="640080"/>
           </a:xfrm>
           <a:prstGeom prst="rect">
             <a:avLst/>
@@ -20106,7 +20024,7 @@
                   <a:srgbClr val="000000"/>
                 </a:solidFill>
               </a:rPr>
-              <a:t>Can one submitted payment ever produce two charges at the service boundary?</a:t>
+              <a:t>Can one submitted payment ever produce two charges at the boundary?</a:t>
             </a:r>
           </a:p>
         </p:txBody>
@@ -20119,8 +20037,8 @@
         </p:nvSpPr>
         <p:spPr>
           <a:xfrm>
-            <a:off x="566928" y="3648456"/>
-            <a:ext cx="2011680" cy="566928"/>
+            <a:off x="676656" y="3767328"/>
+            <a:ext cx="2395728" cy="640080"/>
           </a:xfrm>
           <a:prstGeom prst="rect">
             <a:avLst/>
@@ -20158,8 +20076,8 @@
         </p:nvSpPr>
         <p:spPr>
           <a:xfrm>
-            <a:off x="2743200" y="3648456"/>
-            <a:ext cx="5833872" cy="566928"/>
+            <a:off x="3163824" y="3767328"/>
+            <a:ext cx="5458968" cy="640080"/>
           </a:xfrm>
           <a:prstGeom prst="rect">
             <a:avLst/>
@@ -20199,8 +20117,8 @@
         </p:nvSpPr>
         <p:spPr>
           <a:xfrm>
-            <a:off x="566928" y="4434840"/>
-            <a:ext cx="8010144" cy="914400"/>
+            <a:off x="676656" y="4572000"/>
+            <a:ext cx="7936992" cy="914400"/>
           </a:xfrm>
           <a:prstGeom prst="rect">
             <a:avLst/>
@@ -22516,7 +22434,7 @@
                   <a:srgbClr val="5C4826"/>
                 </a:solidFill>
               </a:rPr>
-              <a:t>RULE: record the payment id BEFORE charging it — a retry must never charge twice.</a:t>
+              <a:t>RULE: record the payment ID BEFORE charging it — a retry must never charge twice.</a:t>
             </a:r>
           </a:p>
         </p:txBody>
@@ -23094,7 +23012,7 @@
                   <a:srgbClr val="5C4826"/>
                 </a:solidFill>
               </a:rPr>
-              <a:t>RULE: record the payment id BEFORE charging it — a retry must never charge twice.</a:t>
+              <a:t>RULE: record the payment ID BEFORE charging it — a retry must never charge twice.</a:t>
             </a:r>
           </a:p>
         </p:txBody>
@@ -26766,7 +26684,7 @@
                   <a:srgbClr val="000000"/>
                 </a:solidFill>
               </a:rPr>
-              <a:t>Software is updateable.</a:t>
+              <a:t>Software is updatable.</a:t>
             </a:r>
           </a:p>
           <a:p>
@@ -27248,7 +27166,7 @@
                   <a:srgbClr val="000000"/>
                 </a:solidFill>
               </a:rPr>
-              <a:t>A payment submitted once is charged at most once</a:t>
+              <a:t>A submitted payment shall cause at most one charge</a:t>
             </a:r>
           </a:p>
         </p:txBody>

--- a/course/lectures/act-1-foundations/08-validation/1-8-Validation.pptx
+++ b/course/lectures/act-1-foundations/08-validation/1-8-Validation.pptx
@@ -17,15 +17,19 @@
     <p:sldId id="296" r:id="rId8"/>
     <p:sldId id="268" r:id="rId9"/>
     <p:sldId id="275" r:id="rId10"/>
+    <p:sldId id="323" r:id="rId36"/>
     <p:sldId id="301" r:id="rId11"/>
     <p:sldId id="302" r:id="rId12"/>
     <p:sldId id="303" r:id="rId13"/>
+    <p:sldId id="324" r:id="rId37"/>
     <p:sldId id="304" r:id="rId14"/>
     <p:sldId id="299" r:id="rId15"/>
     <p:sldId id="322" r:id="rId16"/>
     <p:sldId id="305" r:id="rId17"/>
+    <p:sldId id="325" r:id="rId38"/>
     <p:sldId id="297" r:id="rId18"/>
     <p:sldId id="307" r:id="rId19"/>
+    <p:sldId id="326" r:id="rId39"/>
     <p:sldId id="308" r:id="rId20"/>
     <p:sldId id="309" r:id="rId21"/>
     <p:sldId id="312" r:id="rId22"/>
@@ -1538,7 +1542,7 @@
           <a:p>
             <a:r>
               <a:rPr lang="en-US" b="0" i="0" dirty="0"/>
-              <a:t>• Land the trade on the footer sentence, then hand off: model checking follows as the second example of reasoning over possible behavior.</a:t>
+              <a:t>• The closer is now a CLASS QUESTION — what can we conclude about the real program from what we proved about the abstraction? Do NOT animate an answer; let it actually be a question. It forces reasoning about the mapping between abstraction and reality. Anticipate in the discussion: what the abstraction includes; whether it conservatively includes all real behaviors; impossible behaviors may remain; conclusions inherit the abstraction’s assumptions. Then hand off: model checking follows as the second example of reasoning over possible behavior.</a:t>
             </a:r>
           </a:p>
           <a:p>
@@ -1604,7 +1608,7 @@
           <a:p>
             <a:r>
               <a:rPr lang="en-US" b="0" i="0" dirty="0"/>
-              <a:t>Static analysis trades concrete execution for mechanical reasoning over an abstraction. Model checking, next, makes the other classic version of that trade.</a:t>
+              <a:t>Close on the question at the bottom, and hold the silence: what can we conclude about the real program from what we proved about the abstraction? The mapping between the abstraction and reality is exactly what I want you reasoning about — whatever we conclude inherits the abstraction’s assumptions. Model checking, next, makes the other classic version of that trade.</a:t>
             </a:r>
           </a:p>
         </p:txBody>
@@ -1696,6 +1700,12 @@
           <a:p>
             <a:r>
               <a:rPr lang="en-US" b="0" i="0" dirty="0"/>
+              <a:t>• The closer is now a CLASS QUESTION — we found no counterexample up to depth k; what have we actually established? Students will naturally say “it’s correct,” which hands you exactly the misconception to correct. Then elicit the full sentence: no violation within the modeled behavior, semantics, assumptions, property, and bound.</a:t>
+            </a:r>
+          </a:p>
+          <a:p>
+            <a:r>
+              <a:rPr lang="en-US" b="0" i="0" dirty="0"/>
               <a:t>• Keep Mars compact — the number that lands is 45,000 lines of C to a 1,600-line verification model; the reusable point is that model checking became part of ROUTINE REGRESSION testing, a standing control, and that the artifact under validation is a choice: sometimes the model, before the system exists. Gerard Holzmann built SPIN at Bell Labs (ACM Software System Award, 2001) and later led NASA/JPL's Laboratory for Reliable Software; the runs exposed subtle concurrency defects.</a:t>
             </a:r>
           </a:p>
@@ -1781,6 +1791,12 @@
             <a:r>
               <a:rPr lang="en-US" b="0" i="0" dirty="0"/>
               <a:t>And one real-world callout, kept short. For Mars Science Laboratory, JPL model-checked critical multithreaded algorithms — a forty-five-thousand-line C module became a sixteen-hundred-line verification model, the runs exposed subtle concurrency defects, and checking joined routine regression testing. The artifact under validation is a choice. Sometimes the best one is the model — and you can have that evidence before you rely on the realized system.</a:t>
+            </a:r>
+          </a:p>
+          <a:p>
+            <a:r>
+              <a:rPr lang="en-US" b="0" i="0" dirty="0"/>
+              <a:t>Close on the question: we found no counterexample up to depth k — what have we actually established? Someone will say “it’s correct.” Good — that is the misconception, said out loud. Draw out the real answer: no violation within the modeled behavior, the semantics, the assumptions, the property, and the bound.</a:t>
             </a:r>
           </a:p>
         </p:txBody>
@@ -1878,7 +1894,7 @@
           <a:p>
             <a:r>
               <a:rPr lang="en-US" b="0" i="0" dirty="0"/>
-              <a:t>• Debrief with the footer: testing observes executions; it does not observe the executions we didn't run. Coverage tells us where we looked, not that the code is correct.</a:t>
+              <a:t>• Debrief into the closer, which is now a CLASS QUESTION: what can executions we observed tell us about executions we did not observe? Coverage tells us where we looked, not that the code is correct — and the question bridges straight into testing strategies: how do we choose executions, and how do we know whether what happened was correct?</a:t>
             </a:r>
           </a:p>
           <a:p>
@@ -1992,7 +2008,7 @@
           <a:p>
             <a:r>
               <a:rPr lang="en-US" b="0" i="0" dirty="0"/>
-              <a:t>That is the debrief: testing observes executions. It does not observe the executions we didn't run — and a reached line with no consequential assertion is execution, not evidence.</a:t>
+              <a:t>That is the debrief, and the closer turns it into a question: what can executions we observed tell us about executions we did not observe? A reached line with no consequential assertion is execution, not evidence — and how we choose executions, and how we know whether one was wrong, is exactly where we go next.</a:t>
             </a:r>
           </a:p>
         </p:txBody>
@@ -3824,7 +3840,7 @@
           <a:p>
             <a:r>
               <a:rPr lang="en-US" b="0" i="0" dirty="0"/>
-              <a:t>2.5 minutes — MAGE Moment: generated volume is cheap; independence is not.</a:t>
+              <a:t>5 minutes — MAGE Moment rebuilt as a probability exercise: meet the seduction, do the arithmetic, then break the assumption. Four beats; the click order IS the pedagogy.</a:t>
             </a:r>
           </a:p>
           <a:p>
@@ -3833,37 +3849,31 @@
           <a:p>
             <a:r>
               <a:rPr lang="en-US" b="0" i="0" dirty="0"/>
-              <a:t>• The strength-side half of the MAGE argument, and a different lesson from the human-attention one. Say the difference out loud — students conflate them. That one: a review mechanism has finite CAPACITY. This one: generated evidence does not become independent merely because there is more of it.</a:t>
-            </a:r>
-          </a:p>
-          <a:p>
-            <a:r>
-              <a:rPr lang="en-US" b="0" i="0" dirty="0"/>
-              <a:t>• The arithmetic image first: a thousand tests from one mistaken interpretation are not a thousand reasons. They are one reason, repeated.</a:t>
-            </a:r>
-          </a:p>
-          <a:p>
-            <a:r>
-              <a:rPr lang="en-US" b="0" i="0" dirty="0"/>
-              <a:t>• Then the branches: an agent can produce ten thousand tests for the price of a coffee — all generated from ONE interpretation of the specification. If that interpretation is wrong, every one of them is wrong in the same direction, and every one of them passes.</a:t>
-            </a:r>
-          </a:p>
-          <a:p>
-            <a:r>
-              <a:rPr lang="en-US" b="0" i="0" dirty="0"/>
-              <a:t>• Branch B — an independent model, an analysis, a human reading — rests on different assumptions and can catch the shared mistake.</a:t>
-            </a:r>
-          </a:p>
-          <a:p>
-            <a:r>
-              <a:rPr lang="en-US" b="0" i="0" dirty="0"/>
-              <a:t>• The fix is not fewer tests. Generate the ten thousand; then add a second line of evidence that does not inherit the same interpretation.</a:t>
-            </a:r>
-          </a:p>
-          <a:p>
-            <a:r>
-              <a:rPr lang="en-US" b="0" i="0" dirty="0"/>
-              <a:t>• Do not add more aphorisms.</a:t>
+              <a:t>• BEAT 1 (on entry): only the two scenarios and the question. Which gives you more confidence — and how much more? TPS, about a minute. Expect “B, obviously.” Push on how much more. Nothing about independence or shared interpretation is on screen yet; do not leak it.</a:t>
+            </a:r>
+          </a:p>
+          <a:p>
+            <a:r>
+              <a:rPr lang="en-US" b="0" i="0" dirty="0"/>
+              <a:t>• BEAT 2 (clicks 1–2): reveal the deliberately simple model — each test has an independent 1% chance of exposing the defect, if it exists. ASK for P(all n tests miss it) before clicking the arithmetic in. Then the reveal: 0.99^5 ≈ 95.1%, 0.99^5000 ≈ 1.5 × 10⁻²². DO NOT SKIP OR SOFTEN THIS BEAT: under the independence assumption, 5,000 tests really are dramatically stronger evidence. This lecture must never teach “more tests don’t help.” They absolutely can.</a:t>
+            </a:r>
+          </a:p>
+          <a:p>
+            <a:r>
+              <a:rPr lang="en-US" b="0" i="0" dirty="0"/>
+              <a:t>• BEAT 3 (click 3): now suppose all 5,000 tests came from the same mistaken interpretation of the requirement. All pass. What probability did our calculation actually depend on? Not merely p = .01 — it depended critically on tests having INDEPENDENT OPPORTUNITIES to expose the relevant failure. The product formula holds only under the appropriate independence assumptions; with correlated evidence, P(all miss) need not shrink anything like 0.99^n. Do not teach joint distributions. The payload: evidence volume increases confidence according to the information it adds, not merely the number of observations.</a:t>
+            </a:r>
+          </a:p>
+          <a:p>
+            <a:r>
+              <a:rPr lang="en-US" b="0" i="0" dirty="0"/>
+              <a:t>• BEAT 4 (click 4): the two structures. One interpretation fanning into 5,000 tests, versus tests + model check + review resting on different assumptions and failure modes, converging on the claim. This is slide 25’s Independence dimension — could one mistaken assumption undermine it all? — made mathematically concrete. The exercise introduces no new concept.</a:t>
+            </a:r>
+          </a:p>
+          <a:p>
+            <a:r>
+              <a:rPr lang="en-US" b="0" i="0" dirty="0"/>
+              <a:t>• Be careful with the word “independent”: students must not leave thinking different test cases = independent evidence. The relevant independence is independence of the ASSUMPTIONS AND FAILURE MODES by which the evidence could be wrong.</a:t>
             </a:r>
           </a:p>
           <a:p>
@@ -3872,13 +3882,79 @@
           <a:p>
             <a:r>
               <a:rPr lang="en-US" b="0" i="0" dirty="0"/>
-              <a:t>• (moved from slide) GenAI makes evidence volume cheap. It does not automatically make evidence independent.</a:t>
-            </a:r>
-          </a:p>
-          <a:p>
-            <a:r>
-              <a:rPr lang="en-US" b="0" i="0" dirty="0"/>
-              <a:t>• The on-screen model is DELIBERATELY simple, not probabilistic: read the dependency graph (one interpretation fanning out to 10,000 tests vs. an independent model feeding one analysis, all converging on the same claim), then the two equations. 10,000 × E(X) ≠ 10,000 independent E, and the line to remember: N_evidence ≠ N_independent_assumptions. Keep it arithmetic-simple — do not introduce probability notation here.</a:t>
+              <a:t>• (a) What does “different evidence” mean? The coverage-bitmap example — note this is coverage data REPRESENTED AS a bitmap, not a characterization of test inputs. Represent each test’s execution as a bitmap over program lines: bit i = 1 if that execution covered line i.</a:t>
+            </a:r>
+          </a:p>
+          <a:p>
+            <a:r>
+              <a:rPr lang="en-US" b="0" i="0" dirty="0"/>
+              <a:t xml:space="preserve">    T₁: 11110000</a:t>
+            </a:r>
+          </a:p>
+          <a:p>
+            <a:r>
+              <a:rPr lang="en-US" b="0" i="0" dirty="0"/>
+              <a:t xml:space="preserve">    T₂: 00111100</a:t>
+            </a:r>
+          </a:p>
+          <a:p>
+            <a:r>
+              <a:rPr lang="en-US" b="0" i="0" dirty="0"/>
+              <a:t xml:space="preserve">    T₃: 00001111</a:t>
+            </a:r>
+          </a:p>
+          <a:p>
+            <a:r>
+              <a:rPr lang="en-US" b="0" i="0" dirty="0"/>
+              <a:t xml:space="preserve">  OR the bitmaps and the suite collectively exercised all eight lines: 11110000 ∨ 00111100 ∨ 00001111 = 11111111. But be precise about what became stronger: COVERAGE evidence. We obtained evidence about different parts of the implementation. We did not thereby obtain three independent reasons to believe the system is correct — all three tests might still share the same mistaken oracle, specification interpretation, environment assumption, or omitted behavior.</a:t>
+            </a:r>
+          </a:p>
+          <a:p>
+            <a:r>
+              <a:rPr lang="en-US" b="0" i="0" dirty="0"/>
+              <a:t>• (b) The same idea applies to a model — and model coverage is a PEER of line coverage, not an upgrade; do not imply a hierarchy. If the model contains states, transitions, requirements, or architectural interactions, observations can tell us which portions of that model have been exercised; different observations may genuinely increase coverage of the thing being examined. But NEITHER kind of coverage establishes correctness. Coverage asks what we examined; the oracle asks whether we would recognize a problem when we examined it. A suite can cover every line and share one bad oracle. A suite can cover every modeled state or requirement and share one bad oracle. And the model itself may omit the behavior that matters. Different models give different coverage DIMENSIONS; they do not solve the oracle.</a:t>
+            </a:r>
+          </a:p>
+          <a:p>
+            <a:r>
+              <a:rPr lang="en-US" b="0" i="0" dirty="0"/>
+              <a:t>• (c) The three-way distinction, worth saying at the board:</a:t>
+            </a:r>
+          </a:p>
+          <a:p>
+            <a:r>
+              <a:rPr lang="en-US" b="0" i="0" dirty="0"/>
+              <a:t xml:space="preserve">    Coverage: Did we look somewhere new?</a:t>
+            </a:r>
+          </a:p>
+          <a:p>
+            <a:r>
+              <a:rPr lang="en-US" b="0" i="0" dirty="0"/>
+              <a:t xml:space="preserve">    Oracle: Could we tell if what we saw was wrong?</a:t>
+            </a:r>
+          </a:p>
+          <a:p>
+            <a:r>
+              <a:rPr lang="en-US" b="0" i="0" dirty="0"/>
+              <a:t xml:space="preserve">    Independence: Could the same mistake fool both observations?</a:t>
+            </a:r>
+          </a:p>
+          <a:p>
+            <a:r>
+              <a:rPr lang="en-US" b="0" i="0" dirty="0"/>
+              <a:t xml:space="preserve">  The compact intuition to hammer: different executions are not necessarily different reasons. The chain students must not collapse: different executions ≠ different coverage ≠ independent evidence.</a:t>
+            </a:r>
+          </a:p>
+          <a:p>
+            <a:r>
+              <a:rPr lang="en-US" b="0" i="0" dirty="0"/>
+              <a:t>• (d) What the 0.99ⁿ calculation actually assumed. Decompose the per-test probability: P(detect D) = P(exercise D) × P(oracle catches D | exercised). If only 1% of tests reach the defective behavior and the oracle catches it half the time when reached, per-test detection is 0.005, so P(all miss | D) = (1 − 0.005)ⁿ. And if none of the generated tests can reach the defective behavior, P(exercise D) = 0 — then 5 tests versus 5 million tests provides exactly ZERO additional evidence about that defect. Note the precision: “the tests must fully exercise the system” is too strong; each test needn’t exercise the whole system — the sampling/execution model must give the claimed probability of encountering AND detecting this particular defect.</a:t>
+            </a:r>
+          </a:p>
+          <a:p>
+            <a:r>
+              <a:rPr lang="en-US" b="0" i="0" dirty="0"/>
+              <a:t>• (e) The payoff line — why this exercise belongs here: notice how much was smuggled into the phrase “each test has an independent 1% chance of detecting the defect.” The test must have some chance of exercising the defective behavior; the oracle must recognize the failure when it occurs; and the opportunities to detect it must be sufficiently independent. Those are exactly the dimensions from the previous slide. The probability exercise introduces no new concept — it makes slide 25 mathematically concrete. Representativeness then asks whether that test-generation distribution is the one we actually care about.</a:t>
             </a:r>
           </a:p>
           <a:p>
@@ -3888,6 +3964,9 @@
             </a:r>
           </a:p>
           <a:p>
+            <a:endParaRPr lang="en-US"/>
+          </a:p>
+          <a:p>
             <a:r>
               <a:rPr lang="en-US" b="0" i="0" dirty="0"/>
               <a:t>=====</a:t>
@@ -3899,37 +3978,55 @@
           <a:p>
             <a:r>
               <a:rPr lang="en-US" b="0" i="0" dirty="0"/>
-              <a:t>An agent can produce ten thousand tests for the price of a coffee. That is genuinely new, and it is genuinely useful. Now ask the strength question about it.</a:t>
-            </a:r>
-          </a:p>
-          <a:p>
-            <a:r>
-              <a:rPr lang="en-US" b="0" i="0" dirty="0"/>
-              <a:t>A thousand tests from one mistaken interpretation are not a thousand reasons to believe anything. They are one reason, repeated. If the interpretation is wrong, all of them are wrong together — and they all pass.</a:t>
-            </a:r>
-          </a:p>
-          <a:p>
-            <a:r>
-              <a:rPr lang="en-US" b="0" i="0" dirty="0"/>
-              <a:t>Compare the two branches on screen. Branch A: one agent interpretation, ten thousand generated tests, one body of evidence. Branch B: an independent model, an analysis, a human reading of the spec — different assumptions, different failure modes. Two branches catch each other's mistakes; one branch, however voluminous, cannot.</a:t>
-            </a:r>
-          </a:p>
-          <a:p>
-            <a:r>
-              <a:rPr lang="en-US" b="0" i="0" dirty="0"/>
-              <a:t>Be precise about how this differs from the human-attention MAGE Moment, because students merge them. That one was about the CAPACITY of a mechanism: attention runs out. This one is about the STRENGTH of evidence: volume is not independence.</a:t>
-            </a:r>
-          </a:p>
-          <a:p>
-            <a:r>
-              <a:rPr lang="en-US" b="0" i="0" dirty="0"/>
-              <a:t>And the fix is not fewer tests. Generate the ten thousand. Then add a second line of evidence that does not inherit the same interpretation — a different model, a different reader, a property derived from the spec rather than from the agent's reading of it.</a:t>
-            </a:r>
-          </a:p>
-          <a:p>
-            <a:r>
-              <a:rPr lang="en-US" b="0" i="0" dirty="0"/>
-              <a:t>Strong validation triangulates across evidence with meaningfully different assumptions and failure modes.</a:t>
+              <a:t>Two scenarios. Five tests, all passing — or five thousand tests, all passing. Which gives you more confidence in the claim, and how much more? Talk to your neighbor.</a:t>
+            </a:r>
+          </a:p>
+          <a:p>
+            <a:r>
+              <a:rPr lang="en-US" b="0" i="0" dirty="0"/>
+              <a:t>ANIMATE</a:t>
+            </a:r>
+          </a:p>
+          <a:p>
+            <a:r>
+              <a:rPr lang="en-US" b="0" i="0" dirty="0"/>
+              <a:t>Let’s make them actually compute. Suppose each test has an independent one-percent chance of exposing the defect, if the defect exists. If the defect exists — what is the probability that all n tests miss it?</a:t>
+            </a:r>
+          </a:p>
+          <a:p>
+            <a:r>
+              <a:rPr lang="en-US" b="0" i="0" dirty="0"/>
+              <a:t>ANIMATE</a:t>
+            </a:r>
+          </a:p>
+          <a:p>
+            <a:r>
+              <a:rPr lang="en-US" b="0" i="0" dirty="0"/>
+              <a:t>Point ninety-nine to the n. For five tests: about ninety-five percent — the defect probably survives. For five thousand: ten to the minus twenty-two. Under this model, five thousand tests are overwhelmingly stronger evidence. More tests CAN help enormously. Hold that.</a:t>
+            </a:r>
+          </a:p>
+          <a:p>
+            <a:r>
+              <a:rPr lang="en-US" b="0" i="0" dirty="0"/>
+              <a:t>ANIMATE</a:t>
+            </a:r>
+          </a:p>
+          <a:p>
+            <a:r>
+              <a:rPr lang="en-US" b="0" i="0" dirty="0"/>
+              <a:t>Now suppose all five thousand tests were generated from the same mistaken interpretation of the requirement. Every one of them passes. What probability did our calculation actually depend on? Not just the one percent — it depended on each test having an independent opportunity to expose the failure. The product formula only holds under that independence. With correlated evidence, the probability that everything misses need not shrink anything like point-ninety-nine to the n.</a:t>
+            </a:r>
+          </a:p>
+          <a:p>
+            <a:r>
+              <a:rPr lang="en-US" b="0" i="0" dirty="0"/>
+              <a:t>ANIMATE</a:t>
+            </a:r>
+          </a:p>
+          <a:p>
+            <a:r>
+              <a:rPr lang="en-US" b="0" i="0" dirty="0"/>
+              <a:t>Two structures. One interpretation fanning out into five thousand tests — however many leaves, one root, one way to be wrong. Or tests, a model check, and a review, resting on different assumptions with different failure modes, converging on the same claim. That is the independence dimension from the previous slide, made concrete. Evidence volume increases confidence according to the information it adds — not merely the number of observations.</a:t>
             </a:r>
           </a:p>
         </p:txBody>
@@ -5052,6 +5149,398 @@
             <a:r>
               <a:rPr lang="en-US" b="0" i="0" dirty="0"/>
               <a:t>A chain of models growing more precise toward the code. Not a schedule of phases — read it as a structure, not a calendar.</a:t>
+            </a:r>
+          </a:p>
+        </p:txBody>
+      </p:sp>
+    </p:spTree>
+  </p:cSld>
+  <p:clrMapOvr>
+    <a:masterClrMapping/>
+  </p:clrMapOvr>
+</p:notes>
+</file>
+
+<file path=ppt/notesSlides/notesSlide55.xml><?xml version="1.0" encoding="utf-8"?>
+<p:notes xmlns:a="http://schemas.openxmlformats.org/drawingml/2006/main" xmlns:r="http://schemas.openxmlformats.org/officeDocument/2006/relationships" xmlns:p="http://schemas.openxmlformats.org/presentationml/2006/main">
+  <p:cSld>
+    <p:spTree>
+      <p:nvGrpSpPr>
+        <p:cNvPr id="1" name=""/>
+        <p:cNvGrpSpPr/>
+        <p:nvPr/>
+      </p:nvGrpSpPr>
+      <p:grpSpPr>
+        <a:xfrm>
+          <a:off x="0" y="0"/>
+          <a:ext cx="0" cy="0"/>
+          <a:chOff x="0" y="0"/>
+          <a:chExt cx="0" cy="0"/>
+        </a:xfrm>
+      </p:grpSpPr>
+      <p:sp>
+        <p:nvSpPr>
+          <p:cNvPr id="2" name="Slide Image Placeholder 1"/>
+          <p:cNvSpPr>
+            <a:spLocks noGrp="1" noRot="1" noChangeAspect="1"/>
+          </p:cNvSpPr>
+          <p:nvPr>
+            <p:ph type="sldImg" idx="2"/>
+          </p:nvPr>
+        </p:nvSpPr>
+        <p:spPr/>
+      </p:sp>
+      <p:sp>
+        <p:nvSpPr>
+          <p:cNvPr id="3" name="Notes Placeholder 2"/>
+          <p:cNvSpPr>
+            <a:spLocks noGrp="1"/>
+          </p:cNvSpPr>
+          <p:nvPr>
+            <p:ph type="body" sz="quarter" idx="3"/>
+          </p:nvPr>
+        </p:nvSpPr>
+        <p:spPr/>
+        <p:txBody>
+          <a:bodyPr/>
+          <a:lstStyle/>
+          <a:p>
+            <a:r>
+              <a:rPr lang="en-US" b="0" i="0" dirty="0"/>
+              <a:t>30 seconds — Navigation: back at the map. HUMAN JUDGMENT is next.</a:t>
+            </a:r>
+          </a:p>
+          <a:p>
+            <a:endParaRPr lang="en-US"/>
+          </a:p>
+          <a:p>
+            <a:r>
+              <a:rPr lang="en-US" b="0" i="0" dirty="0"/>
+              <a:t>• Do not re-teach the slide. One sentence of re-entry: three ways to obtain evidence — we now take them in turn, starting with human judgment.</a:t>
+            </a:r>
+          </a:p>
+          <a:p>
+            <a:r>
+              <a:rPr lang="en-US" b="0" i="0" dirty="0"/>
+              <a:t>• The two faded columns are deliberate de-emphasis, not a rendering fault; students should register where we are, not re-read the content.</a:t>
+            </a:r>
+          </a:p>
+          <a:p>
+            <a:r>
+              <a:rPr lang="en-US" b="0" i="0" dirty="0"/>
+              <a:t>• Then straight into the PCB search exercise, cold.</a:t>
+            </a:r>
+          </a:p>
+          <a:p>
+            <a:endParaRPr lang="en-US"/>
+          </a:p>
+          <a:p>
+            <a:r>
+              <a:rPr lang="en-US" b="0" i="0" dirty="0"/>
+              <a:t>=====</a:t>
+            </a:r>
+          </a:p>
+          <a:p>
+            <a:endParaRPr lang="en-US"/>
+          </a:p>
+          <a:p>
+            <a:r>
+              <a:rPr lang="en-US" b="0" i="0" dirty="0"/>
+              <a:t>Back at our map. One sentence of re-entry: three ways to obtain evidence — we now take them in turn, starting with human judgment.</a:t>
+            </a:r>
+          </a:p>
+        </p:txBody>
+      </p:sp>
+    </p:spTree>
+  </p:cSld>
+  <p:clrMapOvr>
+    <a:masterClrMapping/>
+  </p:clrMapOvr>
+</p:notes>
+</file>
+
+<file path=ppt/notesSlides/notesSlide56.xml><?xml version="1.0" encoding="utf-8"?>
+<p:notes xmlns:a="http://schemas.openxmlformats.org/drawingml/2006/main" xmlns:r="http://schemas.openxmlformats.org/officeDocument/2006/relationships" xmlns:p="http://schemas.openxmlformats.org/presentationml/2006/main">
+  <p:cSld>
+    <p:spTree>
+      <p:nvGrpSpPr>
+        <p:cNvPr id="1" name=""/>
+        <p:cNvGrpSpPr/>
+        <p:nvPr/>
+      </p:nvGrpSpPr>
+      <p:grpSpPr>
+        <a:xfrm>
+          <a:off x="0" y="0"/>
+          <a:ext cx="0" cy="0"/>
+          <a:chOff x="0" y="0"/>
+          <a:chExt cx="0" cy="0"/>
+        </a:xfrm>
+      </p:grpSpPr>
+      <p:sp>
+        <p:nvSpPr>
+          <p:cNvPr id="2" name="Slide Image Placeholder 1"/>
+          <p:cNvSpPr>
+            <a:spLocks noGrp="1" noRot="1" noChangeAspect="1"/>
+          </p:cNvSpPr>
+          <p:nvPr>
+            <p:ph type="sldImg" idx="2"/>
+          </p:nvPr>
+        </p:nvSpPr>
+        <p:spPr/>
+      </p:sp>
+      <p:sp>
+        <p:nvSpPr>
+          <p:cNvPr id="3" name="Notes Placeholder 2"/>
+          <p:cNvSpPr>
+            <a:spLocks noGrp="1"/>
+          </p:cNvSpPr>
+          <p:nvPr>
+            <p:ph type="body" sz="quarter" idx="3"/>
+          </p:nvPr>
+        </p:nvSpPr>
+        <p:spPr/>
+        <p:txBody>
+          <a:bodyPr/>
+          <a:lstStyle/>
+          <a:p>
+            <a:r>
+              <a:rPr lang="en-US" b="0" i="0" dirty="0"/>
+              <a:t>30 seconds — Navigation: back at the map. REASONING OVER POSSIBLE BEHAVIOR is next.</a:t>
+            </a:r>
+          </a:p>
+          <a:p>
+            <a:endParaRPr lang="en-US"/>
+          </a:p>
+          <a:p>
+            <a:r>
+              <a:rPr lang="en-US" b="0" i="0" dirty="0"/>
+              <a:t>• Do not re-teach the slide. One sentence: human judgment is spent where judgment is required — now the second mechanism, reasoning over possible behavior without running each one.</a:t>
+            </a:r>
+          </a:p>
+          <a:p>
+            <a:r>
+              <a:rPr lang="en-US" b="0" i="0" dirty="0"/>
+              <a:t>• The two faded columns are deliberate de-emphasis, not a rendering fault; students should register where we are, not re-read the content.</a:t>
+            </a:r>
+          </a:p>
+          <a:p>
+            <a:r>
+              <a:rPr lang="en-US" b="0" i="0" dirty="0"/>
+              <a:t>• Then the static-analysis tutorial, abstraction, and model checking.</a:t>
+            </a:r>
+          </a:p>
+          <a:p>
+            <a:endParaRPr lang="en-US"/>
+          </a:p>
+          <a:p>
+            <a:r>
+              <a:rPr lang="en-US" b="0" i="0" dirty="0"/>
+              <a:t>=====</a:t>
+            </a:r>
+          </a:p>
+          <a:p>
+            <a:endParaRPr lang="en-US"/>
+          </a:p>
+          <a:p>
+            <a:r>
+              <a:rPr lang="en-US" b="0" i="0" dirty="0"/>
+              <a:t>Back at our map. One sentence: human judgment is spent where judgment is required — now the second mechanism, reasoning over possible behavior without running each one.</a:t>
+            </a:r>
+          </a:p>
+        </p:txBody>
+      </p:sp>
+    </p:spTree>
+  </p:cSld>
+  <p:clrMapOvr>
+    <a:masterClrMapping/>
+  </p:clrMapOvr>
+</p:notes>
+</file>
+
+<file path=ppt/notesSlides/notesSlide57.xml><?xml version="1.0" encoding="utf-8"?>
+<p:notes xmlns:a="http://schemas.openxmlformats.org/drawingml/2006/main" xmlns:r="http://schemas.openxmlformats.org/officeDocument/2006/relationships" xmlns:p="http://schemas.openxmlformats.org/presentationml/2006/main">
+  <p:cSld>
+    <p:spTree>
+      <p:nvGrpSpPr>
+        <p:cNvPr id="1" name=""/>
+        <p:cNvGrpSpPr/>
+        <p:nvPr/>
+      </p:nvGrpSpPr>
+      <p:grpSpPr>
+        <a:xfrm>
+          <a:off x="0" y="0"/>
+          <a:ext cx="0" cy="0"/>
+          <a:chOff x="0" y="0"/>
+          <a:chExt cx="0" cy="0"/>
+        </a:xfrm>
+      </p:grpSpPr>
+      <p:sp>
+        <p:nvSpPr>
+          <p:cNvPr id="2" name="Slide Image Placeholder 1"/>
+          <p:cNvSpPr>
+            <a:spLocks noGrp="1" noRot="1" noChangeAspect="1"/>
+          </p:cNvSpPr>
+          <p:nvPr>
+            <p:ph type="sldImg" idx="2"/>
+          </p:nvPr>
+        </p:nvSpPr>
+        <p:spPr/>
+      </p:sp>
+      <p:sp>
+        <p:nvSpPr>
+          <p:cNvPr id="3" name="Notes Placeholder 2"/>
+          <p:cNvSpPr>
+            <a:spLocks noGrp="1"/>
+          </p:cNvSpPr>
+          <p:nvPr>
+            <p:ph type="body" sz="quarter" idx="3"/>
+          </p:nvPr>
+        </p:nvSpPr>
+        <p:spPr/>
+        <p:txBody>
+          <a:bodyPr/>
+          <a:lstStyle/>
+          <a:p>
+            <a:r>
+              <a:rPr lang="en-US" b="0" i="0" dirty="0"/>
+              <a:t>30 seconds — Navigation: back at the map. OBSERVING EXECUTION is next.</a:t>
+            </a:r>
+          </a:p>
+          <a:p>
+            <a:endParaRPr lang="en-US"/>
+          </a:p>
+          <a:p>
+            <a:r>
+              <a:rPr lang="en-US" b="0" i="0" dirty="0"/>
+              <a:t>• Do not re-teach the slide. One sentence: we can reason over possible behavior — the third mechanism runs the software and observes selected executions.</a:t>
+            </a:r>
+          </a:p>
+          <a:p>
+            <a:r>
+              <a:rPr lang="en-US" b="0" i="0" dirty="0"/>
+              <a:t>• The two faded columns are deliberate de-emphasis, not a rendering fault; students should register where we are, not re-read the content.</a:t>
+            </a:r>
+          </a:p>
+          <a:p>
+            <a:r>
+              <a:rPr lang="en-US" b="0" i="0" dirty="0"/>
+              <a:t>• Then testing: the four-step flow, environmental fidelity, and the coverage TPS.</a:t>
+            </a:r>
+          </a:p>
+          <a:p>
+            <a:endParaRPr lang="en-US"/>
+          </a:p>
+          <a:p>
+            <a:r>
+              <a:rPr lang="en-US" b="0" i="0" dirty="0"/>
+              <a:t>=====</a:t>
+            </a:r>
+          </a:p>
+          <a:p>
+            <a:endParaRPr lang="en-US"/>
+          </a:p>
+          <a:p>
+            <a:r>
+              <a:rPr lang="en-US" b="0" i="0" dirty="0"/>
+              <a:t>Back at our map. One sentence: we can reason over possible behavior — the third mechanism runs the software and observes selected executions.</a:t>
+            </a:r>
+          </a:p>
+        </p:txBody>
+      </p:sp>
+    </p:spTree>
+  </p:cSld>
+  <p:clrMapOvr>
+    <a:masterClrMapping/>
+  </p:clrMapOvr>
+</p:notes>
+</file>
+
+<file path=ppt/notesSlides/notesSlide58.xml><?xml version="1.0" encoding="utf-8"?>
+<p:notes xmlns:a="http://schemas.openxmlformats.org/drawingml/2006/main" xmlns:r="http://schemas.openxmlformats.org/officeDocument/2006/relationships" xmlns:p="http://schemas.openxmlformats.org/presentationml/2006/main">
+  <p:cSld>
+    <p:spTree>
+      <p:nvGrpSpPr>
+        <p:cNvPr id="1" name=""/>
+        <p:cNvGrpSpPr/>
+        <p:nvPr/>
+      </p:nvGrpSpPr>
+      <p:grpSpPr>
+        <a:xfrm>
+          <a:off x="0" y="0"/>
+          <a:ext cx="0" cy="0"/>
+          <a:chOff x="0" y="0"/>
+          <a:chExt cx="0" cy="0"/>
+        </a:xfrm>
+      </p:grpSpPr>
+      <p:sp>
+        <p:nvSpPr>
+          <p:cNvPr id="2" name="Slide Image Placeholder 1"/>
+          <p:cNvSpPr>
+            <a:spLocks noGrp="1" noRot="1" noChangeAspect="1"/>
+          </p:cNvSpPr>
+          <p:nvPr>
+            <p:ph type="sldImg" idx="2"/>
+          </p:nvPr>
+        </p:nvSpPr>
+        <p:spPr/>
+      </p:sp>
+      <p:sp>
+        <p:nvSpPr>
+          <p:cNvPr id="3" name="Notes Placeholder 2"/>
+          <p:cNvSpPr>
+            <a:spLocks noGrp="1"/>
+          </p:cNvSpPr>
+          <p:nvPr>
+            <p:ph type="body" sz="quarter" idx="3"/>
+          </p:nvPr>
+        </p:nvSpPr>
+        <p:spPr/>
+        <p:txBody>
+          <a:bodyPr/>
+          <a:lstStyle/>
+          <a:p>
+            <a:r>
+              <a:rPr lang="en-US" b="0" i="0" dirty="0"/>
+              <a:t>1 minute — Section opener: Part II, Choosing Evidence.</a:t>
+            </a:r>
+          </a:p>
+          <a:p>
+            <a:endParaRPr lang="en-US"/>
+          </a:p>
+          <a:p>
+            <a:r>
+              <a:rPr lang="en-US" b="0" i="0" dirty="0"/>
+              <a:t>• Before the break, we asked how engineers can obtain evidence at all: human judgment, reasoning over possible behavior, and observing execution. That gives us options. It does not tell us which evidence to seek, how much confidence that evidence deserves, or when it is enough. Those are the questions for the second half.</a:t>
+            </a:r>
+          </a:p>
+          <a:p>
+            <a:r>
+              <a:rPr lang="en-US" b="0" i="0" dirty="0"/>
+              <a:t>• The three faded boxes are what Part I established; the band is the road map for the rest of the lecture: STRATEGY (the oracle, then example-based / property-based / metamorphic / fuzzing / differential), STRENGTH (coverage · detection · representativeness · independence), SUFFICIENCY (margin · containment · consequence) — and then the final decision exercise turns it all into ACTION.</a:t>
+            </a:r>
+          </a:p>
+          <a:p>
+            <a:r>
+              <a:rPr lang="en-US" b="0" i="0" dirty="0"/>
+              <a:t>• Macrostructure to say out loud once: Part I was Obtaining Evidence; Part II is Choosing Evidence.</a:t>
+            </a:r>
+          </a:p>
+          <a:p>
+            <a:endParaRPr lang="en-US"/>
+          </a:p>
+          <a:p>
+            <a:r>
+              <a:rPr lang="en-US" b="0" i="0" dirty="0"/>
+              <a:t>=====</a:t>
+            </a:r>
+          </a:p>
+          <a:p>
+            <a:endParaRPr lang="en-US"/>
+          </a:p>
+          <a:p>
+            <a:r>
+              <a:rPr lang="en-US" b="0" i="0" dirty="0"/>
+              <a:t>Before the break, we asked how engineers can obtain evidence at all: human judgment, reasoning over possible behavior, and observing execution. That gives us options. It does not tell us which evidence to seek, how much confidence that evidence deserves, or when it is enough. Those are the questions for the second half: which strategy, how strong, and when is it sufficient to act.</a:t>
             </a:r>
           </a:p>
         </p:txBody>
@@ -8411,7 +8900,7 @@
             </a:r>
             <a:r>
               <a:rPr lang="en-US" b="1" u="none" dirty="0"/>
-              <a:t>		Details</a:t>
+              <a:t xml:space="preserve">		Details</a:t>
             </a:r>
           </a:p>
           <a:p>
@@ -8588,7 +9077,7 @@
             </a:r>
             <a:r>
               <a:rPr lang="en-US" b="1" u="none" dirty="0"/>
-              <a:t>		Details</a:t>
+              <a:t xml:space="preserve">		Details</a:t>
             </a:r>
           </a:p>
           <a:p>
@@ -9854,7 +10343,7 @@
               <a:defRPr b="0"/>
             </a:pPr>
             <a:r>
-              <a:rPr lang="en-US" sz="2800" b="1" i="0" dirty="0">
+              <a:rPr lang="en-US" sz="2800" b="0" i="0" dirty="0">
                 <a:solidFill>
                   <a:srgbClr val="000000"/>
                 </a:solidFill>
@@ -10964,7 +11453,7 @@
               <a:defRPr b="0"/>
             </a:pPr>
             <a:r>
-              <a:rPr lang="en-US" sz="2800" b="1" i="0" dirty="0">
+              <a:rPr lang="en-US" sz="2800" b="0" i="0" dirty="0">
                 <a:solidFill>
                   <a:srgbClr val="000000"/>
                 </a:solidFill>
@@ -11169,7 +11658,7 @@
                 </a:solidFill>
                 <a:latin typeface="Consolas"/>
               </a:rPr>
-              <a:t> 1</a:t>
+              <a:t xml:space="preserve"> 1</a:t>
             </a:r>
             <a:r>
               <a:rPr lang="en-US" sz="1200" b="0" i="0" dirty="0">
@@ -11178,7 +11667,7 @@
                 </a:solidFill>
                 <a:latin typeface="Consolas"/>
               </a:rPr>
-              <a:t>  def submit_payment(req: PaymentRequest) -&gt; Receipt:</a:t>
+              <a:t xml:space="preserve">  def submit_payment(req: PaymentRequest) -&gt; Receipt:</a:t>
             </a:r>
           </a:p>
         </p:txBody>
@@ -11216,7 +11705,7 @@
                 </a:solidFill>
                 <a:latin typeface="Consolas"/>
               </a:rPr>
-              <a:t> 2</a:t>
+              <a:t xml:space="preserve"> 2</a:t>
             </a:r>
             <a:r>
               <a:rPr lang="en-US" sz="1200" b="0" i="0" dirty="0">
@@ -11225,7 +11714,7 @@
                 </a:solidFill>
                 <a:latin typeface="Consolas"/>
               </a:rPr>
-              <a:t>      idem = req.idempotency_key</a:t>
+              <a:t xml:space="preserve">      idem = req.idempotency_key</a:t>
             </a:r>
           </a:p>
         </p:txBody>
@@ -11263,7 +11752,7 @@
                 </a:solidFill>
                 <a:latin typeface="Consolas"/>
               </a:rPr>
-              <a:t> 3</a:t>
+              <a:t xml:space="preserve"> 3</a:t>
             </a:r>
             <a:r>
               <a:rPr lang="en-US" sz="1200" b="0" i="0" dirty="0">
@@ -11272,7 +11761,7 @@
                 </a:solidFill>
                 <a:latin typeface="Consolas"/>
               </a:rPr>
-              <a:t>      log.info("payment.submit id=%s amount=%s", idem, req.amount)</a:t>
+              <a:t xml:space="preserve">      log.info("payment.submit id=%s amount=%s", idem, req.amount)</a:t>
             </a:r>
           </a:p>
         </p:txBody>
@@ -11310,7 +11799,7 @@
                 </a:solidFill>
                 <a:latin typeface="Consolas"/>
               </a:rPr>
-              <a:t> 4</a:t>
+              <a:t xml:space="preserve"> 4</a:t>
             </a:r>
             <a:r>
               <a:rPr lang="en-US" sz="1200" b="0" i="0" dirty="0">
@@ -11319,7 +11808,7 @@
                 </a:solidFill>
                 <a:latin typeface="Consolas"/>
               </a:rPr>
-              <a:t>  </a:t>
+              <a:t xml:space="preserve">  </a:t>
             </a:r>
           </a:p>
         </p:txBody>
@@ -11357,7 +11846,7 @@
                 </a:solidFill>
                 <a:latin typeface="Consolas"/>
               </a:rPr>
-              <a:t> 5</a:t>
+              <a:t xml:space="preserve"> 5</a:t>
             </a:r>
             <a:r>
               <a:rPr lang="en-US" sz="1200" b="0" i="0" dirty="0">
@@ -11366,7 +11855,7 @@
                 </a:solidFill>
                 <a:latin typeface="Consolas"/>
               </a:rPr>
-              <a:t>      if not auth.may_initiate(req.user, req.account):</a:t>
+              <a:t xml:space="preserve">      if not auth.may_initiate(req.user, req.account):</a:t>
             </a:r>
           </a:p>
         </p:txBody>
@@ -11404,7 +11893,7 @@
                 </a:solidFill>
                 <a:latin typeface="Consolas"/>
               </a:rPr>
-              <a:t> 6</a:t>
+              <a:t xml:space="preserve"> 6</a:t>
             </a:r>
             <a:r>
               <a:rPr lang="en-US" sz="1200" b="0" i="0" dirty="0">
@@ -11413,7 +11902,7 @@
                 </a:solidFill>
                 <a:latin typeface="Consolas"/>
               </a:rPr>
-              <a:t>          raise Forbidden("user may not initiate payments")</a:t>
+              <a:t xml:space="preserve">          raise Forbidden("user may not initiate payments")</a:t>
             </a:r>
           </a:p>
         </p:txBody>
@@ -11451,7 +11940,7 @@
                 </a:solidFill>
                 <a:latin typeface="Consolas"/>
               </a:rPr>
-              <a:t> 7</a:t>
+              <a:t xml:space="preserve"> 7</a:t>
             </a:r>
             <a:r>
               <a:rPr lang="en-US" sz="1200" b="0" i="0" dirty="0">
@@ -11460,7 +11949,7 @@
                 </a:solidFill>
                 <a:latin typeface="Consolas"/>
               </a:rPr>
-              <a:t>      if req.amount &lt;= 0 or req.amount &gt; ACCOUNT_LIMIT:</a:t>
+              <a:t xml:space="preserve">      if req.amount &lt;= 0 or req.amount &gt; ACCOUNT_LIMIT:</a:t>
             </a:r>
           </a:p>
         </p:txBody>
@@ -11498,7 +11987,7 @@
                 </a:solidFill>
                 <a:latin typeface="Consolas"/>
               </a:rPr>
-              <a:t> 8</a:t>
+              <a:t xml:space="preserve"> 8</a:t>
             </a:r>
             <a:r>
               <a:rPr lang="en-US" sz="1200" b="0" i="0" dirty="0">
@@ -11507,7 +11996,7 @@
                 </a:solidFill>
                 <a:latin typeface="Consolas"/>
               </a:rPr>
-              <a:t>          raise InvalidAmount(req.amount)</a:t>
+              <a:t xml:space="preserve">          raise InvalidAmount(req.amount)</a:t>
             </a:r>
           </a:p>
         </p:txBody>
@@ -11545,7 +12034,7 @@
                 </a:solidFill>
                 <a:latin typeface="Consolas"/>
               </a:rPr>
-              <a:t> 9</a:t>
+              <a:t xml:space="preserve"> 9</a:t>
             </a:r>
             <a:r>
               <a:rPr lang="en-US" sz="1200" b="0" i="0" dirty="0">
@@ -11554,7 +12043,7 @@
                 </a:solidFill>
                 <a:latin typeface="Consolas"/>
               </a:rPr>
-              <a:t>  </a:t>
+              <a:t xml:space="preserve">  </a:t>
             </a:r>
           </a:p>
         </p:txBody>
@@ -11601,7 +12090,7 @@
                 </a:solidFill>
                 <a:latin typeface="Consolas"/>
               </a:rPr>
-              <a:t>      with ledger.lock(req.account):</a:t>
+              <a:t xml:space="preserve">      with ledger.lock(req.account):</a:t>
             </a:r>
           </a:p>
         </p:txBody>
@@ -11648,7 +12137,7 @@
                 </a:solidFill>
                 <a:latin typeface="Consolas"/>
               </a:rPr>
-              <a:t>          prior = ledger.find_charge(idem)</a:t>
+              <a:t xml:space="preserve">          prior = ledger.find_charge(idem)</a:t>
             </a:r>
           </a:p>
         </p:txBody>
@@ -11695,7 +12184,7 @@
                 </a:solidFill>
                 <a:latin typeface="Consolas"/>
               </a:rPr>
-              <a:t>          if prior is not None:</a:t>
+              <a:t xml:space="preserve">          if prior is not None:</a:t>
             </a:r>
           </a:p>
         </p:txBody>
@@ -11742,7 +12231,7 @@
                 </a:solidFill>
                 <a:latin typeface="Consolas"/>
               </a:rPr>
-              <a:t>              metrics.incr("payment.duplicate_suppressed")</a:t>
+              <a:t xml:space="preserve">              metrics.incr("payment.duplicate_suppressed")</a:t>
             </a:r>
           </a:p>
         </p:txBody>
@@ -11789,7 +12278,7 @@
                 </a:solidFill>
                 <a:latin typeface="Consolas"/>
               </a:rPr>
-              <a:t>              return prior.receipt</a:t>
+              <a:t xml:space="preserve">              return prior.receipt</a:t>
             </a:r>
           </a:p>
         </p:txBody>
@@ -11836,7 +12325,7 @@
                 </a:solidFill>
                 <a:latin typeface="Consolas"/>
               </a:rPr>
-              <a:t>  </a:t>
+              <a:t xml:space="preserve">  </a:t>
             </a:r>
           </a:p>
         </p:txBody>
@@ -11883,7 +12372,7 @@
                 </a:solidFill>
                 <a:latin typeface="Consolas"/>
               </a:rPr>
-              <a:t>          receipt = provider.charge(req.account, req.amount, idem)</a:t>
+              <a:t xml:space="preserve">          receipt = provider.charge(req.account, req.amount, idem)</a:t>
             </a:r>
           </a:p>
         </p:txBody>
@@ -11930,7 +12419,7 @@
                 </a:solidFill>
                 <a:latin typeface="Consolas"/>
               </a:rPr>
-              <a:t>          ledger.record_charge(idem, receipt)</a:t>
+              <a:t xml:space="preserve">          ledger.record_charge(idem, receipt)</a:t>
             </a:r>
           </a:p>
         </p:txBody>
@@ -11977,7 +12466,7 @@
                 </a:solidFill>
                 <a:latin typeface="Consolas"/>
               </a:rPr>
-              <a:t>          ledger.commit()</a:t>
+              <a:t xml:space="preserve">          ledger.commit()</a:t>
             </a:r>
           </a:p>
         </p:txBody>
@@ -12024,7 +12513,7 @@
                 </a:solidFill>
                 <a:latin typeface="Consolas"/>
               </a:rPr>
-              <a:t>  </a:t>
+              <a:t xml:space="preserve">  </a:t>
             </a:r>
           </a:p>
         </p:txBody>
@@ -12071,7 +12560,7 @@
                 </a:solidFill>
                 <a:latin typeface="Consolas"/>
               </a:rPr>
-              <a:t>      metrics.observe("payment.latency_ms", clock.elapsed_ms())</a:t>
+              <a:t xml:space="preserve">      metrics.observe("payment.latency_ms", clock.elapsed_ms())</a:t>
             </a:r>
           </a:p>
         </p:txBody>
@@ -12118,7 +12607,7 @@
                 </a:solidFill>
                 <a:latin typeface="Consolas"/>
               </a:rPr>
-              <a:t>      log.info("payment.ok id=%s ref=%s", idem, receipt.provider_ref)</a:t>
+              <a:t xml:space="preserve">      log.info("payment.ok id=%s ref=%s", idem, receipt.provider_ref)</a:t>
             </a:r>
           </a:p>
         </p:txBody>
@@ -12165,7 +12654,7 @@
                 </a:solidFill>
                 <a:latin typeface="Consolas"/>
               </a:rPr>
-              <a:t>      return receipt</a:t>
+              <a:t xml:space="preserve">      return receipt</a:t>
             </a:r>
           </a:p>
         </p:txBody>
@@ -12473,7 +12962,7 @@
               <a:defRPr b="0"/>
             </a:pPr>
             <a:r>
-              <a:rPr lang="en-US" sz="2800" b="1" i="0" dirty="0">
+              <a:rPr lang="en-US" sz="2800" b="0" i="0" dirty="0">
                 <a:solidFill>
                   <a:srgbClr val="000000"/>
                 </a:solidFill>
@@ -13304,7 +13793,7 @@
               <a:defRPr b="0"/>
             </a:pPr>
             <a:r>
-              <a:rPr lang="en-US" sz="2800" b="1" i="0" dirty="0">
+              <a:rPr lang="en-US" sz="2800" b="0" i="0" dirty="0">
                 <a:solidFill>
                   <a:srgbClr val="000000"/>
                 </a:solidFill>
@@ -14012,7 +14501,7 @@
               <a:defRPr b="0"/>
             </a:pPr>
             <a:r>
-              <a:rPr lang="en-US" sz="2800" b="1" i="0" dirty="0">
+              <a:rPr lang="en-US" sz="2800" b="0" i="0" dirty="0">
                 <a:solidFill>
                   <a:srgbClr val="000000"/>
                 </a:solidFill>
@@ -14110,7 +14599,7 @@
                 </a:solidFill>
                 <a:latin typeface="Consolas"/>
               </a:rPr>
-              <a:t>    reject()</a:t>
+              <a:t xml:space="preserve">    reject()</a:t>
             </a:r>
           </a:p>
           <a:p>
@@ -15164,12 +15653,12 @@
               <a:defRPr b="0"/>
             </a:pPr>
             <a:r>
-              <a:rPr lang="en-US" sz="2800" b="1" i="0" dirty="0">
+              <a:rPr lang="en-US" sz="2800" b="0" i="0" dirty="0">
                 <a:solidFill>
                   <a:srgbClr val="000000"/>
                 </a:solidFill>
               </a:rPr>
-              <a:t>Abstraction determines what analysis can establish</a:t>
+              <a:t>What analysis inherits from abstraction</a:t>
             </a:r>
           </a:p>
         </p:txBody>
@@ -15565,7 +16054,7 @@
                   <a:srgbClr val="FFFFFF"/>
                 </a:solidFill>
               </a:rPr>
-              <a:t>Static analysis trades concrete execution for mechanical reasoning over an abstraction.</a:t>
+              <a:t>What can we conclude about the real program from what we proved about the abstraction?</a:t>
             </a:r>
           </a:p>
         </p:txBody>
@@ -15986,7 +16475,7 @@
               <a:defRPr b="0"/>
             </a:pPr>
             <a:r>
-              <a:rPr lang="en-US" sz="2800" b="1" i="0" dirty="0">
+              <a:rPr lang="en-US" sz="2800" b="0" i="0" dirty="0">
                 <a:solidFill>
                   <a:srgbClr val="000000"/>
                 </a:solidFill>
@@ -16394,7 +16883,7 @@
                   <a:srgbClr val="555960"/>
                 </a:solidFill>
               </a:rPr>
-              <a:t>  (Holzmann, CACM 2014)</a:t>
+              <a:t xml:space="preserve">  (Holzmann, CACM 2014)</a:t>
             </a:r>
           </a:p>
         </p:txBody>
@@ -16433,7 +16922,7 @@
                   <a:srgbClr val="FFFFFF"/>
                 </a:solidFill>
               </a:rPr>
-              <a:t>“No counterexample up to k” is precise — and it is not correctness.</a:t>
+              <a:t>We found no counterexample up to depth k. What have we actually established?</a:t>
             </a:r>
           </a:p>
         </p:txBody>
@@ -16714,7 +17203,7 @@
               <a:defRPr b="0"/>
             </a:pPr>
             <a:r>
-              <a:rPr lang="en-US" sz="2800" b="1" i="0" dirty="0">
+              <a:rPr lang="en-US" sz="2800" b="0" i="0" dirty="0">
                 <a:solidFill>
                   <a:srgbClr val="000000"/>
                 </a:solidFill>
@@ -17387,7 +17876,7 @@
                   <a:srgbClr val="FFFFFF"/>
                 </a:solidFill>
               </a:rPr>
-              <a:t>Testing observes executions — not the executions we didn’t run.</a:t>
+              <a:t>What can executions we observed tell us about executions we did not observe?</a:t>
             </a:r>
           </a:p>
         </p:txBody>
@@ -17996,7 +18485,7 @@
               <a:defRPr b="0"/>
             </a:pPr>
             <a:r>
-              <a:rPr lang="en-US" sz="2800" b="1" i="0" dirty="0">
+              <a:rPr lang="en-US" sz="2800" b="0" i="0" dirty="0">
                 <a:solidFill>
                   <a:srgbClr val="000000"/>
                 </a:solidFill>
@@ -19137,7 +19626,7 @@
               <a:defRPr b="0"/>
             </a:pPr>
             <a:r>
-              <a:rPr lang="en-US" sz="2800" b="1" i="0" dirty="0">
+              <a:rPr lang="en-US" sz="2800" b="0" i="0" dirty="0">
                 <a:solidFill>
                   <a:srgbClr val="000000"/>
                 </a:solidFill>
@@ -20334,7 +20823,7 @@
               <a:defRPr b="0"/>
             </a:pPr>
             <a:r>
-              <a:rPr lang="en-US" sz="2800" b="1" i="0" dirty="0">
+              <a:rPr lang="en-US" sz="2800" b="0" i="0" dirty="0">
                 <a:solidFill>
                   <a:srgbClr val="000000"/>
                 </a:solidFill>
@@ -21257,7 +21746,7 @@
               <a:defRPr b="0"/>
             </a:pPr>
             <a:r>
-              <a:rPr lang="en-US" sz="2800" b="1" i="0" dirty="0">
+              <a:rPr lang="en-US" sz="2800" b="0" i="0" dirty="0">
                 <a:solidFill>
                   <a:srgbClr val="000000"/>
                 </a:solidFill>
@@ -21915,6 +22404,43 @@
                 </a:solidFill>
               </a:rPr>
               <a:t>A relation between runs is an oracle when no answer is available.</a:t>
+            </a:r>
+          </a:p>
+        </p:txBody>
+      </p:sp>
+      <p:sp>
+        <p:nvSpPr>
+          <p:cNvPr id="910" name="DisciplineLabel"/>
+          <p:cNvSpPr/>
+          <p:nvPr/>
+        </p:nvSpPr>
+        <p:spPr>
+          <a:xfrm>
+            <a:off x="5400000" y="760000"/>
+            <a:ext cx="3466928" cy="230000"/>
+          </a:xfrm>
+          <a:prstGeom prst="rect">
+            <a:avLst/>
+          </a:prstGeom>
+          <a:noFill/>
+          <a:ln>
+            <a:noFill/>
+          </a:ln>
+        </p:spPr>
+        <p:txBody>
+          <a:bodyPr wrap="square" lIns="0" tIns="0" rIns="0" bIns="0" anchor="ctr"/>
+          <a:lstStyle/>
+          <a:p>
+            <a:pPr algn="r">
+              <a:buNone/>
+            </a:pPr>
+            <a:r>
+              <a:rPr lang="en-US" sz="2000" b="0" i="1" dirty="0">
+                <a:solidFill>
+                  <a:srgbClr val="8E6F3E"/>
+                </a:solidFill>
+              </a:rPr>
+              <a:t>“metamorphic testing”</a:t>
             </a:r>
           </a:p>
         </p:txBody>
@@ -22651,7 +23177,7 @@
               <a:defRPr b="0"/>
             </a:pPr>
             <a:r>
-              <a:rPr lang="en-US" sz="2800" b="1" i="0" dirty="0">
+              <a:rPr lang="en-US" sz="2800" b="0" i="0" dirty="0">
                 <a:solidFill>
                   <a:srgbClr val="000000"/>
                 </a:solidFill>
@@ -26112,6 +26638,43 @@
                 </a:solidFill>
               </a:rPr>
               <a:t>Cheap robustness evidence — little about functional correctness.</a:t>
+            </a:r>
+          </a:p>
+        </p:txBody>
+      </p:sp>
+      <p:sp>
+        <p:nvSpPr>
+          <p:cNvPr id="910" name="DisciplineLabel"/>
+          <p:cNvSpPr/>
+          <p:nvPr/>
+        </p:nvSpPr>
+        <p:spPr>
+          <a:xfrm>
+            <a:off x="5400000" y="760000"/>
+            <a:ext cx="3466928" cy="230000"/>
+          </a:xfrm>
+          <a:prstGeom prst="rect">
+            <a:avLst/>
+          </a:prstGeom>
+          <a:noFill/>
+          <a:ln>
+            <a:noFill/>
+          </a:ln>
+        </p:spPr>
+        <p:txBody>
+          <a:bodyPr wrap="square" lIns="0" tIns="0" rIns="0" bIns="0" anchor="ctr"/>
+          <a:lstStyle/>
+          <a:p>
+            <a:pPr algn="r">
+              <a:buNone/>
+            </a:pPr>
+            <a:r>
+              <a:rPr lang="en-US" sz="2000" b="0" i="1" dirty="0">
+                <a:solidFill>
+                  <a:srgbClr val="8E6F3E"/>
+                </a:solidFill>
+              </a:rPr>
+              <a:t>“fuzzing”</a:t>
             </a:r>
           </a:p>
         </p:txBody>
@@ -29945,7 +30508,7 @@
               <a:defRPr b="0"/>
             </a:pPr>
             <a:r>
-              <a:rPr lang="en-US" sz="2800" b="1" i="0" dirty="0">
+              <a:rPr lang="en-US" sz="2800" b="0" i="0" dirty="0">
                 <a:solidFill>
                   <a:srgbClr val="000000"/>
                 </a:solidFill>
@@ -30708,6 +31271,43 @@
                 </a:solidFill>
               </a:rPr>
               <a:t>When answers are costly, compare independent realizations.</a:t>
+            </a:r>
+          </a:p>
+        </p:txBody>
+      </p:sp>
+      <p:sp>
+        <p:nvSpPr>
+          <p:cNvPr id="910" name="DisciplineLabel"/>
+          <p:cNvSpPr/>
+          <p:nvPr/>
+        </p:nvSpPr>
+        <p:spPr>
+          <a:xfrm>
+            <a:off x="5400000" y="760000"/>
+            <a:ext cx="3466928" cy="230000"/>
+          </a:xfrm>
+          <a:prstGeom prst="rect">
+            <a:avLst/>
+          </a:prstGeom>
+          <a:noFill/>
+          <a:ln>
+            <a:noFill/>
+          </a:ln>
+        </p:spPr>
+        <p:txBody>
+          <a:bodyPr wrap="square" lIns="0" tIns="0" rIns="0" bIns="0" anchor="ctr"/>
+          <a:lstStyle/>
+          <a:p>
+            <a:pPr algn="r">
+              <a:buNone/>
+            </a:pPr>
+            <a:r>
+              <a:rPr lang="en-US" sz="2000" b="0" i="1" dirty="0">
+                <a:solidFill>
+                  <a:srgbClr val="8E6F3E"/>
+                </a:solidFill>
+              </a:rPr>
+              <a:t>“differential testing”</a:t>
             </a:r>
           </a:p>
         </p:txBody>
@@ -31479,7 +32079,7 @@
               <a:defRPr b="0"/>
             </a:pPr>
             <a:r>
-              <a:rPr lang="en-US" sz="2800" b="1" i="0" dirty="0">
+              <a:rPr lang="en-US" sz="2800" b="0" i="0" dirty="0">
                 <a:solidFill>
                   <a:srgbClr val="000000"/>
                 </a:solidFill>
@@ -33263,7 +33863,7 @@
               <a:defRPr b="0"/>
             </a:pPr>
             <a:r>
-              <a:rPr lang="en-US" sz="2800" b="1" i="0" dirty="0">
+              <a:rPr lang="en-US" sz="2800" b="0" i="0" dirty="0">
                 <a:solidFill>
                   <a:srgbClr val="000000"/>
                 </a:solidFill>
@@ -34550,12 +35150,12 @@
               <a:defRPr b="0"/>
             </a:pPr>
             <a:r>
-              <a:rPr lang="en-US" sz="2800" b="1" i="0" dirty="0">
+              <a:rPr lang="en-US" sz="2800" b="0" i="0" dirty="0">
                 <a:solidFill>
                   <a:srgbClr val="000000"/>
                 </a:solidFill>
               </a:rPr>
-              <a:t>🧙 MAGE Moment: volume is not independence</a:t>
+              <a:t>Does more data give us more confidence?</a:t>
             </a:r>
           </a:p>
         </p:txBody>
@@ -34577,7 +35177,7 @@
           <a:p>
             <a:fld id="{B7EB45DA-9A0D-DC49-8E02-F30A5DDC21C3}" type="slidenum">
               <a:rPr lang="en-US" smtClean="0"/>
-              <a:t>26</a:t>
+              <a:t>30</a:t>
             </a:fld>
             <a:endParaRPr lang="en-US"/>
           </a:p>
@@ -34585,92 +35185,14 @@
       </p:sp>
       <p:sp>
         <p:nvSpPr>
-          <p:cNvPr id="100" name="X100"/>
+          <p:cNvPr id="100" name="CardA"/>
           <p:cNvSpPr/>
           <p:nvPr/>
         </p:nvSpPr>
         <p:spPr>
           <a:xfrm>
-            <a:off x="900000" y="950000"/>
-            <a:ext cx="2600000" cy="550000"/>
-          </a:xfrm>
-          <a:prstGeom prst="rect">
-            <a:avLst/>
-          </a:prstGeom>
-          <a:solidFill>
-            <a:srgbClr val="8E6F3E"/>
-          </a:solidFill>
-          <a:ln>
-            <a:noFill/>
-          </a:ln>
-        </p:spPr>
-        <p:txBody>
-          <a:bodyPr wrap="square" lIns="45720" tIns="22860" rIns="45720" bIns="22860" anchor="ctr"/>
-          <a:lstStyle/>
-          <a:p>
-            <a:pPr algn="ctr">
-              <a:buNone/>
-            </a:pPr>
-            <a:r>
-              <a:rPr lang="en-US" sz="2200" b="1" i="0" dirty="0">
-                <a:solidFill>
-                  <a:srgbClr val="FFFFFF"/>
-                </a:solidFill>
-              </a:rPr>
-              <a:t>Interpretation X</a:t>
-            </a:r>
-          </a:p>
-        </p:txBody>
-      </p:sp>
-      <p:sp>
-        <p:nvSpPr>
-          <p:cNvPr id="101" name="Y101"/>
-          <p:cNvSpPr/>
-          <p:nvPr/>
-        </p:nvSpPr>
-        <p:spPr>
-          <a:xfrm>
-            <a:off x="5700000" y="950000"/>
-            <a:ext cx="2700000" cy="550000"/>
-          </a:xfrm>
-          <a:prstGeom prst="rect">
-            <a:avLst/>
-          </a:prstGeom>
-          <a:solidFill>
-            <a:srgbClr val="8E6F3E"/>
-          </a:solidFill>
-          <a:ln>
-            <a:noFill/>
-          </a:ln>
-        </p:spPr>
-        <p:txBody>
-          <a:bodyPr wrap="square" lIns="45720" tIns="22860" rIns="45720" bIns="22860" anchor="ctr"/>
-          <a:lstStyle/>
-          <a:p>
-            <a:pPr algn="ctr">
-              <a:buNone/>
-            </a:pPr>
-            <a:r>
-              <a:rPr lang="en-US" sz="2200" b="1" i="0" dirty="0">
-                <a:solidFill>
-                  <a:srgbClr val="FFFFFF"/>
-                </a:solidFill>
-              </a:rPr>
-              <a:t>Independent model Y</a:t>
-            </a:r>
-          </a:p>
-        </p:txBody>
-      </p:sp>
-      <p:sp>
-        <p:nvSpPr>
-          <p:cNvPr id="110" name="T110"/>
-          <p:cNvSpPr/>
-          <p:nvPr/>
-        </p:nvSpPr>
-        <p:spPr>
-          <a:xfrm>
-            <a:off x="350000" y="2150000"/>
-            <a:ext cx="1000000" cy="420000"/>
+            <a:off x="1000000" y="950000"/>
+            <a:ext cx="3200000" cy="1450000"/>
           </a:xfrm>
           <a:prstGeom prst="rect">
             <a:avLst/>
@@ -34685,33 +35207,59 @@
           </a:ln>
         </p:spPr>
         <p:txBody>
-          <a:bodyPr wrap="square" lIns="0" tIns="22860" rIns="0" bIns="22860" anchor="ctr"/>
+          <a:bodyPr wrap="square" lIns="45720" tIns="27432" rIns="45720" bIns="27432" anchor="ctr"/>
           <a:lstStyle/>
           <a:p>
             <a:pPr algn="ctr">
               <a:buNone/>
             </a:pPr>
             <a:r>
+              <a:rPr lang="en-US" sz="2200" b="1" i="0" dirty="0">
+                <a:solidFill>
+                  <a:srgbClr val="5C4826"/>
+                </a:solidFill>
+              </a:rPr>
+              <a:t>SCENARIO A</a:t>
+            </a:r>
+          </a:p>
+          <a:p>
+            <a:pPr algn="ctr">
+              <a:buNone/>
+            </a:pPr>
+            <a:r>
               <a:rPr lang="en-US" sz="2000" b="0" i="0" dirty="0">
                 <a:solidFill>
-                  <a:srgbClr val="5C4826"/>
-                </a:solidFill>
-              </a:rPr>
-              <a:t>test₁</a:t>
-            </a:r>
-          </a:p>
-        </p:txBody>
-      </p:sp>
-      <p:sp>
-        <p:nvSpPr>
-          <p:cNvPr id="111" name="T111"/>
+                  <a:srgbClr val="000000"/>
+                </a:solidFill>
+              </a:rPr>
+              <a:t>5 tests</a:t>
+            </a:r>
+          </a:p>
+          <a:p>
+            <a:pPr algn="ctr">
+              <a:buNone/>
+            </a:pPr>
+            <a:r>
+              <a:rPr lang="en-US" sz="2000" b="0" i="0" dirty="0">
+                <a:solidFill>
+                  <a:srgbClr val="000000"/>
+                </a:solidFill>
+              </a:rPr>
+              <a:t>5 passed</a:t>
+            </a:r>
+          </a:p>
+        </p:txBody>
+      </p:sp>
+      <p:sp>
+        <p:nvSpPr>
+          <p:cNvPr id="101" name="CardB"/>
           <p:cNvSpPr/>
           <p:nvPr/>
         </p:nvSpPr>
         <p:spPr>
           <a:xfrm>
-            <a:off x="1450000" y="2150000"/>
-            <a:ext cx="1000000" cy="420000"/>
+            <a:off x="4950000" y="950000"/>
+            <a:ext cx="3200000" cy="1450000"/>
           </a:xfrm>
           <a:prstGeom prst="rect">
             <a:avLst/>
@@ -34726,33 +35274,1308 @@
           </a:ln>
         </p:spPr>
         <p:txBody>
-          <a:bodyPr wrap="square" lIns="0" tIns="22860" rIns="0" bIns="22860" anchor="ctr"/>
+          <a:bodyPr wrap="square" lIns="45720" tIns="27432" rIns="45720" bIns="27432" anchor="ctr"/>
           <a:lstStyle/>
           <a:p>
             <a:pPr algn="ctr">
               <a:buNone/>
             </a:pPr>
             <a:r>
+              <a:rPr lang="en-US" sz="2200" b="1" i="0" dirty="0">
+                <a:solidFill>
+                  <a:srgbClr val="5C4826"/>
+                </a:solidFill>
+              </a:rPr>
+              <a:t>SCENARIO B</a:t>
+            </a:r>
+          </a:p>
+          <a:p>
+            <a:pPr algn="ctr">
+              <a:buNone/>
+            </a:pPr>
+            <a:r>
               <a:rPr lang="en-US" sz="2000" b="0" i="0" dirty="0">
                 <a:solidFill>
+                  <a:srgbClr val="000000"/>
+                </a:solidFill>
+              </a:rPr>
+              <a:t>5,000 tests</a:t>
+            </a:r>
+          </a:p>
+          <a:p>
+            <a:pPr algn="ctr">
+              <a:buNone/>
+            </a:pPr>
+            <a:r>
+              <a:rPr lang="en-US" sz="2000" b="0" i="0" dirty="0">
+                <a:solidFill>
+                  <a:srgbClr val="000000"/>
+                </a:solidFill>
+              </a:rPr>
+              <a:t>5,000 passed</a:t>
+            </a:r>
+          </a:p>
+        </p:txBody>
+      </p:sp>
+      <p:sp>
+        <p:nvSpPr>
+          <p:cNvPr id="105" name="Prompt105"/>
+          <p:cNvSpPr/>
+          <p:nvPr/>
+        </p:nvSpPr>
+        <p:spPr>
+          <a:xfrm>
+            <a:off x="566928" y="2560000"/>
+            <a:ext cx="8010144" cy="880000"/>
+          </a:xfrm>
+          <a:prstGeom prst="rect">
+            <a:avLst/>
+          </a:prstGeom>
+          <a:solidFill>
+            <a:srgbClr val="FBF8F2"/>
+          </a:solidFill>
+          <a:ln w="19050">
+            <a:solidFill>
+              <a:srgbClr val="5C4826"/>
+            </a:solidFill>
+          </a:ln>
+        </p:spPr>
+        <p:txBody>
+          <a:bodyPr wrap="square" lIns="45720" tIns="27432" rIns="45720" bIns="27432" anchor="ctr"/>
+          <a:lstStyle/>
+          <a:p>
+            <a:pPr algn="ctr">
+              <a:buNone/>
+            </a:pPr>
+            <a:r>
+              <a:rPr lang="en-US" sz="2000" b="1" i="0" dirty="0">
+                <a:solidFill>
                   <a:srgbClr val="5C4826"/>
                 </a:solidFill>
               </a:rPr>
-              <a:t>test₂</a:t>
-            </a:r>
-          </a:p>
-        </p:txBody>
-      </p:sp>
-      <p:sp>
-        <p:nvSpPr>
-          <p:cNvPr id="112" name="T112"/>
+              <a:t>THINK · PAIR · SHARE</a:t>
+            </a:r>
+          </a:p>
+          <a:p>
+            <a:pPr algn="ctr">
+              <a:buNone/>
+            </a:pPr>
+            <a:r>
+              <a:rPr lang="en-US" sz="2200" b="0" i="0" dirty="0">
+                <a:solidFill>
+                  <a:srgbClr val="000000"/>
+                </a:solidFill>
+              </a:rPr>
+              <a:t>Which gives you more confidence in the claim? How much more?</a:t>
+            </a:r>
+          </a:p>
+        </p:txBody>
+      </p:sp>
+      <p:sp>
+        <p:nvSpPr>
+          <p:cNvPr id="200" name="Model200"/>
           <p:cNvSpPr/>
           <p:nvPr/>
         </p:nvSpPr>
         <p:spPr>
           <a:xfrm>
-            <a:off x="2550000" y="2150000"/>
-            <a:ext cx="1000000" cy="420000"/>
+            <a:off x="566928" y="3560000"/>
+            <a:ext cx="8010144" cy="840000"/>
+          </a:xfrm>
+          <a:prstGeom prst="rect">
+            <a:avLst/>
+          </a:prstGeom>
+          <a:noFill/>
+          <a:ln>
+            <a:noFill/>
+          </a:ln>
+        </p:spPr>
+        <p:txBody>
+          <a:bodyPr wrap="square" lIns="45720" tIns="27432" rIns="45720" bIns="27432" anchor="ctr"/>
+          <a:lstStyle/>
+          <a:p>
+            <a:pPr algn="ctr">
+              <a:buNone/>
+            </a:pPr>
+            <a:r>
+              <a:rPr lang="en-US" sz="2000" b="0" i="1" dirty="0">
+                <a:solidFill>
+                  <a:srgbClr val="000000"/>
+                </a:solidFill>
+              </a:rPr>
+              <a:t>Suppose each test has an independent 1% chance of exposing the defect, if the defect exists.</a:t>
+            </a:r>
+          </a:p>
+          <a:p>
+            <a:pPr algn="ctr">
+              <a:buNone/>
+            </a:pPr>
+            <a:r>
+              <a:rPr lang="en-US" sz="2200" b="1" i="0" dirty="0">
+                <a:solidFill>
+                  <a:srgbClr val="000000"/>
+                </a:solidFill>
+              </a:rPr>
+              <a:t>If the defect exists, what is the probability that all n tests miss it?</a:t>
+            </a:r>
+          </a:p>
+        </p:txBody>
+      </p:sp>
+      <p:sp>
+        <p:nvSpPr>
+          <p:cNvPr id="210" name="Math210"/>
+          <p:cNvSpPr/>
+          <p:nvPr/>
+        </p:nvSpPr>
+        <p:spPr>
+          <a:xfrm>
+            <a:off x="566928" y="4480000"/>
+            <a:ext cx="8010144" cy="1260000"/>
+          </a:xfrm>
+          <a:prstGeom prst="rect">
+            <a:avLst/>
+          </a:prstGeom>
+          <a:solidFill>
+            <a:srgbClr val="FBF8F2"/>
+          </a:solidFill>
+          <a:ln w="19050">
+            <a:solidFill>
+              <a:srgbClr val="5C4826"/>
+            </a:solidFill>
+          </a:ln>
+        </p:spPr>
+        <p:txBody>
+          <a:bodyPr wrap="square" lIns="45720" tIns="27432" rIns="45720" bIns="27432" anchor="ctr"/>
+          <a:lstStyle/>
+          <a:p>
+            <a:pPr algn="ctr">
+              <a:buNone/>
+            </a:pPr>
+            <a:r>
+              <a:rPr lang="en-US" sz="2400" b="1" i="0" dirty="0">
+                <a:solidFill>
+                  <a:srgbClr val="5C4826"/>
+                </a:solidFill>
+              </a:rPr>
+              <a:t>P(all miss) = (1 − 0.01)</a:t>
+            </a:r>
+            <a:r>
+              <a:rPr lang="en-US" sz="2400" b="1" i="0" baseline="30000" dirty="0">
+                <a:solidFill>
+                  <a:srgbClr val="5C4826"/>
+                </a:solidFill>
+              </a:rPr>
+              <a:t>n</a:t>
+            </a:r>
+            <a:r>
+              <a:rPr lang="en-US" sz="2400" b="1" i="0" dirty="0">
+                <a:solidFill>
+                  <a:srgbClr val="5C4826"/>
+                </a:solidFill>
+              </a:rPr>
+              <a:t xml:space="preserve"> = 0.99</a:t>
+            </a:r>
+            <a:r>
+              <a:rPr lang="en-US" sz="2400" b="1" i="0" baseline="30000" dirty="0">
+                <a:solidFill>
+                  <a:srgbClr val="5C4826"/>
+                </a:solidFill>
+              </a:rPr>
+              <a:t>n</a:t>
+            </a:r>
+          </a:p>
+          <a:p>
+            <a:pPr algn="ctr">
+              <a:buNone/>
+            </a:pPr>
+            <a:r>
+              <a:rPr lang="en-US" sz="2200" b="0" i="0" dirty="0">
+                <a:solidFill>
+                  <a:srgbClr val="000000"/>
+                </a:solidFill>
+              </a:rPr>
+              <a:t>n = 5:   0.99</a:t>
+            </a:r>
+            <a:r>
+              <a:rPr lang="en-US" sz="2200" b="0" i="0" baseline="30000" dirty="0">
+                <a:solidFill>
+                  <a:srgbClr val="000000"/>
+                </a:solidFill>
+              </a:rPr>
+              <a:t>5</a:t>
+            </a:r>
+            <a:r>
+              <a:rPr lang="en-US" sz="2200" b="0" i="0" dirty="0">
+                <a:solidFill>
+                  <a:srgbClr val="000000"/>
+                </a:solidFill>
+              </a:rPr>
+              <a:t xml:space="preserve"> ≈ 95.1%</a:t>
+            </a:r>
+          </a:p>
+          <a:p>
+            <a:pPr algn="ctr">
+              <a:buNone/>
+            </a:pPr>
+            <a:r>
+              <a:rPr lang="en-US" sz="2200" b="0" i="0" dirty="0">
+                <a:solidFill>
+                  <a:srgbClr val="000000"/>
+                </a:solidFill>
+              </a:rPr>
+              <a:t>n = 5,000:   0.99</a:t>
+            </a:r>
+            <a:r>
+              <a:rPr lang="en-US" sz="2200" b="0" i="0" baseline="30000" dirty="0">
+                <a:solidFill>
+                  <a:srgbClr val="000000"/>
+                </a:solidFill>
+              </a:rPr>
+              <a:t>5000</a:t>
+            </a:r>
+            <a:r>
+              <a:rPr lang="en-US" sz="2200" b="0" i="0" dirty="0">
+                <a:solidFill>
+                  <a:srgbClr val="000000"/>
+                </a:solidFill>
+              </a:rPr>
+              <a:t xml:space="preserve"> ≈ 1.5 × 10</a:t>
+            </a:r>
+            <a:r>
+              <a:rPr lang="en-US" sz="2200" b="0" i="0" baseline="30000" dirty="0">
+                <a:solidFill>
+                  <a:srgbClr val="000000"/>
+                </a:solidFill>
+              </a:rPr>
+              <a:t>−22</a:t>
+            </a:r>
+          </a:p>
+        </p:txBody>
+      </p:sp>
+      <p:sp>
+        <p:nvSpPr>
+          <p:cNvPr id="300" name="Setup300"/>
+          <p:cNvSpPr/>
+          <p:nvPr/>
+        </p:nvSpPr>
+        <p:spPr>
+          <a:xfrm>
+            <a:off x="566928" y="3470000"/>
+            <a:ext cx="8010144" cy="660000"/>
+          </a:xfrm>
+          <a:prstGeom prst="rect">
+            <a:avLst/>
+          </a:prstGeom>
+          <a:noFill/>
+          <a:ln>
+            <a:noFill/>
+          </a:ln>
+        </p:spPr>
+        <p:txBody>
+          <a:bodyPr wrap="square" lIns="45720" tIns="27432" rIns="45720" bIns="27432" anchor="t"/>
+          <a:lstStyle/>
+          <a:p>
+            <a:pPr algn="ctr">
+              <a:buNone/>
+            </a:pPr>
+            <a:r>
+              <a:rPr lang="en-US" sz="2000" b="0" i="1" dirty="0">
+                <a:solidFill>
+                  <a:srgbClr val="000000"/>
+                </a:solidFill>
+              </a:rPr>
+              <a:t>Now suppose all 5,000 tests were generated from the same mistaken interpretation of the requirement.</a:t>
+            </a:r>
+          </a:p>
+        </p:txBody>
+      </p:sp>
+      <p:sp>
+        <p:nvSpPr>
+          <p:cNvPr id="301" name="Wrong301"/>
+          <p:cNvSpPr/>
+          <p:nvPr/>
+        </p:nvSpPr>
+        <p:spPr>
+          <a:xfrm>
+            <a:off x="2972000" y="4200000"/>
+            <a:ext cx="3200000" cy="430000"/>
+          </a:xfrm>
+          <a:prstGeom prst="rect">
+            <a:avLst/>
+          </a:prstGeom>
+          <a:solidFill>
+            <a:srgbClr val="8E6F3E"/>
+          </a:solidFill>
+          <a:ln>
+            <a:noFill/>
+          </a:ln>
+        </p:spPr>
+        <p:txBody>
+          <a:bodyPr wrap="square" lIns="45720" tIns="27432" rIns="45720" bIns="27432" anchor="ctr"/>
+          <a:lstStyle/>
+          <a:p>
+            <a:pPr algn="ctr">
+              <a:buNone/>
+            </a:pPr>
+            <a:r>
+              <a:rPr lang="en-US" sz="2000" b="1" i="0" dirty="0">
+                <a:solidFill>
+                  <a:srgbClr val="FFFFFF"/>
+                </a:solidFill>
+              </a:rPr>
+              <a:t>WRONG INTERPRETATION</a:t>
+            </a:r>
+          </a:p>
+        </p:txBody>
+      </p:sp>
+      <p:sp>
+        <p:nvSpPr>
+          <p:cNvPr id="302" name="Fan300"/>
+          <p:cNvSpPr/>
+          <p:nvPr/>
+        </p:nvSpPr>
+        <p:spPr>
+          <a:xfrm flipH="1">
+            <a:off x="1400000" y="4630000"/>
+            <a:ext cx="3172000" cy="270000"/>
+          </a:xfrm>
+          <a:prstGeom prst="line">
+            <a:avLst/>
+          </a:prstGeom>
+          <a:ln w="12700">
+            <a:solidFill>
+              <a:srgbClr val="8E6F3E"/>
+            </a:solidFill>
+          </a:ln>
+        </p:spPr>
+        <p:txBody>
+          <a:bodyPr/>
+          <a:lstStyle/>
+          <a:p>
+            <a:endParaRPr/>
+          </a:p>
+        </p:txBody>
+      </p:sp>
+      <p:sp>
+        <p:nvSpPr>
+          <p:cNvPr id="303" name="Fan301"/>
+          <p:cNvSpPr/>
+          <p:nvPr/>
+        </p:nvSpPr>
+        <p:spPr>
+          <a:xfrm flipH="1">
+            <a:off x="3000000" y="4630000"/>
+            <a:ext cx="1572000" cy="270000"/>
+          </a:xfrm>
+          <a:prstGeom prst="line">
+            <a:avLst/>
+          </a:prstGeom>
+          <a:ln w="12700">
+            <a:solidFill>
+              <a:srgbClr val="8E6F3E"/>
+            </a:solidFill>
+          </a:ln>
+        </p:spPr>
+        <p:txBody>
+          <a:bodyPr/>
+          <a:lstStyle/>
+          <a:p>
+            <a:endParaRPr/>
+          </a:p>
+        </p:txBody>
+      </p:sp>
+      <p:sp>
+        <p:nvSpPr>
+          <p:cNvPr id="304" name="Fan302"/>
+          <p:cNvSpPr/>
+          <p:nvPr/>
+        </p:nvSpPr>
+        <p:spPr>
+          <a:xfrm>
+            <a:off x="4572000" y="4630000"/>
+            <a:ext cx="1" cy="270000"/>
+          </a:xfrm>
+          <a:prstGeom prst="line">
+            <a:avLst/>
+          </a:prstGeom>
+          <a:ln w="12700">
+            <a:solidFill>
+              <a:srgbClr val="8E6F3E"/>
+            </a:solidFill>
+          </a:ln>
+        </p:spPr>
+        <p:txBody>
+          <a:bodyPr/>
+          <a:lstStyle/>
+          <a:p>
+            <a:endParaRPr/>
+          </a:p>
+        </p:txBody>
+      </p:sp>
+      <p:sp>
+        <p:nvSpPr>
+          <p:cNvPr id="305" name="Fan303"/>
+          <p:cNvSpPr/>
+          <p:nvPr/>
+        </p:nvSpPr>
+        <p:spPr>
+          <a:xfrm>
+            <a:off x="4572000" y="4630000"/>
+            <a:ext cx="1578000" cy="270000"/>
+          </a:xfrm>
+          <a:prstGeom prst="line">
+            <a:avLst/>
+          </a:prstGeom>
+          <a:ln w="12700">
+            <a:solidFill>
+              <a:srgbClr val="8E6F3E"/>
+            </a:solidFill>
+          </a:ln>
+        </p:spPr>
+        <p:txBody>
+          <a:bodyPr/>
+          <a:lstStyle/>
+          <a:p>
+            <a:endParaRPr/>
+          </a:p>
+        </p:txBody>
+      </p:sp>
+      <p:sp>
+        <p:nvSpPr>
+          <p:cNvPr id="306" name="Fan304"/>
+          <p:cNvSpPr/>
+          <p:nvPr/>
+        </p:nvSpPr>
+        <p:spPr>
+          <a:xfrm>
+            <a:off x="4572000" y="4630000"/>
+            <a:ext cx="3178000" cy="270000"/>
+          </a:xfrm>
+          <a:prstGeom prst="line">
+            <a:avLst/>
+          </a:prstGeom>
+          <a:ln w="12700">
+            <a:solidFill>
+              <a:srgbClr val="8E6F3E"/>
+            </a:solidFill>
+          </a:ln>
+        </p:spPr>
+        <p:txBody>
+          <a:bodyPr/>
+          <a:lstStyle/>
+          <a:p>
+            <a:endParaRPr/>
+          </a:p>
+        </p:txBody>
+      </p:sp>
+      <p:sp>
+        <p:nvSpPr>
+          <p:cNvPr id="311" name="TL310"/>
+          <p:cNvSpPr/>
+          <p:nvPr/>
+        </p:nvSpPr>
+        <p:spPr>
+          <a:xfrm>
+            <a:off x="950000" y="4910000"/>
+            <a:ext cx="900000" cy="330000"/>
+          </a:xfrm>
+          <a:prstGeom prst="rect">
+            <a:avLst/>
+          </a:prstGeom>
+          <a:noFill/>
+          <a:ln>
+            <a:noFill/>
+          </a:ln>
+        </p:spPr>
+        <p:txBody>
+          <a:bodyPr wrap="square" lIns="45720" tIns="27432" rIns="45720" bIns="27432" anchor="ctr"/>
+          <a:lstStyle/>
+          <a:p>
+            <a:pPr algn="ctr">
+              <a:buNone/>
+            </a:pPr>
+            <a:r>
+              <a:rPr lang="en-US" sz="2000" b="0" i="0" dirty="0">
+                <a:solidFill>
+                  <a:srgbClr val="000000"/>
+                </a:solidFill>
+              </a:rPr>
+              <a:t>T</a:t>
+            </a:r>
+            <a:r>
+              <a:rPr lang="en-US" sz="2000" b="0" i="0" baseline="-25000" dirty="0">
+                <a:solidFill>
+                  <a:srgbClr val="000000"/>
+                </a:solidFill>
+              </a:rPr>
+              <a:t>1</a:t>
+            </a:r>
+          </a:p>
+        </p:txBody>
+      </p:sp>
+      <p:sp>
+        <p:nvSpPr>
+          <p:cNvPr id="312" name="TL311"/>
+          <p:cNvSpPr/>
+          <p:nvPr/>
+        </p:nvSpPr>
+        <p:spPr>
+          <a:xfrm>
+            <a:off x="2550000" y="4910000"/>
+            <a:ext cx="900000" cy="330000"/>
+          </a:xfrm>
+          <a:prstGeom prst="rect">
+            <a:avLst/>
+          </a:prstGeom>
+          <a:noFill/>
+          <a:ln>
+            <a:noFill/>
+          </a:ln>
+        </p:spPr>
+        <p:txBody>
+          <a:bodyPr wrap="square" lIns="45720" tIns="27432" rIns="45720" bIns="27432" anchor="ctr"/>
+          <a:lstStyle/>
+          <a:p>
+            <a:pPr algn="ctr">
+              <a:buNone/>
+            </a:pPr>
+            <a:r>
+              <a:rPr lang="en-US" sz="2000" b="0" i="0" dirty="0">
+                <a:solidFill>
+                  <a:srgbClr val="000000"/>
+                </a:solidFill>
+              </a:rPr>
+              <a:t>T</a:t>
+            </a:r>
+            <a:r>
+              <a:rPr lang="en-US" sz="2000" b="0" i="0" baseline="-25000" dirty="0">
+                <a:solidFill>
+                  <a:srgbClr val="000000"/>
+                </a:solidFill>
+              </a:rPr>
+              <a:t>2</a:t>
+            </a:r>
+          </a:p>
+        </p:txBody>
+      </p:sp>
+      <p:sp>
+        <p:nvSpPr>
+          <p:cNvPr id="313" name="TL312"/>
+          <p:cNvSpPr/>
+          <p:nvPr/>
+        </p:nvSpPr>
+        <p:spPr>
+          <a:xfrm>
+            <a:off x="4122000" y="4910000"/>
+            <a:ext cx="900000" cy="330000"/>
+          </a:xfrm>
+          <a:prstGeom prst="rect">
+            <a:avLst/>
+          </a:prstGeom>
+          <a:noFill/>
+          <a:ln>
+            <a:noFill/>
+          </a:ln>
+        </p:spPr>
+        <p:txBody>
+          <a:bodyPr wrap="square" lIns="45720" tIns="27432" rIns="45720" bIns="27432" anchor="ctr"/>
+          <a:lstStyle/>
+          <a:p>
+            <a:pPr algn="ctr">
+              <a:buNone/>
+            </a:pPr>
+            <a:r>
+              <a:rPr lang="en-US" sz="2000" b="0" i="0" dirty="0">
+                <a:solidFill>
+                  <a:srgbClr val="000000"/>
+                </a:solidFill>
+              </a:rPr>
+              <a:t>…</a:t>
+            </a:r>
+          </a:p>
+        </p:txBody>
+      </p:sp>
+      <p:sp>
+        <p:nvSpPr>
+          <p:cNvPr id="314" name="TL313"/>
+          <p:cNvSpPr/>
+          <p:nvPr/>
+        </p:nvSpPr>
+        <p:spPr>
+          <a:xfrm>
+            <a:off x="5700000" y="4910000"/>
+            <a:ext cx="900000" cy="330000"/>
+          </a:xfrm>
+          <a:prstGeom prst="rect">
+            <a:avLst/>
+          </a:prstGeom>
+          <a:noFill/>
+          <a:ln>
+            <a:noFill/>
+          </a:ln>
+        </p:spPr>
+        <p:txBody>
+          <a:bodyPr wrap="square" lIns="45720" tIns="27432" rIns="45720" bIns="27432" anchor="ctr"/>
+          <a:lstStyle/>
+          <a:p>
+            <a:pPr algn="ctr">
+              <a:buNone/>
+            </a:pPr>
+            <a:r>
+              <a:rPr lang="en-US" sz="2000" b="0" i="0" dirty="0">
+                <a:solidFill>
+                  <a:srgbClr val="000000"/>
+                </a:solidFill>
+              </a:rPr>
+              <a:t>T</a:t>
+            </a:r>
+            <a:r>
+              <a:rPr lang="en-US" sz="2000" b="0" i="0" baseline="-25000" dirty="0">
+                <a:solidFill>
+                  <a:srgbClr val="000000"/>
+                </a:solidFill>
+              </a:rPr>
+              <a:t>4999</a:t>
+            </a:r>
+          </a:p>
+        </p:txBody>
+      </p:sp>
+      <p:sp>
+        <p:nvSpPr>
+          <p:cNvPr id="315" name="TL314"/>
+          <p:cNvSpPr/>
+          <p:nvPr/>
+        </p:nvSpPr>
+        <p:spPr>
+          <a:xfrm>
+            <a:off x="7300000" y="4910000"/>
+            <a:ext cx="900000" cy="330000"/>
+          </a:xfrm>
+          <a:prstGeom prst="rect">
+            <a:avLst/>
+          </a:prstGeom>
+          <a:noFill/>
+          <a:ln>
+            <a:noFill/>
+          </a:ln>
+        </p:spPr>
+        <p:txBody>
+          <a:bodyPr wrap="square" lIns="45720" tIns="27432" rIns="45720" bIns="27432" anchor="ctr"/>
+          <a:lstStyle/>
+          <a:p>
+            <a:pPr algn="ctr">
+              <a:buNone/>
+            </a:pPr>
+            <a:r>
+              <a:rPr lang="en-US" sz="2000" b="0" i="0" dirty="0">
+                <a:solidFill>
+                  <a:srgbClr val="000000"/>
+                </a:solidFill>
+              </a:rPr>
+              <a:t>T</a:t>
+            </a:r>
+            <a:r>
+              <a:rPr lang="en-US" sz="2000" b="0" i="0" baseline="-25000" dirty="0">
+                <a:solidFill>
+                  <a:srgbClr val="000000"/>
+                </a:solidFill>
+              </a:rPr>
+              <a:t>5000</a:t>
+            </a:r>
+          </a:p>
+        </p:txBody>
+      </p:sp>
+      <p:sp>
+        <p:nvSpPr>
+          <p:cNvPr id="318" name="Ask318"/>
+          <p:cNvSpPr/>
+          <p:nvPr/>
+        </p:nvSpPr>
+        <p:spPr>
+          <a:xfrm>
+            <a:off x="566928" y="5330000"/>
+            <a:ext cx="8010144" cy="1300000"/>
+          </a:xfrm>
+          <a:prstGeom prst="rect">
+            <a:avLst/>
+          </a:prstGeom>
+          <a:noFill/>
+          <a:ln>
+            <a:noFill/>
+          </a:ln>
+        </p:spPr>
+        <p:txBody>
+          <a:bodyPr wrap="square" lIns="45720" tIns="27432" rIns="45720" bIns="27432" anchor="t"/>
+          <a:lstStyle/>
+          <a:p>
+            <a:pPr algn="ctr">
+              <a:buNone/>
+            </a:pPr>
+            <a:r>
+              <a:rPr lang="en-US" sz="2200" b="1" i="0" dirty="0">
+                <a:solidFill>
+                  <a:srgbClr val="000000"/>
+                </a:solidFill>
+              </a:rPr>
+              <a:t xml:space="preserve">All 5,000 pass.</a:t>
+            </a:r>
+          </a:p>
+          <a:p>
+            <a:pPr algn="ctr">
+              <a:buNone/>
+            </a:pPr>
+            <a:r>
+              <a:rPr lang="en-US" sz="2200" b="1" i="0" dirty="0">
+                <a:solidFill>
+                  <a:srgbClr val="000000"/>
+                </a:solidFill>
+              </a:rPr>
+              <a:t xml:space="preserve">What probability did our calculation actually depend on?</a:t>
+            </a:r>
+          </a:p>
+          <a:p>
+            <a:pPr algn="ctr">
+              <a:buNone/>
+            </a:pPr>
+            <a:r>
+              <a:rPr lang="en-US" sz="2000" b="0" i="0" dirty="0">
+                <a:solidFill>
+                  <a:srgbClr val="555960"/>
+                </a:solidFill>
+              </a:rPr>
+              <a:t xml:space="preserve">P(all miss) = ∏</a:t>
+            </a:r>
+            <a:r>
+              <a:rPr lang="en-US" sz="2000" b="0" i="0" baseline="-25000" dirty="0">
+                <a:solidFill>
+                  <a:srgbClr val="555960"/>
+                </a:solidFill>
+              </a:rPr>
+              <a:t xml:space="preserve">i</a:t>
+            </a:r>
+            <a:r>
+              <a:rPr lang="en-US" sz="2000" b="0" i="0" dirty="0">
+                <a:solidFill>
+                  <a:srgbClr val="555960"/>
+                </a:solidFill>
+              </a:rPr>
+              <a:t xml:space="preserve"> P(T</a:t>
+            </a:r>
+            <a:r>
+              <a:rPr lang="en-US" sz="2000" b="0" i="0" baseline="-25000" dirty="0">
+                <a:solidFill>
+                  <a:srgbClr val="555960"/>
+                </a:solidFill>
+              </a:rPr>
+              <a:t xml:space="preserve">i</a:t>
+            </a:r>
+            <a:r>
+              <a:rPr lang="en-US" sz="2000" b="0" i="0" dirty="0">
+                <a:solidFill>
+                  <a:srgbClr val="555960"/>
+                </a:solidFill>
+              </a:rPr>
+              <a:t xml:space="preserve"> misses) — only under independence.</a:t>
+            </a:r>
+          </a:p>
+          <a:p>
+            <a:pPr algn="ctr">
+              <a:buNone/>
+            </a:pPr>
+            <a:r>
+              <a:rPr lang="en-US" sz="2000" b="0" i="0" dirty="0">
+                <a:solidFill>
+                  <a:srgbClr val="555960"/>
+                </a:solidFill>
+              </a:rPr>
+              <a:t xml:space="preserve">With correlated evidence, P(all miss) need not shrink like 0.99</a:t>
+            </a:r>
+            <a:r>
+              <a:rPr lang="en-US" sz="2000" b="0" i="0" baseline="30000" dirty="0">
+                <a:solidFill>
+                  <a:srgbClr val="555960"/>
+                </a:solidFill>
+              </a:rPr>
+              <a:t xml:space="preserve">n</a:t>
+            </a:r>
+            <a:r>
+              <a:rPr lang="en-US" sz="2000" b="0" i="0" dirty="0">
+                <a:solidFill>
+                  <a:srgbClr val="555960"/>
+                </a:solidFill>
+              </a:rPr>
+              <a:t xml:space="preserve">.</a:t>
+            </a:r>
+          </a:p>
+        </p:txBody>
+      </p:sp>
+      <p:sp>
+        <p:nvSpPr>
+          <p:cNvPr id="400" name="OneInterp400"/>
+          <p:cNvSpPr/>
+          <p:nvPr/>
+        </p:nvSpPr>
+        <p:spPr>
+          <a:xfrm>
+            <a:off x="566928" y="3700000"/>
+            <a:ext cx="3300000" cy="430000"/>
+          </a:xfrm>
+          <a:prstGeom prst="rect">
+            <a:avLst/>
+          </a:prstGeom>
+          <a:solidFill>
+            <a:srgbClr val="8E6F3E"/>
+          </a:solidFill>
+          <a:ln>
+            <a:noFill/>
+          </a:ln>
+        </p:spPr>
+        <p:txBody>
+          <a:bodyPr wrap="square" lIns="45720" tIns="27432" rIns="45720" bIns="27432" anchor="ctr"/>
+          <a:lstStyle/>
+          <a:p>
+            <a:pPr algn="ctr">
+              <a:buNone/>
+            </a:pPr>
+            <a:r>
+              <a:rPr lang="en-US" sz="2000" b="1" i="0" dirty="0">
+                <a:solidFill>
+                  <a:srgbClr val="FFFFFF"/>
+                </a:solidFill>
+              </a:rPr>
+              <a:t>ONE INTERPRETATION</a:t>
+            </a:r>
+          </a:p>
+        </p:txBody>
+      </p:sp>
+      <p:sp>
+        <p:nvSpPr>
+          <p:cNvPr id="401" name="LFan400"/>
+          <p:cNvSpPr/>
+          <p:nvPr/>
+        </p:nvSpPr>
+        <p:spPr>
+          <a:xfrm flipH="1">
+            <a:off x="1000000" y="4130000"/>
+            <a:ext cx="1216928" cy="490000"/>
+          </a:xfrm>
+          <a:prstGeom prst="line">
+            <a:avLst/>
+          </a:prstGeom>
+          <a:ln w="12700">
+            <a:solidFill>
+              <a:srgbClr val="8E6F3E"/>
+            </a:solidFill>
+          </a:ln>
+        </p:spPr>
+        <p:txBody>
+          <a:bodyPr/>
+          <a:lstStyle/>
+          <a:p>
+            <a:endParaRPr/>
+          </a:p>
+        </p:txBody>
+      </p:sp>
+      <p:sp>
+        <p:nvSpPr>
+          <p:cNvPr id="402" name="LFan401"/>
+          <p:cNvSpPr/>
+          <p:nvPr/>
+        </p:nvSpPr>
+        <p:spPr>
+          <a:xfrm flipH="1">
+            <a:off x="1610000" y="4130000"/>
+            <a:ext cx="606928" cy="490000"/>
+          </a:xfrm>
+          <a:prstGeom prst="line">
+            <a:avLst/>
+          </a:prstGeom>
+          <a:ln w="12700">
+            <a:solidFill>
+              <a:srgbClr val="8E6F3E"/>
+            </a:solidFill>
+          </a:ln>
+        </p:spPr>
+        <p:txBody>
+          <a:bodyPr/>
+          <a:lstStyle/>
+          <a:p>
+            <a:endParaRPr/>
+          </a:p>
+        </p:txBody>
+      </p:sp>
+      <p:sp>
+        <p:nvSpPr>
+          <p:cNvPr id="403" name="LFan402"/>
+          <p:cNvSpPr/>
+          <p:nvPr/>
+        </p:nvSpPr>
+        <p:spPr>
+          <a:xfrm>
+            <a:off x="2216928" y="4130000"/>
+            <a:ext cx="1" cy="490000"/>
+          </a:xfrm>
+          <a:prstGeom prst="line">
+            <a:avLst/>
+          </a:prstGeom>
+          <a:ln w="12700">
+            <a:solidFill>
+              <a:srgbClr val="8E6F3E"/>
+            </a:solidFill>
+          </a:ln>
+        </p:spPr>
+        <p:txBody>
+          <a:bodyPr/>
+          <a:lstStyle/>
+          <a:p>
+            <a:endParaRPr/>
+          </a:p>
+        </p:txBody>
+      </p:sp>
+      <p:sp>
+        <p:nvSpPr>
+          <p:cNvPr id="404" name="LFan403"/>
+          <p:cNvSpPr/>
+          <p:nvPr/>
+        </p:nvSpPr>
+        <p:spPr>
+          <a:xfrm>
+            <a:off x="2216928" y="4130000"/>
+            <a:ext cx="613072" cy="490000"/>
+          </a:xfrm>
+          <a:prstGeom prst="line">
+            <a:avLst/>
+          </a:prstGeom>
+          <a:ln w="12700">
+            <a:solidFill>
+              <a:srgbClr val="8E6F3E"/>
+            </a:solidFill>
+          </a:ln>
+        </p:spPr>
+        <p:txBody>
+          <a:bodyPr/>
+          <a:lstStyle/>
+          <a:p>
+            <a:endParaRPr/>
+          </a:p>
+        </p:txBody>
+      </p:sp>
+      <p:sp>
+        <p:nvSpPr>
+          <p:cNvPr id="405" name="LFan404"/>
+          <p:cNvSpPr/>
+          <p:nvPr/>
+        </p:nvSpPr>
+        <p:spPr>
+          <a:xfrm>
+            <a:off x="2216928" y="4130000"/>
+            <a:ext cx="1223072" cy="490000"/>
+          </a:xfrm>
+          <a:prstGeom prst="line">
+            <a:avLst/>
+          </a:prstGeom>
+          <a:ln w="12700">
+            <a:solidFill>
+              <a:srgbClr val="8E6F3E"/>
+            </a:solidFill>
+          </a:ln>
+        </p:spPr>
+        <p:txBody>
+          <a:bodyPr/>
+          <a:lstStyle/>
+          <a:p>
+            <a:endParaRPr/>
+          </a:p>
+        </p:txBody>
+      </p:sp>
+      <p:sp>
+        <p:nvSpPr>
+          <p:cNvPr id="406" name="LeftLabel406"/>
+          <p:cNvSpPr/>
+          <p:nvPr/>
+        </p:nvSpPr>
+        <p:spPr>
+          <a:xfrm>
+            <a:off x="566928" y="4620000"/>
+            <a:ext cx="3300000" cy="360000"/>
+          </a:xfrm>
+          <a:prstGeom prst="rect">
+            <a:avLst/>
+          </a:prstGeom>
+          <a:noFill/>
+          <a:ln>
+            <a:noFill/>
+          </a:ln>
+        </p:spPr>
+        <p:txBody>
+          <a:bodyPr wrap="square" lIns="45720" tIns="27432" rIns="45720" bIns="27432" anchor="ctr"/>
+          <a:lstStyle/>
+          <a:p>
+            <a:pPr algn="ctr">
+              <a:buNone/>
+            </a:pPr>
+            <a:r>
+              <a:rPr lang="en-US" sz="2000" b="0" i="0" dirty="0">
+                <a:solidFill>
+                  <a:srgbClr val="000000"/>
+                </a:solidFill>
+              </a:rPr>
+              <a:t>5,000 tests</a:t>
+            </a:r>
+          </a:p>
+        </p:txBody>
+      </p:sp>
+      <p:sp>
+        <p:nvSpPr>
+          <p:cNvPr id="408" name="Vs408"/>
+          <p:cNvSpPr/>
+          <p:nvPr/>
+        </p:nvSpPr>
+        <p:spPr>
+          <a:xfrm>
+            <a:off x="3866928" y="4000000"/>
+            <a:ext cx="1010144" cy="400000"/>
+          </a:xfrm>
+          <a:prstGeom prst="rect">
+            <a:avLst/>
+          </a:prstGeom>
+          <a:noFill/>
+          <a:ln>
+            <a:noFill/>
+          </a:ln>
+        </p:spPr>
+        <p:txBody>
+          <a:bodyPr wrap="square" lIns="45720" tIns="27432" rIns="45720" bIns="27432" anchor="ctr"/>
+          <a:lstStyle/>
+          <a:p>
+            <a:pPr algn="ctr">
+              <a:buNone/>
+            </a:pPr>
+            <a:r>
+              <a:rPr lang="en-US" sz="2200" b="0" i="1" dirty="0">
+                <a:solidFill>
+                  <a:srgbClr val="555960"/>
+                </a:solidFill>
+              </a:rPr>
+              <a:t>vs</a:t>
+            </a:r>
+          </a:p>
+        </p:txBody>
+      </p:sp>
+      <p:sp>
+        <p:nvSpPr>
+          <p:cNvPr id="420" name="RB420"/>
+          <p:cNvSpPr/>
+          <p:nvPr/>
+        </p:nvSpPr>
+        <p:spPr>
+          <a:xfrm>
+            <a:off x="4877072" y="3700000"/>
+            <a:ext cx="1130000" cy="560000"/>
+          </a:xfrm>
+          <a:prstGeom prst="rect">
+            <a:avLst/>
+          </a:prstGeom>
+          <a:solidFill>
+            <a:srgbClr val="8E6F3E"/>
+          </a:solidFill>
+          <a:ln>
+            <a:noFill/>
+          </a:ln>
+        </p:spPr>
+        <p:txBody>
+          <a:bodyPr wrap="square" lIns="18288" tIns="27432" rIns="18288" bIns="27432" anchor="ctr"/>
+          <a:lstStyle/>
+          <a:p>
+            <a:pPr algn="ctr">
+              <a:buNone/>
+            </a:pPr>
+            <a:r>
+              <a:rPr lang="en-US" sz="2000" b="1" i="0" dirty="0">
+                <a:solidFill>
+                  <a:srgbClr val="FFFFFF"/>
+                </a:solidFill>
+              </a:rPr>
+              <a:t>TESTS</a:t>
+            </a:r>
+          </a:p>
+        </p:txBody>
+      </p:sp>
+      <p:sp>
+        <p:nvSpPr>
+          <p:cNvPr id="421" name="RB421"/>
+          <p:cNvSpPr/>
+          <p:nvPr/>
+        </p:nvSpPr>
+        <p:spPr>
+          <a:xfrm>
+            <a:off x="6162072" y="3700000"/>
+            <a:ext cx="1130000" cy="560000"/>
+          </a:xfrm>
+          <a:prstGeom prst="rect">
+            <a:avLst/>
+          </a:prstGeom>
+          <a:solidFill>
+            <a:srgbClr val="8E6F3E"/>
+          </a:solidFill>
+          <a:ln>
+            <a:noFill/>
+          </a:ln>
+        </p:spPr>
+        <p:txBody>
+          <a:bodyPr wrap="square" lIns="18288" tIns="27432" rIns="18288" bIns="27432" anchor="ctr"/>
+          <a:lstStyle/>
+          <a:p>
+            <a:pPr algn="ctr">
+              <a:buNone/>
+            </a:pPr>
+            <a:r>
+              <a:rPr lang="en-US" sz="2000" b="1" i="0" dirty="0">
+                <a:solidFill>
+                  <a:srgbClr val="FFFFFF"/>
+                </a:solidFill>
+              </a:rPr>
+              <a:t>MODEL CHECK</a:t>
+            </a:r>
+          </a:p>
+        </p:txBody>
+      </p:sp>
+      <p:sp>
+        <p:nvSpPr>
+          <p:cNvPr id="422" name="RB422"/>
+          <p:cNvSpPr/>
+          <p:nvPr/>
+        </p:nvSpPr>
+        <p:spPr>
+          <a:xfrm>
+            <a:off x="7447072" y="3700000"/>
+            <a:ext cx="1130000" cy="560000"/>
+          </a:xfrm>
+          <a:prstGeom prst="rect">
+            <a:avLst/>
+          </a:prstGeom>
+          <a:solidFill>
+            <a:srgbClr val="8E6F3E"/>
+          </a:solidFill>
+          <a:ln>
+            <a:noFill/>
+          </a:ln>
+        </p:spPr>
+        <p:txBody>
+          <a:bodyPr wrap="square" lIns="18288" tIns="27432" rIns="18288" bIns="27432" anchor="ctr"/>
+          <a:lstStyle/>
+          <a:p>
+            <a:pPr algn="ctr">
+              <a:buNone/>
+            </a:pPr>
+            <a:r>
+              <a:rPr lang="en-US" sz="2000" b="1" i="0" dirty="0">
+                <a:solidFill>
+                  <a:srgbClr val="FFFFFF"/>
+                </a:solidFill>
+              </a:rPr>
+              <a:t>REVIEW</a:t>
+            </a:r>
+          </a:p>
+        </p:txBody>
+      </p:sp>
+      <p:sp>
+        <p:nvSpPr>
+          <p:cNvPr id="423" name="RArr420"/>
+          <p:cNvSpPr/>
+          <p:nvPr/>
+        </p:nvSpPr>
+        <p:spPr>
+          <a:xfrm>
+            <a:off x="5442072" y="4260000"/>
+            <a:ext cx="1" cy="300000"/>
+          </a:xfrm>
+          <a:prstGeom prst="line">
+            <a:avLst/>
+          </a:prstGeom>
+          <a:ln w="28575">
+            <a:solidFill>
+              <a:srgbClr val="8E6F3E"/>
+            </a:solidFill>
+            <a:tailEnd type="triangle" w="med" len="med"/>
+          </a:ln>
+        </p:spPr>
+        <p:txBody>
+          <a:bodyPr/>
+          <a:lstStyle/>
+          <a:p>
+            <a:endParaRPr/>
+          </a:p>
+        </p:txBody>
+      </p:sp>
+      <p:sp>
+        <p:nvSpPr>
+          <p:cNvPr id="424" name="RArr421"/>
+          <p:cNvSpPr/>
+          <p:nvPr/>
+        </p:nvSpPr>
+        <p:spPr>
+          <a:xfrm>
+            <a:off x="6727072" y="4260000"/>
+            <a:ext cx="1" cy="300000"/>
+          </a:xfrm>
+          <a:prstGeom prst="line">
+            <a:avLst/>
+          </a:prstGeom>
+          <a:ln w="28575">
+            <a:solidFill>
+              <a:srgbClr val="8E6F3E"/>
+            </a:solidFill>
+            <a:tailEnd type="triangle" w="med" len="med"/>
+          </a:ln>
+        </p:spPr>
+        <p:txBody>
+          <a:bodyPr/>
+          <a:lstStyle/>
+          <a:p>
+            <a:endParaRPr/>
+          </a:p>
+        </p:txBody>
+      </p:sp>
+      <p:sp>
+        <p:nvSpPr>
+          <p:cNvPr id="425" name="RArr422"/>
+          <p:cNvSpPr/>
+          <p:nvPr/>
+        </p:nvSpPr>
+        <p:spPr>
+          <a:xfrm>
+            <a:off x="8012072" y="4260000"/>
+            <a:ext cx="1" cy="300000"/>
+          </a:xfrm>
+          <a:prstGeom prst="line">
+            <a:avLst/>
+          </a:prstGeom>
+          <a:ln w="28575">
+            <a:solidFill>
+              <a:srgbClr val="8E6F3E"/>
+            </a:solidFill>
+            <a:tailEnd type="triangle" w="med" len="med"/>
+          </a:ln>
+        </p:spPr>
+        <p:txBody>
+          <a:bodyPr/>
+          <a:lstStyle/>
+          <a:p>
+            <a:endParaRPr/>
+          </a:p>
+        </p:txBody>
+      </p:sp>
+      <p:sp>
+        <p:nvSpPr>
+          <p:cNvPr id="426" name="Assump426"/>
+          <p:cNvSpPr/>
+          <p:nvPr/>
+        </p:nvSpPr>
+        <p:spPr>
+          <a:xfrm>
+            <a:off x="4877072" y="4560000"/>
+            <a:ext cx="3700000" cy="650000"/>
           </a:xfrm>
           <a:prstGeom prst="rect">
             <a:avLst/>
@@ -34767,325 +36590,62 @@
           </a:ln>
         </p:spPr>
         <p:txBody>
-          <a:bodyPr wrap="square" lIns="0" tIns="22860" rIns="0" bIns="22860" anchor="ctr"/>
+          <a:bodyPr wrap="square" lIns="45720" tIns="27432" rIns="45720" bIns="27432" anchor="ctr"/>
           <a:lstStyle/>
           <a:p>
             <a:pPr algn="ctr">
               <a:buNone/>
             </a:pPr>
             <a:r>
-              <a:rPr lang="en-US" sz="2000" b="0" i="0" dirty="0">
-                <a:solidFill>
-                  <a:srgbClr val="5C4826"/>
-                </a:solidFill>
-              </a:rPr>
-              <a:t>…</a:t>
-            </a:r>
-          </a:p>
-        </p:txBody>
-      </p:sp>
-      <p:sp>
-        <p:nvSpPr>
-          <p:cNvPr id="113" name="T113"/>
+              <a:rPr lang="en-US" sz="2000" b="0" i="1" dirty="0">
+                <a:solidFill>
+                  <a:srgbClr val="000000"/>
+                </a:solidFill>
+              </a:rPr>
+              <a:t>different assumptions / failure modes</a:t>
+            </a:r>
+          </a:p>
+        </p:txBody>
+      </p:sp>
+      <p:sp>
+        <p:nvSpPr>
+          <p:cNvPr id="427" name="CLine427"/>
           <p:cNvSpPr/>
           <p:nvPr/>
         </p:nvSpPr>
         <p:spPr>
           <a:xfrm>
-            <a:off x="3650000" y="2150000"/>
-            <a:ext cx="1000000" cy="420000"/>
-          </a:xfrm>
-          <a:prstGeom prst="rect">
-            <a:avLst/>
-          </a:prstGeom>
-          <a:solidFill>
-            <a:srgbClr val="F5F1E8"/>
-          </a:solidFill>
-          <a:ln w="12700">
-            <a:solidFill>
-              <a:srgbClr val="C9B991"/>
-            </a:solidFill>
-          </a:ln>
-        </p:spPr>
-        <p:txBody>
-          <a:bodyPr wrap="square" lIns="0" tIns="22860" rIns="0" bIns="22860" anchor="ctr"/>
-          <a:lstStyle/>
-          <a:p>
-            <a:pPr algn="ctr">
-              <a:buNone/>
-            </a:pPr>
-            <a:r>
-              <a:rPr lang="en-US" sz="2000" b="0" i="0" dirty="0">
-                <a:solidFill>
-                  <a:srgbClr val="5C4826"/>
-                </a:solidFill>
-              </a:rPr>
-              <a:t>test₁₀₀₀₀</a:t>
-            </a:r>
-          </a:p>
-        </p:txBody>
-      </p:sp>
-      <p:sp>
-        <p:nvSpPr>
-          <p:cNvPr id="114" name="T114"/>
-          <p:cNvSpPr/>
-          <p:nvPr/>
-        </p:nvSpPr>
-        <p:spPr>
-          <a:xfrm>
-            <a:off x="6050000" y="2150000"/>
-            <a:ext cx="2000000" cy="420000"/>
-          </a:xfrm>
-          <a:prstGeom prst="rect">
-            <a:avLst/>
-          </a:prstGeom>
-          <a:solidFill>
-            <a:srgbClr val="F5F1E8"/>
-          </a:solidFill>
-          <a:ln w="12700">
-            <a:solidFill>
-              <a:srgbClr val="C9B991"/>
-            </a:solidFill>
-          </a:ln>
-        </p:spPr>
-        <p:txBody>
-          <a:bodyPr wrap="square" lIns="45720" tIns="22860" rIns="45720" bIns="22860" anchor="ctr"/>
-          <a:lstStyle/>
-          <a:p>
-            <a:pPr algn="ctr">
-              <a:buNone/>
-            </a:pPr>
-            <a:r>
-              <a:rPr lang="en-US" sz="2000" b="0" i="0" dirty="0">
-                <a:solidFill>
-                  <a:srgbClr val="5C4826"/>
-                </a:solidFill>
-              </a:rPr>
-              <a:t>analysis</a:t>
-            </a:r>
-          </a:p>
-        </p:txBody>
-      </p:sp>
-      <p:cxnSp>
-        <p:nvCxnSpPr>
-          <p:cNvPr id="120" name="E120"/>
-          <p:cNvCxnSpPr/>
-          <p:nvPr/>
-        </p:nvCxnSpPr>
-        <p:spPr>
-          <a:xfrm flipH="1">
-            <a:off x="850000" y="1500000"/>
-            <a:ext cx="1350000" cy="650000"/>
-          </a:xfrm>
-          <a:prstGeom prst="straightConnector1">
-            <a:avLst/>
-          </a:prstGeom>
-          <a:ln w="19050">
+            <a:off x="6727072" y="5210000"/>
+            <a:ext cx="1" cy="140000"/>
+          </a:xfrm>
+          <a:prstGeom prst="line">
+            <a:avLst/>
+          </a:prstGeom>
+          <a:ln w="28575">
             <a:solidFill>
               <a:srgbClr val="8E6F3E"/>
             </a:solidFill>
-          </a:ln>
-        </p:spPr>
-      </p:cxnSp>
-      <p:cxnSp>
-        <p:nvCxnSpPr>
-          <p:cNvPr id="121" name="E121"/>
-          <p:cNvCxnSpPr/>
-          <p:nvPr/>
-        </p:nvCxnSpPr>
-        <p:spPr>
-          <a:xfrm flipH="1">
-            <a:off x="1950000" y="1500000"/>
-            <a:ext cx="250000" cy="650000"/>
-          </a:xfrm>
-          <a:prstGeom prst="straightConnector1">
-            <a:avLst/>
-          </a:prstGeom>
-          <a:ln w="19050">
-            <a:solidFill>
-              <a:srgbClr val="8E6F3E"/>
-            </a:solidFill>
-          </a:ln>
-        </p:spPr>
-      </p:cxnSp>
-      <p:cxnSp>
-        <p:nvCxnSpPr>
-          <p:cNvPr id="122" name="E122"/>
-          <p:cNvCxnSpPr/>
-          <p:nvPr/>
-        </p:nvCxnSpPr>
-        <p:spPr>
-          <a:xfrm>
-            <a:off x="2200000" y="1500000"/>
-            <a:ext cx="850000" cy="650000"/>
-          </a:xfrm>
-          <a:prstGeom prst="straightConnector1">
-            <a:avLst/>
-          </a:prstGeom>
-          <a:ln w="19050">
-            <a:solidFill>
-              <a:srgbClr val="8E6F3E"/>
-            </a:solidFill>
-          </a:ln>
-        </p:spPr>
-      </p:cxnSp>
-      <p:cxnSp>
-        <p:nvCxnSpPr>
-          <p:cNvPr id="123" name="E123"/>
-          <p:cNvCxnSpPr/>
-          <p:nvPr/>
-        </p:nvCxnSpPr>
-        <p:spPr>
-          <a:xfrm>
-            <a:off x="2200000" y="1500000"/>
-            <a:ext cx="1950000" cy="650000"/>
-          </a:xfrm>
-          <a:prstGeom prst="straightConnector1">
-            <a:avLst/>
-          </a:prstGeom>
-          <a:ln w="19050">
-            <a:solidFill>
-              <a:srgbClr val="8E6F3E"/>
-            </a:solidFill>
-          </a:ln>
-        </p:spPr>
-      </p:cxnSp>
-      <p:cxnSp>
-        <p:nvCxnSpPr>
-          <p:cNvPr id="124" name="E124"/>
-          <p:cNvCxnSpPr/>
-          <p:nvPr/>
-        </p:nvCxnSpPr>
-        <p:spPr>
-          <a:xfrm>
-            <a:off x="7050000" y="1500000"/>
-            <a:ext cx="0" cy="650000"/>
-          </a:xfrm>
-          <a:prstGeom prst="straightConnector1">
-            <a:avLst/>
-          </a:prstGeom>
-          <a:ln w="19050">
-            <a:solidFill>
-              <a:srgbClr val="8E6F3E"/>
-            </a:solidFill>
-          </a:ln>
-        </p:spPr>
-      </p:cxnSp>
-      <p:cxnSp>
-        <p:nvCxnSpPr>
-          <p:cNvPr id="125" name="E125"/>
-          <p:cNvCxnSpPr/>
-          <p:nvPr/>
-        </p:nvCxnSpPr>
-        <p:spPr>
-          <a:xfrm>
-            <a:off x="850000" y="2570000"/>
-            <a:ext cx="0" cy="830000"/>
-          </a:xfrm>
-          <a:prstGeom prst="straightConnector1">
-            <a:avLst/>
-          </a:prstGeom>
-          <a:ln w="19050">
-            <a:solidFill>
-              <a:srgbClr val="8E6F3E"/>
-            </a:solidFill>
-          </a:ln>
-        </p:spPr>
-      </p:cxnSp>
-      <p:cxnSp>
-        <p:nvCxnSpPr>
-          <p:cNvPr id="126" name="E126"/>
-          <p:cNvCxnSpPr/>
-          <p:nvPr/>
-        </p:nvCxnSpPr>
-        <p:spPr>
-          <a:xfrm>
-            <a:off x="1950000" y="2570000"/>
-            <a:ext cx="0" cy="830000"/>
-          </a:xfrm>
-          <a:prstGeom prst="straightConnector1">
-            <a:avLst/>
-          </a:prstGeom>
-          <a:ln w="19050">
-            <a:solidFill>
-              <a:srgbClr val="8E6F3E"/>
-            </a:solidFill>
-          </a:ln>
-        </p:spPr>
-      </p:cxnSp>
-      <p:cxnSp>
-        <p:nvCxnSpPr>
-          <p:cNvPr id="127" name="E127"/>
-          <p:cNvCxnSpPr/>
-          <p:nvPr/>
-        </p:nvCxnSpPr>
-        <p:spPr>
-          <a:xfrm>
-            <a:off x="3050000" y="2570000"/>
-            <a:ext cx="0" cy="830000"/>
-          </a:xfrm>
-          <a:prstGeom prst="straightConnector1">
-            <a:avLst/>
-          </a:prstGeom>
-          <a:ln w="19050">
-            <a:solidFill>
-              <a:srgbClr val="8E6F3E"/>
-            </a:solidFill>
-          </a:ln>
-        </p:spPr>
-      </p:cxnSp>
-      <p:cxnSp>
-        <p:nvCxnSpPr>
-          <p:cNvPr id="128" name="E128"/>
-          <p:cNvCxnSpPr/>
-          <p:nvPr/>
-        </p:nvCxnSpPr>
-        <p:spPr>
-          <a:xfrm>
-            <a:off x="4150000" y="2570000"/>
-            <a:ext cx="0" cy="830000"/>
-          </a:xfrm>
-          <a:prstGeom prst="straightConnector1">
-            <a:avLst/>
-          </a:prstGeom>
-          <a:ln w="19050">
-            <a:solidFill>
-              <a:srgbClr val="8E6F3E"/>
-            </a:solidFill>
-          </a:ln>
-        </p:spPr>
-      </p:cxnSp>
-      <p:cxnSp>
-        <p:nvCxnSpPr>
-          <p:cNvPr id="129" name="E129"/>
-          <p:cNvCxnSpPr/>
-          <p:nvPr/>
-        </p:nvCxnSpPr>
-        <p:spPr>
-          <a:xfrm>
-            <a:off x="7050000" y="2570000"/>
-            <a:ext cx="0" cy="830000"/>
-          </a:xfrm>
-          <a:prstGeom prst="straightConnector1">
-            <a:avLst/>
-          </a:prstGeom>
-          <a:ln w="19050">
-            <a:solidFill>
-              <a:srgbClr val="8E6F3E"/>
-            </a:solidFill>
-          </a:ln>
-        </p:spPr>
-      </p:cxnSp>
-      <p:sp>
-        <p:nvSpPr>
-          <p:cNvPr id="130" name="CLAIM130"/>
+            <a:tailEnd type="triangle" w="med" len="med"/>
+          </a:ln>
+        </p:spPr>
+        <p:txBody>
+          <a:bodyPr/>
+          <a:lstStyle/>
+          <a:p>
+            <a:endParaRPr/>
+          </a:p>
+        </p:txBody>
+      </p:sp>
+      <p:sp>
+        <p:nvSpPr>
+          <p:cNvPr id="428" name="Claim428"/>
           <p:cNvSpPr/>
           <p:nvPr/>
         </p:nvSpPr>
         <p:spPr>
           <a:xfrm>
-            <a:off x="700000" y="3400000"/>
-            <a:ext cx="7800000" cy="480000"/>
+            <a:off x="6127072" y="5350000"/>
+            <a:ext cx="1200000" cy="400000"/>
           </a:xfrm>
           <a:prstGeom prst="rect">
             <a:avLst/>
@@ -35098,147 +36658,19 @@
           </a:ln>
         </p:spPr>
         <p:txBody>
-          <a:bodyPr wrap="square" lIns="45720" tIns="22860" rIns="45720" bIns="22860" anchor="ctr"/>
+          <a:bodyPr wrap="square" lIns="45720" tIns="27432" rIns="45720" bIns="27432" anchor="ctr"/>
           <a:lstStyle/>
           <a:p>
             <a:pPr algn="ctr">
               <a:buNone/>
             </a:pPr>
             <a:r>
-              <a:rPr lang="en-US" sz="2200" b="1" i="0" dirty="0">
+              <a:rPr lang="en-US" sz="2000" b="1" i="0" dirty="0">
                 <a:solidFill>
                   <a:srgbClr val="FFFFFF"/>
                 </a:solidFill>
               </a:rPr>
               <a:t>CLAIM</a:t>
-            </a:r>
-          </a:p>
-        </p:txBody>
-      </p:sp>
-      <p:sp>
-        <p:nvSpPr>
-          <p:cNvPr id="140" name="EQ140"/>
-          <p:cNvSpPr/>
-          <p:nvPr/>
-        </p:nvSpPr>
-        <p:spPr>
-          <a:xfrm>
-            <a:off x="1800000" y="4020000"/>
-            <a:ext cx="5544000" cy="860000"/>
-          </a:xfrm>
-          <a:prstGeom prst="rect">
-            <a:avLst/>
-          </a:prstGeom>
-          <a:solidFill>
-            <a:srgbClr val="FBF8F2"/>
-          </a:solidFill>
-          <a:ln w="19050">
-            <a:solidFill>
-              <a:srgbClr val="5C4826"/>
-            </a:solidFill>
-          </a:ln>
-        </p:spPr>
-        <p:txBody>
-          <a:bodyPr wrap="square" lIns="45720" tIns="22860" rIns="45720" bIns="22860" anchor="ctr"/>
-          <a:lstStyle/>
-          <a:p>
-            <a:pPr algn="ctr">
-              <a:buNone/>
-            </a:pPr>
-            <a:r>
-              <a:rPr lang="en-US" sz="2200" b="0" i="0" dirty="0">
-                <a:solidFill>
-                  <a:srgbClr val="000000"/>
-                </a:solidFill>
-              </a:rPr>
-              <a:t>10,000 × E(X)   ≠   10,000 independent E</a:t>
-            </a:r>
-          </a:p>
-          <a:p>
-            <a:pPr algn="ctr">
-              <a:buNone/>
-            </a:pPr>
-            <a:r>
-              <a:rPr lang="en-US" sz="2400" b="1" i="0" dirty="0">
-                <a:solidFill>
-                  <a:srgbClr val="5C4826"/>
-                </a:solidFill>
-              </a:rPr>
-              <a:t>N</a:t>
-            </a:r>
-            <a:r>
-              <a:rPr lang="en-US" sz="1800" b="1" i="0" baseline="-25000" dirty="0">
-                <a:solidFill>
-                  <a:srgbClr val="5C4826"/>
-                </a:solidFill>
-              </a:rPr>
-              <a:t>evidence</a:t>
-            </a:r>
-            <a:r>
-              <a:rPr lang="en-US" sz="2400" b="1" i="0" dirty="0">
-                <a:solidFill>
-                  <a:srgbClr val="5C4826"/>
-                </a:solidFill>
-              </a:rPr>
-              <a:t>  ≠  N</a:t>
-            </a:r>
-            <a:r>
-              <a:rPr lang="en-US" sz="1800" b="1" i="0" baseline="-25000" dirty="0">
-                <a:solidFill>
-                  <a:srgbClr val="5C4826"/>
-                </a:solidFill>
-              </a:rPr>
-              <a:t>independent assumptions</a:t>
-            </a:r>
-          </a:p>
-        </p:txBody>
-      </p:sp>
-      <p:sp>
-        <p:nvSpPr>
-          <p:cNvPr id="141" name="T140"/>
-          <p:cNvSpPr/>
-          <p:nvPr/>
-        </p:nvSpPr>
-        <p:spPr>
-          <a:xfrm>
-            <a:off x="274320" y="4900000"/>
-            <a:ext cx="8595360" cy="720000"/>
-          </a:xfrm>
-          <a:prstGeom prst="rect">
-            <a:avLst/>
-          </a:prstGeom>
-          <a:noFill/>
-          <a:ln>
-            <a:noFill/>
-          </a:ln>
-        </p:spPr>
-        <p:txBody>
-          <a:bodyPr wrap="square" lIns="45720" tIns="22860" rIns="45720" bIns="22860" anchor="ctr"/>
-          <a:lstStyle/>
-          <a:p>
-            <a:pPr algn="ctr">
-              <a:buNone/>
-            </a:pPr>
-            <a:r>
-              <a:rPr lang="en-US" sz="2000" b="0" i="0" dirty="0">
-                <a:solidFill>
-                  <a:srgbClr val="000000"/>
-                </a:solidFill>
-              </a:rPr>
-              <a:t>A thousand tests from one mistaken interpretation are one reason, repeated.</a:t>
-            </a:r>
-          </a:p>
-          <a:p>
-            <a:pPr algn="ctr">
-              <a:buNone/>
-            </a:pPr>
-            <a:r>
-              <a:rPr lang="en-US" sz="2000" b="0" i="0" dirty="0">
-                <a:solidFill>
-                  <a:srgbClr val="000000"/>
-                </a:solidFill>
-              </a:rPr>
-              <a:t>Two branches on different assumptions can catch each other’s mistakes.</a:t>
             </a:r>
           </a:p>
         </p:txBody>
@@ -35251,8 +36683,8 @@
         </p:nvSpPr>
         <p:spPr>
           <a:xfrm>
-            <a:off x="274320" y="5687568"/>
-            <a:ext cx="8595360" cy="768096"/>
+            <a:off x="274320" y="5852160"/>
+            <a:ext cx="8595360" cy="566928"/>
           </a:xfrm>
           <a:prstGeom prst="rect">
             <a:avLst/>
@@ -35265,7 +36697,7 @@
           </a:ln>
         </p:spPr>
         <p:txBody>
-          <a:bodyPr wrap="square" lIns="91440" tIns="45720" rIns="91440" bIns="45720" anchor="ctr"/>
+          <a:bodyPr wrap="square" lIns="45720" tIns="27432" rIns="45720" bIns="27432" anchor="ctr"/>
           <a:lstStyle/>
           <a:p>
             <a:pPr algn="ctr">
@@ -35300,6 +36732,1788 @@
   <p:clrMapOvr>
     <a:masterClrMapping/>
   </p:clrMapOvr>
+  <p:timing>
+    <p:tnLst>
+      <p:par>
+        <p:cTn id="1" dur="indefinite" restart="never" nodeType="tmRoot">
+          <p:childTnLst>
+            <p:seq concurrent="1" nextAc="seek">
+              <p:cTn id="2" dur="indefinite" nodeType="mainSeq">
+                <p:childTnLst>
+                  <p:par>
+                    <p:cTn id="6" fill="hold">
+                      <p:stCondLst>
+                        <p:cond delay="indefinite"/>
+                      </p:stCondLst>
+                      <p:childTnLst>
+                        <p:par>
+                          <p:cTn id="7" fill="hold">
+                            <p:stCondLst>
+                              <p:cond delay="0"/>
+                            </p:stCondLst>
+                            <p:childTnLst>
+                              <p:par>
+                                <p:cTn id="3" presetID="10" presetClass="entr" presetSubtype="0" fill="hold" nodeType="clickEffect">
+                                  <p:stCondLst>
+                                    <p:cond delay="0"/>
+                                  </p:stCondLst>
+                                  <p:childTnLst>
+                                    <p:set>
+                                      <p:cBhvr>
+                                        <p:cTn id="5" dur="1" fill="hold">
+                                          <p:stCondLst>
+                                            <p:cond delay="0"/>
+                                          </p:stCondLst>
+                                        </p:cTn>
+                                        <p:tgtEl>
+                                          <p:spTgt spid="200"/>
+                                        </p:tgtEl>
+                                        <p:attrNameLst>
+                                          <p:attrName>style.visibility</p:attrName>
+                                        </p:attrNameLst>
+                                      </p:cBhvr>
+                                      <p:to>
+                                        <p:strVal val="visible"/>
+                                      </p:to>
+                                    </p:set>
+                                    <p:animEffect transition="in" filter="fade">
+                                      <p:cBhvr>
+                                        <p:cTn id="4" dur="500"/>
+                                        <p:tgtEl>
+                                          <p:spTgt spid="200"/>
+                                        </p:tgtEl>
+                                      </p:cBhvr>
+                                    </p:animEffect>
+                                  </p:childTnLst>
+                                </p:cTn>
+                              </p:par>
+                            </p:childTnLst>
+                          </p:cTn>
+                        </p:par>
+                      </p:childTnLst>
+                    </p:cTn>
+                  </p:par>
+                  <p:par>
+                    <p:cTn id="11" fill="hold">
+                      <p:stCondLst>
+                        <p:cond delay="indefinite"/>
+                      </p:stCondLst>
+                      <p:childTnLst>
+                        <p:par>
+                          <p:cTn id="12" fill="hold">
+                            <p:stCondLst>
+                              <p:cond delay="0"/>
+                            </p:stCondLst>
+                            <p:childTnLst>
+                              <p:par>
+                                <p:cTn id="8" presetID="10" presetClass="entr" presetSubtype="0" fill="hold" nodeType="clickEffect">
+                                  <p:stCondLst>
+                                    <p:cond delay="0"/>
+                                  </p:stCondLst>
+                                  <p:childTnLst>
+                                    <p:set>
+                                      <p:cBhvr>
+                                        <p:cTn id="10" dur="1" fill="hold">
+                                          <p:stCondLst>
+                                            <p:cond delay="0"/>
+                                          </p:stCondLst>
+                                        </p:cTn>
+                                        <p:tgtEl>
+                                          <p:spTgt spid="210"/>
+                                        </p:tgtEl>
+                                        <p:attrNameLst>
+                                          <p:attrName>style.visibility</p:attrName>
+                                        </p:attrNameLst>
+                                      </p:cBhvr>
+                                      <p:to>
+                                        <p:strVal val="visible"/>
+                                      </p:to>
+                                    </p:set>
+                                    <p:animEffect transition="in" filter="fade">
+                                      <p:cBhvr>
+                                        <p:cTn id="9" dur="500"/>
+                                        <p:tgtEl>
+                                          <p:spTgt spid="210"/>
+                                        </p:tgtEl>
+                                      </p:cBhvr>
+                                    </p:animEffect>
+                                  </p:childTnLst>
+                                </p:cTn>
+                              </p:par>
+                            </p:childTnLst>
+                          </p:cTn>
+                        </p:par>
+                      </p:childTnLst>
+                    </p:cTn>
+                  </p:par>
+                  <p:par>
+                    <p:cTn id="58" fill="hold">
+                      <p:stCondLst>
+                        <p:cond delay="indefinite"/>
+                      </p:stCondLst>
+                      <p:childTnLst>
+                        <p:par>
+                          <p:cTn id="59" fill="hold">
+                            <p:stCondLst>
+                              <p:cond delay="0"/>
+                            </p:stCondLst>
+                            <p:childTnLst>
+                              <p:par>
+                                <p:cTn id="13" presetID="10" presetClass="exit" presetSubtype="0" fill="hold" nodeType="clickEffect">
+                                  <p:stCondLst>
+                                    <p:cond delay="0"/>
+                                  </p:stCondLst>
+                                  <p:childTnLst>
+                                    <p:animEffect transition="out" filter="fade">
+                                      <p:cBhvr>
+                                        <p:cTn id="14" dur="400"/>
+                                        <p:tgtEl>
+                                          <p:spTgt spid="200"/>
+                                        </p:tgtEl>
+                                      </p:cBhvr>
+                                    </p:animEffect>
+                                    <p:set>
+                                      <p:cBhvr>
+                                        <p:cTn id="15" dur="1" fill="hold">
+                                          <p:stCondLst>
+                                            <p:cond delay="399"/>
+                                          </p:stCondLst>
+                                        </p:cTn>
+                                        <p:tgtEl>
+                                          <p:spTgt spid="200"/>
+                                        </p:tgtEl>
+                                        <p:attrNameLst>
+                                          <p:attrName>style.visibility</p:attrName>
+                                        </p:attrNameLst>
+                                      </p:cBhvr>
+                                      <p:to>
+                                        <p:strVal val="hidden"/>
+                                      </p:to>
+                                    </p:set>
+                                  </p:childTnLst>
+                                </p:cTn>
+                              </p:par>
+                              <p:par>
+                                <p:cTn id="16" presetID="10" presetClass="exit" presetSubtype="0" fill="hold" nodeType="withEffect">
+                                  <p:stCondLst>
+                                    <p:cond delay="0"/>
+                                  </p:stCondLst>
+                                  <p:childTnLst>
+                                    <p:animEffect transition="out" filter="fade">
+                                      <p:cBhvr>
+                                        <p:cTn id="17" dur="400"/>
+                                        <p:tgtEl>
+                                          <p:spTgt spid="210"/>
+                                        </p:tgtEl>
+                                      </p:cBhvr>
+                                    </p:animEffect>
+                                    <p:set>
+                                      <p:cBhvr>
+                                        <p:cTn id="18" dur="1" fill="hold">
+                                          <p:stCondLst>
+                                            <p:cond delay="399"/>
+                                          </p:stCondLst>
+                                        </p:cTn>
+                                        <p:tgtEl>
+                                          <p:spTgt spid="210"/>
+                                        </p:tgtEl>
+                                        <p:attrNameLst>
+                                          <p:attrName>style.visibility</p:attrName>
+                                        </p:attrNameLst>
+                                      </p:cBhvr>
+                                      <p:to>
+                                        <p:strVal val="hidden"/>
+                                      </p:to>
+                                    </p:set>
+                                  </p:childTnLst>
+                                </p:cTn>
+                              </p:par>
+                              <p:par>
+                                <p:cTn id="19" presetID="10" presetClass="entr" presetSubtype="0" fill="hold" nodeType="withEffect">
+                                  <p:stCondLst>
+                                    <p:cond delay="0"/>
+                                  </p:stCondLst>
+                                  <p:childTnLst>
+                                    <p:set>
+                                      <p:cBhvr>
+                                        <p:cTn id="21" dur="1" fill="hold">
+                                          <p:stCondLst>
+                                            <p:cond delay="0"/>
+                                          </p:stCondLst>
+                                        </p:cTn>
+                                        <p:tgtEl>
+                                          <p:spTgt spid="300"/>
+                                        </p:tgtEl>
+                                        <p:attrNameLst>
+                                          <p:attrName>style.visibility</p:attrName>
+                                        </p:attrNameLst>
+                                      </p:cBhvr>
+                                      <p:to>
+                                        <p:strVal val="visible"/>
+                                      </p:to>
+                                    </p:set>
+                                    <p:animEffect transition="in" filter="fade">
+                                      <p:cBhvr>
+                                        <p:cTn id="20" dur="500"/>
+                                        <p:tgtEl>
+                                          <p:spTgt spid="300"/>
+                                        </p:tgtEl>
+                                      </p:cBhvr>
+                                    </p:animEffect>
+                                  </p:childTnLst>
+                                </p:cTn>
+                              </p:par>
+                              <p:par>
+                                <p:cTn id="22" presetID="10" presetClass="entr" presetSubtype="0" fill="hold" nodeType="withEffect">
+                                  <p:stCondLst>
+                                    <p:cond delay="0"/>
+                                  </p:stCondLst>
+                                  <p:childTnLst>
+                                    <p:set>
+                                      <p:cBhvr>
+                                        <p:cTn id="24" dur="1" fill="hold">
+                                          <p:stCondLst>
+                                            <p:cond delay="0"/>
+                                          </p:stCondLst>
+                                        </p:cTn>
+                                        <p:tgtEl>
+                                          <p:spTgt spid="301"/>
+                                        </p:tgtEl>
+                                        <p:attrNameLst>
+                                          <p:attrName>style.visibility</p:attrName>
+                                        </p:attrNameLst>
+                                      </p:cBhvr>
+                                      <p:to>
+                                        <p:strVal val="visible"/>
+                                      </p:to>
+                                    </p:set>
+                                    <p:animEffect transition="in" filter="fade">
+                                      <p:cBhvr>
+                                        <p:cTn id="23" dur="500"/>
+                                        <p:tgtEl>
+                                          <p:spTgt spid="301"/>
+                                        </p:tgtEl>
+                                      </p:cBhvr>
+                                    </p:animEffect>
+                                  </p:childTnLst>
+                                </p:cTn>
+                              </p:par>
+                              <p:par>
+                                <p:cTn id="25" presetID="10" presetClass="entr" presetSubtype="0" fill="hold" nodeType="withEffect">
+                                  <p:stCondLst>
+                                    <p:cond delay="0"/>
+                                  </p:stCondLst>
+                                  <p:childTnLst>
+                                    <p:set>
+                                      <p:cBhvr>
+                                        <p:cTn id="27" dur="1" fill="hold">
+                                          <p:stCondLst>
+                                            <p:cond delay="0"/>
+                                          </p:stCondLst>
+                                        </p:cTn>
+                                        <p:tgtEl>
+                                          <p:spTgt spid="302"/>
+                                        </p:tgtEl>
+                                        <p:attrNameLst>
+                                          <p:attrName>style.visibility</p:attrName>
+                                        </p:attrNameLst>
+                                      </p:cBhvr>
+                                      <p:to>
+                                        <p:strVal val="visible"/>
+                                      </p:to>
+                                    </p:set>
+                                    <p:animEffect transition="in" filter="fade">
+                                      <p:cBhvr>
+                                        <p:cTn id="26" dur="500"/>
+                                        <p:tgtEl>
+                                          <p:spTgt spid="302"/>
+                                        </p:tgtEl>
+                                      </p:cBhvr>
+                                    </p:animEffect>
+                                  </p:childTnLst>
+                                </p:cTn>
+                              </p:par>
+                              <p:par>
+                                <p:cTn id="28" presetID="10" presetClass="entr" presetSubtype="0" fill="hold" nodeType="withEffect">
+                                  <p:stCondLst>
+                                    <p:cond delay="0"/>
+                                  </p:stCondLst>
+                                  <p:childTnLst>
+                                    <p:set>
+                                      <p:cBhvr>
+                                        <p:cTn id="30" dur="1" fill="hold">
+                                          <p:stCondLst>
+                                            <p:cond delay="0"/>
+                                          </p:stCondLst>
+                                        </p:cTn>
+                                        <p:tgtEl>
+                                          <p:spTgt spid="303"/>
+                                        </p:tgtEl>
+                                        <p:attrNameLst>
+                                          <p:attrName>style.visibility</p:attrName>
+                                        </p:attrNameLst>
+                                      </p:cBhvr>
+                                      <p:to>
+                                        <p:strVal val="visible"/>
+                                      </p:to>
+                                    </p:set>
+                                    <p:animEffect transition="in" filter="fade">
+                                      <p:cBhvr>
+                                        <p:cTn id="29" dur="500"/>
+                                        <p:tgtEl>
+                                          <p:spTgt spid="303"/>
+                                        </p:tgtEl>
+                                      </p:cBhvr>
+                                    </p:animEffect>
+                                  </p:childTnLst>
+                                </p:cTn>
+                              </p:par>
+                              <p:par>
+                                <p:cTn id="31" presetID="10" presetClass="entr" presetSubtype="0" fill="hold" nodeType="withEffect">
+                                  <p:stCondLst>
+                                    <p:cond delay="0"/>
+                                  </p:stCondLst>
+                                  <p:childTnLst>
+                                    <p:set>
+                                      <p:cBhvr>
+                                        <p:cTn id="33" dur="1" fill="hold">
+                                          <p:stCondLst>
+                                            <p:cond delay="0"/>
+                                          </p:stCondLst>
+                                        </p:cTn>
+                                        <p:tgtEl>
+                                          <p:spTgt spid="304"/>
+                                        </p:tgtEl>
+                                        <p:attrNameLst>
+                                          <p:attrName>style.visibility</p:attrName>
+                                        </p:attrNameLst>
+                                      </p:cBhvr>
+                                      <p:to>
+                                        <p:strVal val="visible"/>
+                                      </p:to>
+                                    </p:set>
+                                    <p:animEffect transition="in" filter="fade">
+                                      <p:cBhvr>
+                                        <p:cTn id="32" dur="500"/>
+                                        <p:tgtEl>
+                                          <p:spTgt spid="304"/>
+                                        </p:tgtEl>
+                                      </p:cBhvr>
+                                    </p:animEffect>
+                                  </p:childTnLst>
+                                </p:cTn>
+                              </p:par>
+                              <p:par>
+                                <p:cTn id="34" presetID="10" presetClass="entr" presetSubtype="0" fill="hold" nodeType="withEffect">
+                                  <p:stCondLst>
+                                    <p:cond delay="0"/>
+                                  </p:stCondLst>
+                                  <p:childTnLst>
+                                    <p:set>
+                                      <p:cBhvr>
+                                        <p:cTn id="36" dur="1" fill="hold">
+                                          <p:stCondLst>
+                                            <p:cond delay="0"/>
+                                          </p:stCondLst>
+                                        </p:cTn>
+                                        <p:tgtEl>
+                                          <p:spTgt spid="305"/>
+                                        </p:tgtEl>
+                                        <p:attrNameLst>
+                                          <p:attrName>style.visibility</p:attrName>
+                                        </p:attrNameLst>
+                                      </p:cBhvr>
+                                      <p:to>
+                                        <p:strVal val="visible"/>
+                                      </p:to>
+                                    </p:set>
+                                    <p:animEffect transition="in" filter="fade">
+                                      <p:cBhvr>
+                                        <p:cTn id="35" dur="500"/>
+                                        <p:tgtEl>
+                                          <p:spTgt spid="305"/>
+                                        </p:tgtEl>
+                                      </p:cBhvr>
+                                    </p:animEffect>
+                                  </p:childTnLst>
+                                </p:cTn>
+                              </p:par>
+                              <p:par>
+                                <p:cTn id="37" presetID="10" presetClass="entr" presetSubtype="0" fill="hold" nodeType="withEffect">
+                                  <p:stCondLst>
+                                    <p:cond delay="0"/>
+                                  </p:stCondLst>
+                                  <p:childTnLst>
+                                    <p:set>
+                                      <p:cBhvr>
+                                        <p:cTn id="39" dur="1" fill="hold">
+                                          <p:stCondLst>
+                                            <p:cond delay="0"/>
+                                          </p:stCondLst>
+                                        </p:cTn>
+                                        <p:tgtEl>
+                                          <p:spTgt spid="306"/>
+                                        </p:tgtEl>
+                                        <p:attrNameLst>
+                                          <p:attrName>style.visibility</p:attrName>
+                                        </p:attrNameLst>
+                                      </p:cBhvr>
+                                      <p:to>
+                                        <p:strVal val="visible"/>
+                                      </p:to>
+                                    </p:set>
+                                    <p:animEffect transition="in" filter="fade">
+                                      <p:cBhvr>
+                                        <p:cTn id="38" dur="500"/>
+                                        <p:tgtEl>
+                                          <p:spTgt spid="306"/>
+                                        </p:tgtEl>
+                                      </p:cBhvr>
+                                    </p:animEffect>
+                                  </p:childTnLst>
+                                </p:cTn>
+                              </p:par>
+                              <p:par>
+                                <p:cTn id="40" presetID="10" presetClass="entr" presetSubtype="0" fill="hold" nodeType="withEffect">
+                                  <p:stCondLst>
+                                    <p:cond delay="0"/>
+                                  </p:stCondLst>
+                                  <p:childTnLst>
+                                    <p:set>
+                                      <p:cBhvr>
+                                        <p:cTn id="42" dur="1" fill="hold">
+                                          <p:stCondLst>
+                                            <p:cond delay="0"/>
+                                          </p:stCondLst>
+                                        </p:cTn>
+                                        <p:tgtEl>
+                                          <p:spTgt spid="311"/>
+                                        </p:tgtEl>
+                                        <p:attrNameLst>
+                                          <p:attrName>style.visibility</p:attrName>
+                                        </p:attrNameLst>
+                                      </p:cBhvr>
+                                      <p:to>
+                                        <p:strVal val="visible"/>
+                                      </p:to>
+                                    </p:set>
+                                    <p:animEffect transition="in" filter="fade">
+                                      <p:cBhvr>
+                                        <p:cTn id="41" dur="500"/>
+                                        <p:tgtEl>
+                                          <p:spTgt spid="311"/>
+                                        </p:tgtEl>
+                                      </p:cBhvr>
+                                    </p:animEffect>
+                                  </p:childTnLst>
+                                </p:cTn>
+                              </p:par>
+                              <p:par>
+                                <p:cTn id="43" presetID="10" presetClass="entr" presetSubtype="0" fill="hold" nodeType="withEffect">
+                                  <p:stCondLst>
+                                    <p:cond delay="0"/>
+                                  </p:stCondLst>
+                                  <p:childTnLst>
+                                    <p:set>
+                                      <p:cBhvr>
+                                        <p:cTn id="45" dur="1" fill="hold">
+                                          <p:stCondLst>
+                                            <p:cond delay="0"/>
+                                          </p:stCondLst>
+                                        </p:cTn>
+                                        <p:tgtEl>
+                                          <p:spTgt spid="312"/>
+                                        </p:tgtEl>
+                                        <p:attrNameLst>
+                                          <p:attrName>style.visibility</p:attrName>
+                                        </p:attrNameLst>
+                                      </p:cBhvr>
+                                      <p:to>
+                                        <p:strVal val="visible"/>
+                                      </p:to>
+                                    </p:set>
+                                    <p:animEffect transition="in" filter="fade">
+                                      <p:cBhvr>
+                                        <p:cTn id="44" dur="500"/>
+                                        <p:tgtEl>
+                                          <p:spTgt spid="312"/>
+                                        </p:tgtEl>
+                                      </p:cBhvr>
+                                    </p:animEffect>
+                                  </p:childTnLst>
+                                </p:cTn>
+                              </p:par>
+                              <p:par>
+                                <p:cTn id="46" presetID="10" presetClass="entr" presetSubtype="0" fill="hold" nodeType="withEffect">
+                                  <p:stCondLst>
+                                    <p:cond delay="0"/>
+                                  </p:stCondLst>
+                                  <p:childTnLst>
+                                    <p:set>
+                                      <p:cBhvr>
+                                        <p:cTn id="48" dur="1" fill="hold">
+                                          <p:stCondLst>
+                                            <p:cond delay="0"/>
+                                          </p:stCondLst>
+                                        </p:cTn>
+                                        <p:tgtEl>
+                                          <p:spTgt spid="313"/>
+                                        </p:tgtEl>
+                                        <p:attrNameLst>
+                                          <p:attrName>style.visibility</p:attrName>
+                                        </p:attrNameLst>
+                                      </p:cBhvr>
+                                      <p:to>
+                                        <p:strVal val="visible"/>
+                                      </p:to>
+                                    </p:set>
+                                    <p:animEffect transition="in" filter="fade">
+                                      <p:cBhvr>
+                                        <p:cTn id="47" dur="500"/>
+                                        <p:tgtEl>
+                                          <p:spTgt spid="313"/>
+                                        </p:tgtEl>
+                                      </p:cBhvr>
+                                    </p:animEffect>
+                                  </p:childTnLst>
+                                </p:cTn>
+                              </p:par>
+                              <p:par>
+                                <p:cTn id="49" presetID="10" presetClass="entr" presetSubtype="0" fill="hold" nodeType="withEffect">
+                                  <p:stCondLst>
+                                    <p:cond delay="0"/>
+                                  </p:stCondLst>
+                                  <p:childTnLst>
+                                    <p:set>
+                                      <p:cBhvr>
+                                        <p:cTn id="51" dur="1" fill="hold">
+                                          <p:stCondLst>
+                                            <p:cond delay="0"/>
+                                          </p:stCondLst>
+                                        </p:cTn>
+                                        <p:tgtEl>
+                                          <p:spTgt spid="314"/>
+                                        </p:tgtEl>
+                                        <p:attrNameLst>
+                                          <p:attrName>style.visibility</p:attrName>
+                                        </p:attrNameLst>
+                                      </p:cBhvr>
+                                      <p:to>
+                                        <p:strVal val="visible"/>
+                                      </p:to>
+                                    </p:set>
+                                    <p:animEffect transition="in" filter="fade">
+                                      <p:cBhvr>
+                                        <p:cTn id="50" dur="500"/>
+                                        <p:tgtEl>
+                                          <p:spTgt spid="314"/>
+                                        </p:tgtEl>
+                                      </p:cBhvr>
+                                    </p:animEffect>
+                                  </p:childTnLst>
+                                </p:cTn>
+                              </p:par>
+                              <p:par>
+                                <p:cTn id="52" presetID="10" presetClass="entr" presetSubtype="0" fill="hold" nodeType="withEffect">
+                                  <p:stCondLst>
+                                    <p:cond delay="0"/>
+                                  </p:stCondLst>
+                                  <p:childTnLst>
+                                    <p:set>
+                                      <p:cBhvr>
+                                        <p:cTn id="54" dur="1" fill="hold">
+                                          <p:stCondLst>
+                                            <p:cond delay="0"/>
+                                          </p:stCondLst>
+                                        </p:cTn>
+                                        <p:tgtEl>
+                                          <p:spTgt spid="315"/>
+                                        </p:tgtEl>
+                                        <p:attrNameLst>
+                                          <p:attrName>style.visibility</p:attrName>
+                                        </p:attrNameLst>
+                                      </p:cBhvr>
+                                      <p:to>
+                                        <p:strVal val="visible"/>
+                                      </p:to>
+                                    </p:set>
+                                    <p:animEffect transition="in" filter="fade">
+                                      <p:cBhvr>
+                                        <p:cTn id="53" dur="500"/>
+                                        <p:tgtEl>
+                                          <p:spTgt spid="315"/>
+                                        </p:tgtEl>
+                                      </p:cBhvr>
+                                    </p:animEffect>
+                                  </p:childTnLst>
+                                </p:cTn>
+                              </p:par>
+                              <p:par>
+                                <p:cTn id="55" presetID="10" presetClass="entr" presetSubtype="0" fill="hold" nodeType="withEffect">
+                                  <p:stCondLst>
+                                    <p:cond delay="0"/>
+                                  </p:stCondLst>
+                                  <p:childTnLst>
+                                    <p:set>
+                                      <p:cBhvr>
+                                        <p:cTn id="57" dur="1" fill="hold">
+                                          <p:stCondLst>
+                                            <p:cond delay="0"/>
+                                          </p:stCondLst>
+                                        </p:cTn>
+                                        <p:tgtEl>
+                                          <p:spTgt spid="318"/>
+                                        </p:tgtEl>
+                                        <p:attrNameLst>
+                                          <p:attrName>style.visibility</p:attrName>
+                                        </p:attrNameLst>
+                                      </p:cBhvr>
+                                      <p:to>
+                                        <p:strVal val="visible"/>
+                                      </p:to>
+                                    </p:set>
+                                    <p:animEffect transition="in" filter="fade">
+                                      <p:cBhvr>
+                                        <p:cTn id="56" dur="500"/>
+                                        <p:tgtEl>
+                                          <p:spTgt spid="318"/>
+                                        </p:tgtEl>
+                                      </p:cBhvr>
+                                    </p:animEffect>
+                                  </p:childTnLst>
+                                </p:cTn>
+                              </p:par>
+                            </p:childTnLst>
+                          </p:cTn>
+                        </p:par>
+                      </p:childTnLst>
+                    </p:cTn>
+                  </p:par>
+                  <p:par>
+                    <p:cTn id="153" fill="hold">
+                      <p:stCondLst>
+                        <p:cond delay="indefinite"/>
+                      </p:stCondLst>
+                      <p:childTnLst>
+                        <p:par>
+                          <p:cTn id="154" fill="hold">
+                            <p:stCondLst>
+                              <p:cond delay="0"/>
+                            </p:stCondLst>
+                            <p:childTnLst>
+                              <p:par>
+                                <p:cTn id="60" presetID="10" presetClass="exit" presetSubtype="0" fill="hold" nodeType="clickEffect">
+                                  <p:stCondLst>
+                                    <p:cond delay="0"/>
+                                  </p:stCondLst>
+                                  <p:childTnLst>
+                                    <p:animEffect transition="out" filter="fade">
+                                      <p:cBhvr>
+                                        <p:cTn id="61" dur="400"/>
+                                        <p:tgtEl>
+                                          <p:spTgt spid="300"/>
+                                        </p:tgtEl>
+                                      </p:cBhvr>
+                                    </p:animEffect>
+                                    <p:set>
+                                      <p:cBhvr>
+                                        <p:cTn id="62" dur="1" fill="hold">
+                                          <p:stCondLst>
+                                            <p:cond delay="399"/>
+                                          </p:stCondLst>
+                                        </p:cTn>
+                                        <p:tgtEl>
+                                          <p:spTgt spid="300"/>
+                                        </p:tgtEl>
+                                        <p:attrNameLst>
+                                          <p:attrName>style.visibility</p:attrName>
+                                        </p:attrNameLst>
+                                      </p:cBhvr>
+                                      <p:to>
+                                        <p:strVal val="hidden"/>
+                                      </p:to>
+                                    </p:set>
+                                  </p:childTnLst>
+                                </p:cTn>
+                              </p:par>
+                              <p:par>
+                                <p:cTn id="63" presetID="10" presetClass="exit" presetSubtype="0" fill="hold" nodeType="withEffect">
+                                  <p:stCondLst>
+                                    <p:cond delay="0"/>
+                                  </p:stCondLst>
+                                  <p:childTnLst>
+                                    <p:animEffect transition="out" filter="fade">
+                                      <p:cBhvr>
+                                        <p:cTn id="64" dur="400"/>
+                                        <p:tgtEl>
+                                          <p:spTgt spid="301"/>
+                                        </p:tgtEl>
+                                      </p:cBhvr>
+                                    </p:animEffect>
+                                    <p:set>
+                                      <p:cBhvr>
+                                        <p:cTn id="65" dur="1" fill="hold">
+                                          <p:stCondLst>
+                                            <p:cond delay="399"/>
+                                          </p:stCondLst>
+                                        </p:cTn>
+                                        <p:tgtEl>
+                                          <p:spTgt spid="301"/>
+                                        </p:tgtEl>
+                                        <p:attrNameLst>
+                                          <p:attrName>style.visibility</p:attrName>
+                                        </p:attrNameLst>
+                                      </p:cBhvr>
+                                      <p:to>
+                                        <p:strVal val="hidden"/>
+                                      </p:to>
+                                    </p:set>
+                                  </p:childTnLst>
+                                </p:cTn>
+                              </p:par>
+                              <p:par>
+                                <p:cTn id="66" presetID="10" presetClass="exit" presetSubtype="0" fill="hold" nodeType="withEffect">
+                                  <p:stCondLst>
+                                    <p:cond delay="0"/>
+                                  </p:stCondLst>
+                                  <p:childTnLst>
+                                    <p:animEffect transition="out" filter="fade">
+                                      <p:cBhvr>
+                                        <p:cTn id="67" dur="400"/>
+                                        <p:tgtEl>
+                                          <p:spTgt spid="302"/>
+                                        </p:tgtEl>
+                                      </p:cBhvr>
+                                    </p:animEffect>
+                                    <p:set>
+                                      <p:cBhvr>
+                                        <p:cTn id="68" dur="1" fill="hold">
+                                          <p:stCondLst>
+                                            <p:cond delay="399"/>
+                                          </p:stCondLst>
+                                        </p:cTn>
+                                        <p:tgtEl>
+                                          <p:spTgt spid="302"/>
+                                        </p:tgtEl>
+                                        <p:attrNameLst>
+                                          <p:attrName>style.visibility</p:attrName>
+                                        </p:attrNameLst>
+                                      </p:cBhvr>
+                                      <p:to>
+                                        <p:strVal val="hidden"/>
+                                      </p:to>
+                                    </p:set>
+                                  </p:childTnLst>
+                                </p:cTn>
+                              </p:par>
+                              <p:par>
+                                <p:cTn id="69" presetID="10" presetClass="exit" presetSubtype="0" fill="hold" nodeType="withEffect">
+                                  <p:stCondLst>
+                                    <p:cond delay="0"/>
+                                  </p:stCondLst>
+                                  <p:childTnLst>
+                                    <p:animEffect transition="out" filter="fade">
+                                      <p:cBhvr>
+                                        <p:cTn id="70" dur="400"/>
+                                        <p:tgtEl>
+                                          <p:spTgt spid="303"/>
+                                        </p:tgtEl>
+                                      </p:cBhvr>
+                                    </p:animEffect>
+                                    <p:set>
+                                      <p:cBhvr>
+                                        <p:cTn id="71" dur="1" fill="hold">
+                                          <p:stCondLst>
+                                            <p:cond delay="399"/>
+                                          </p:stCondLst>
+                                        </p:cTn>
+                                        <p:tgtEl>
+                                          <p:spTgt spid="303"/>
+                                        </p:tgtEl>
+                                        <p:attrNameLst>
+                                          <p:attrName>style.visibility</p:attrName>
+                                        </p:attrNameLst>
+                                      </p:cBhvr>
+                                      <p:to>
+                                        <p:strVal val="hidden"/>
+                                      </p:to>
+                                    </p:set>
+                                  </p:childTnLst>
+                                </p:cTn>
+                              </p:par>
+                              <p:par>
+                                <p:cTn id="72" presetID="10" presetClass="exit" presetSubtype="0" fill="hold" nodeType="withEffect">
+                                  <p:stCondLst>
+                                    <p:cond delay="0"/>
+                                  </p:stCondLst>
+                                  <p:childTnLst>
+                                    <p:animEffect transition="out" filter="fade">
+                                      <p:cBhvr>
+                                        <p:cTn id="73" dur="400"/>
+                                        <p:tgtEl>
+                                          <p:spTgt spid="304"/>
+                                        </p:tgtEl>
+                                      </p:cBhvr>
+                                    </p:animEffect>
+                                    <p:set>
+                                      <p:cBhvr>
+                                        <p:cTn id="74" dur="1" fill="hold">
+                                          <p:stCondLst>
+                                            <p:cond delay="399"/>
+                                          </p:stCondLst>
+                                        </p:cTn>
+                                        <p:tgtEl>
+                                          <p:spTgt spid="304"/>
+                                        </p:tgtEl>
+                                        <p:attrNameLst>
+                                          <p:attrName>style.visibility</p:attrName>
+                                        </p:attrNameLst>
+                                      </p:cBhvr>
+                                      <p:to>
+                                        <p:strVal val="hidden"/>
+                                      </p:to>
+                                    </p:set>
+                                  </p:childTnLst>
+                                </p:cTn>
+                              </p:par>
+                              <p:par>
+                                <p:cTn id="75" presetID="10" presetClass="exit" presetSubtype="0" fill="hold" nodeType="withEffect">
+                                  <p:stCondLst>
+                                    <p:cond delay="0"/>
+                                  </p:stCondLst>
+                                  <p:childTnLst>
+                                    <p:animEffect transition="out" filter="fade">
+                                      <p:cBhvr>
+                                        <p:cTn id="76" dur="400"/>
+                                        <p:tgtEl>
+                                          <p:spTgt spid="305"/>
+                                        </p:tgtEl>
+                                      </p:cBhvr>
+                                    </p:animEffect>
+                                    <p:set>
+                                      <p:cBhvr>
+                                        <p:cTn id="77" dur="1" fill="hold">
+                                          <p:stCondLst>
+                                            <p:cond delay="399"/>
+                                          </p:stCondLst>
+                                        </p:cTn>
+                                        <p:tgtEl>
+                                          <p:spTgt spid="305"/>
+                                        </p:tgtEl>
+                                        <p:attrNameLst>
+                                          <p:attrName>style.visibility</p:attrName>
+                                        </p:attrNameLst>
+                                      </p:cBhvr>
+                                      <p:to>
+                                        <p:strVal val="hidden"/>
+                                      </p:to>
+                                    </p:set>
+                                  </p:childTnLst>
+                                </p:cTn>
+                              </p:par>
+                              <p:par>
+                                <p:cTn id="78" presetID="10" presetClass="exit" presetSubtype="0" fill="hold" nodeType="withEffect">
+                                  <p:stCondLst>
+                                    <p:cond delay="0"/>
+                                  </p:stCondLst>
+                                  <p:childTnLst>
+                                    <p:animEffect transition="out" filter="fade">
+                                      <p:cBhvr>
+                                        <p:cTn id="79" dur="400"/>
+                                        <p:tgtEl>
+                                          <p:spTgt spid="306"/>
+                                        </p:tgtEl>
+                                      </p:cBhvr>
+                                    </p:animEffect>
+                                    <p:set>
+                                      <p:cBhvr>
+                                        <p:cTn id="80" dur="1" fill="hold">
+                                          <p:stCondLst>
+                                            <p:cond delay="399"/>
+                                          </p:stCondLst>
+                                        </p:cTn>
+                                        <p:tgtEl>
+                                          <p:spTgt spid="306"/>
+                                        </p:tgtEl>
+                                        <p:attrNameLst>
+                                          <p:attrName>style.visibility</p:attrName>
+                                        </p:attrNameLst>
+                                      </p:cBhvr>
+                                      <p:to>
+                                        <p:strVal val="hidden"/>
+                                      </p:to>
+                                    </p:set>
+                                  </p:childTnLst>
+                                </p:cTn>
+                              </p:par>
+                              <p:par>
+                                <p:cTn id="81" presetID="10" presetClass="exit" presetSubtype="0" fill="hold" nodeType="withEffect">
+                                  <p:stCondLst>
+                                    <p:cond delay="0"/>
+                                  </p:stCondLst>
+                                  <p:childTnLst>
+                                    <p:animEffect transition="out" filter="fade">
+                                      <p:cBhvr>
+                                        <p:cTn id="82" dur="400"/>
+                                        <p:tgtEl>
+                                          <p:spTgt spid="311"/>
+                                        </p:tgtEl>
+                                      </p:cBhvr>
+                                    </p:animEffect>
+                                    <p:set>
+                                      <p:cBhvr>
+                                        <p:cTn id="83" dur="1" fill="hold">
+                                          <p:stCondLst>
+                                            <p:cond delay="399"/>
+                                          </p:stCondLst>
+                                        </p:cTn>
+                                        <p:tgtEl>
+                                          <p:spTgt spid="311"/>
+                                        </p:tgtEl>
+                                        <p:attrNameLst>
+                                          <p:attrName>style.visibility</p:attrName>
+                                        </p:attrNameLst>
+                                      </p:cBhvr>
+                                      <p:to>
+                                        <p:strVal val="hidden"/>
+                                      </p:to>
+                                    </p:set>
+                                  </p:childTnLst>
+                                </p:cTn>
+                              </p:par>
+                              <p:par>
+                                <p:cTn id="84" presetID="10" presetClass="exit" presetSubtype="0" fill="hold" nodeType="withEffect">
+                                  <p:stCondLst>
+                                    <p:cond delay="0"/>
+                                  </p:stCondLst>
+                                  <p:childTnLst>
+                                    <p:animEffect transition="out" filter="fade">
+                                      <p:cBhvr>
+                                        <p:cTn id="85" dur="400"/>
+                                        <p:tgtEl>
+                                          <p:spTgt spid="312"/>
+                                        </p:tgtEl>
+                                      </p:cBhvr>
+                                    </p:animEffect>
+                                    <p:set>
+                                      <p:cBhvr>
+                                        <p:cTn id="86" dur="1" fill="hold">
+                                          <p:stCondLst>
+                                            <p:cond delay="399"/>
+                                          </p:stCondLst>
+                                        </p:cTn>
+                                        <p:tgtEl>
+                                          <p:spTgt spid="312"/>
+                                        </p:tgtEl>
+                                        <p:attrNameLst>
+                                          <p:attrName>style.visibility</p:attrName>
+                                        </p:attrNameLst>
+                                      </p:cBhvr>
+                                      <p:to>
+                                        <p:strVal val="hidden"/>
+                                      </p:to>
+                                    </p:set>
+                                  </p:childTnLst>
+                                </p:cTn>
+                              </p:par>
+                              <p:par>
+                                <p:cTn id="87" presetID="10" presetClass="exit" presetSubtype="0" fill="hold" nodeType="withEffect">
+                                  <p:stCondLst>
+                                    <p:cond delay="0"/>
+                                  </p:stCondLst>
+                                  <p:childTnLst>
+                                    <p:animEffect transition="out" filter="fade">
+                                      <p:cBhvr>
+                                        <p:cTn id="88" dur="400"/>
+                                        <p:tgtEl>
+                                          <p:spTgt spid="313"/>
+                                        </p:tgtEl>
+                                      </p:cBhvr>
+                                    </p:animEffect>
+                                    <p:set>
+                                      <p:cBhvr>
+                                        <p:cTn id="89" dur="1" fill="hold">
+                                          <p:stCondLst>
+                                            <p:cond delay="399"/>
+                                          </p:stCondLst>
+                                        </p:cTn>
+                                        <p:tgtEl>
+                                          <p:spTgt spid="313"/>
+                                        </p:tgtEl>
+                                        <p:attrNameLst>
+                                          <p:attrName>style.visibility</p:attrName>
+                                        </p:attrNameLst>
+                                      </p:cBhvr>
+                                      <p:to>
+                                        <p:strVal val="hidden"/>
+                                      </p:to>
+                                    </p:set>
+                                  </p:childTnLst>
+                                </p:cTn>
+                              </p:par>
+                              <p:par>
+                                <p:cTn id="90" presetID="10" presetClass="exit" presetSubtype="0" fill="hold" nodeType="withEffect">
+                                  <p:stCondLst>
+                                    <p:cond delay="0"/>
+                                  </p:stCondLst>
+                                  <p:childTnLst>
+                                    <p:animEffect transition="out" filter="fade">
+                                      <p:cBhvr>
+                                        <p:cTn id="91" dur="400"/>
+                                        <p:tgtEl>
+                                          <p:spTgt spid="314"/>
+                                        </p:tgtEl>
+                                      </p:cBhvr>
+                                    </p:animEffect>
+                                    <p:set>
+                                      <p:cBhvr>
+                                        <p:cTn id="92" dur="1" fill="hold">
+                                          <p:stCondLst>
+                                            <p:cond delay="399"/>
+                                          </p:stCondLst>
+                                        </p:cTn>
+                                        <p:tgtEl>
+                                          <p:spTgt spid="314"/>
+                                        </p:tgtEl>
+                                        <p:attrNameLst>
+                                          <p:attrName>style.visibility</p:attrName>
+                                        </p:attrNameLst>
+                                      </p:cBhvr>
+                                      <p:to>
+                                        <p:strVal val="hidden"/>
+                                      </p:to>
+                                    </p:set>
+                                  </p:childTnLst>
+                                </p:cTn>
+                              </p:par>
+                              <p:par>
+                                <p:cTn id="93" presetID="10" presetClass="exit" presetSubtype="0" fill="hold" nodeType="withEffect">
+                                  <p:stCondLst>
+                                    <p:cond delay="0"/>
+                                  </p:stCondLst>
+                                  <p:childTnLst>
+                                    <p:animEffect transition="out" filter="fade">
+                                      <p:cBhvr>
+                                        <p:cTn id="94" dur="400"/>
+                                        <p:tgtEl>
+                                          <p:spTgt spid="315"/>
+                                        </p:tgtEl>
+                                      </p:cBhvr>
+                                    </p:animEffect>
+                                    <p:set>
+                                      <p:cBhvr>
+                                        <p:cTn id="95" dur="1" fill="hold">
+                                          <p:stCondLst>
+                                            <p:cond delay="399"/>
+                                          </p:stCondLst>
+                                        </p:cTn>
+                                        <p:tgtEl>
+                                          <p:spTgt spid="315"/>
+                                        </p:tgtEl>
+                                        <p:attrNameLst>
+                                          <p:attrName>style.visibility</p:attrName>
+                                        </p:attrNameLst>
+                                      </p:cBhvr>
+                                      <p:to>
+                                        <p:strVal val="hidden"/>
+                                      </p:to>
+                                    </p:set>
+                                  </p:childTnLst>
+                                </p:cTn>
+                              </p:par>
+                              <p:par>
+                                <p:cTn id="96" presetID="10" presetClass="exit" presetSubtype="0" fill="hold" nodeType="withEffect">
+                                  <p:stCondLst>
+                                    <p:cond delay="0"/>
+                                  </p:stCondLst>
+                                  <p:childTnLst>
+                                    <p:animEffect transition="out" filter="fade">
+                                      <p:cBhvr>
+                                        <p:cTn id="97" dur="400"/>
+                                        <p:tgtEl>
+                                          <p:spTgt spid="318"/>
+                                        </p:tgtEl>
+                                      </p:cBhvr>
+                                    </p:animEffect>
+                                    <p:set>
+                                      <p:cBhvr>
+                                        <p:cTn id="98" dur="1" fill="hold">
+                                          <p:stCondLst>
+                                            <p:cond delay="399"/>
+                                          </p:stCondLst>
+                                        </p:cTn>
+                                        <p:tgtEl>
+                                          <p:spTgt spid="318"/>
+                                        </p:tgtEl>
+                                        <p:attrNameLst>
+                                          <p:attrName>style.visibility</p:attrName>
+                                        </p:attrNameLst>
+                                      </p:cBhvr>
+                                      <p:to>
+                                        <p:strVal val="hidden"/>
+                                      </p:to>
+                                    </p:set>
+                                  </p:childTnLst>
+                                </p:cTn>
+                              </p:par>
+                              <p:par>
+                                <p:cTn id="99" presetID="10" presetClass="entr" presetSubtype="0" fill="hold" nodeType="withEffect">
+                                  <p:stCondLst>
+                                    <p:cond delay="0"/>
+                                  </p:stCondLst>
+                                  <p:childTnLst>
+                                    <p:set>
+                                      <p:cBhvr>
+                                        <p:cTn id="101" dur="1" fill="hold">
+                                          <p:stCondLst>
+                                            <p:cond delay="0"/>
+                                          </p:stCondLst>
+                                        </p:cTn>
+                                        <p:tgtEl>
+                                          <p:spTgt spid="400"/>
+                                        </p:tgtEl>
+                                        <p:attrNameLst>
+                                          <p:attrName>style.visibility</p:attrName>
+                                        </p:attrNameLst>
+                                      </p:cBhvr>
+                                      <p:to>
+                                        <p:strVal val="visible"/>
+                                      </p:to>
+                                    </p:set>
+                                    <p:animEffect transition="in" filter="fade">
+                                      <p:cBhvr>
+                                        <p:cTn id="100" dur="500"/>
+                                        <p:tgtEl>
+                                          <p:spTgt spid="400"/>
+                                        </p:tgtEl>
+                                      </p:cBhvr>
+                                    </p:animEffect>
+                                  </p:childTnLst>
+                                </p:cTn>
+                              </p:par>
+                              <p:par>
+                                <p:cTn id="102" presetID="10" presetClass="entr" presetSubtype="0" fill="hold" nodeType="withEffect">
+                                  <p:stCondLst>
+                                    <p:cond delay="0"/>
+                                  </p:stCondLst>
+                                  <p:childTnLst>
+                                    <p:set>
+                                      <p:cBhvr>
+                                        <p:cTn id="104" dur="1" fill="hold">
+                                          <p:stCondLst>
+                                            <p:cond delay="0"/>
+                                          </p:stCondLst>
+                                        </p:cTn>
+                                        <p:tgtEl>
+                                          <p:spTgt spid="401"/>
+                                        </p:tgtEl>
+                                        <p:attrNameLst>
+                                          <p:attrName>style.visibility</p:attrName>
+                                        </p:attrNameLst>
+                                      </p:cBhvr>
+                                      <p:to>
+                                        <p:strVal val="visible"/>
+                                      </p:to>
+                                    </p:set>
+                                    <p:animEffect transition="in" filter="fade">
+                                      <p:cBhvr>
+                                        <p:cTn id="103" dur="500"/>
+                                        <p:tgtEl>
+                                          <p:spTgt spid="401"/>
+                                        </p:tgtEl>
+                                      </p:cBhvr>
+                                    </p:animEffect>
+                                  </p:childTnLst>
+                                </p:cTn>
+                              </p:par>
+                              <p:par>
+                                <p:cTn id="105" presetID="10" presetClass="entr" presetSubtype="0" fill="hold" nodeType="withEffect">
+                                  <p:stCondLst>
+                                    <p:cond delay="0"/>
+                                  </p:stCondLst>
+                                  <p:childTnLst>
+                                    <p:set>
+                                      <p:cBhvr>
+                                        <p:cTn id="107" dur="1" fill="hold">
+                                          <p:stCondLst>
+                                            <p:cond delay="0"/>
+                                          </p:stCondLst>
+                                        </p:cTn>
+                                        <p:tgtEl>
+                                          <p:spTgt spid="402"/>
+                                        </p:tgtEl>
+                                        <p:attrNameLst>
+                                          <p:attrName>style.visibility</p:attrName>
+                                        </p:attrNameLst>
+                                      </p:cBhvr>
+                                      <p:to>
+                                        <p:strVal val="visible"/>
+                                      </p:to>
+                                    </p:set>
+                                    <p:animEffect transition="in" filter="fade">
+                                      <p:cBhvr>
+                                        <p:cTn id="106" dur="500"/>
+                                        <p:tgtEl>
+                                          <p:spTgt spid="402"/>
+                                        </p:tgtEl>
+                                      </p:cBhvr>
+                                    </p:animEffect>
+                                  </p:childTnLst>
+                                </p:cTn>
+                              </p:par>
+                              <p:par>
+                                <p:cTn id="108" presetID="10" presetClass="entr" presetSubtype="0" fill="hold" nodeType="withEffect">
+                                  <p:stCondLst>
+                                    <p:cond delay="0"/>
+                                  </p:stCondLst>
+                                  <p:childTnLst>
+                                    <p:set>
+                                      <p:cBhvr>
+                                        <p:cTn id="110" dur="1" fill="hold">
+                                          <p:stCondLst>
+                                            <p:cond delay="0"/>
+                                          </p:stCondLst>
+                                        </p:cTn>
+                                        <p:tgtEl>
+                                          <p:spTgt spid="403"/>
+                                        </p:tgtEl>
+                                        <p:attrNameLst>
+                                          <p:attrName>style.visibility</p:attrName>
+                                        </p:attrNameLst>
+                                      </p:cBhvr>
+                                      <p:to>
+                                        <p:strVal val="visible"/>
+                                      </p:to>
+                                    </p:set>
+                                    <p:animEffect transition="in" filter="fade">
+                                      <p:cBhvr>
+                                        <p:cTn id="109" dur="500"/>
+                                        <p:tgtEl>
+                                          <p:spTgt spid="403"/>
+                                        </p:tgtEl>
+                                      </p:cBhvr>
+                                    </p:animEffect>
+                                  </p:childTnLst>
+                                </p:cTn>
+                              </p:par>
+                              <p:par>
+                                <p:cTn id="111" presetID="10" presetClass="entr" presetSubtype="0" fill="hold" nodeType="withEffect">
+                                  <p:stCondLst>
+                                    <p:cond delay="0"/>
+                                  </p:stCondLst>
+                                  <p:childTnLst>
+                                    <p:set>
+                                      <p:cBhvr>
+                                        <p:cTn id="113" dur="1" fill="hold">
+                                          <p:stCondLst>
+                                            <p:cond delay="0"/>
+                                          </p:stCondLst>
+                                        </p:cTn>
+                                        <p:tgtEl>
+                                          <p:spTgt spid="404"/>
+                                        </p:tgtEl>
+                                        <p:attrNameLst>
+                                          <p:attrName>style.visibility</p:attrName>
+                                        </p:attrNameLst>
+                                      </p:cBhvr>
+                                      <p:to>
+                                        <p:strVal val="visible"/>
+                                      </p:to>
+                                    </p:set>
+                                    <p:animEffect transition="in" filter="fade">
+                                      <p:cBhvr>
+                                        <p:cTn id="112" dur="500"/>
+                                        <p:tgtEl>
+                                          <p:spTgt spid="404"/>
+                                        </p:tgtEl>
+                                      </p:cBhvr>
+                                    </p:animEffect>
+                                  </p:childTnLst>
+                                </p:cTn>
+                              </p:par>
+                              <p:par>
+                                <p:cTn id="114" presetID="10" presetClass="entr" presetSubtype="0" fill="hold" nodeType="withEffect">
+                                  <p:stCondLst>
+                                    <p:cond delay="0"/>
+                                  </p:stCondLst>
+                                  <p:childTnLst>
+                                    <p:set>
+                                      <p:cBhvr>
+                                        <p:cTn id="116" dur="1" fill="hold">
+                                          <p:stCondLst>
+                                            <p:cond delay="0"/>
+                                          </p:stCondLst>
+                                        </p:cTn>
+                                        <p:tgtEl>
+                                          <p:spTgt spid="405"/>
+                                        </p:tgtEl>
+                                        <p:attrNameLst>
+                                          <p:attrName>style.visibility</p:attrName>
+                                        </p:attrNameLst>
+                                      </p:cBhvr>
+                                      <p:to>
+                                        <p:strVal val="visible"/>
+                                      </p:to>
+                                    </p:set>
+                                    <p:animEffect transition="in" filter="fade">
+                                      <p:cBhvr>
+                                        <p:cTn id="115" dur="500"/>
+                                        <p:tgtEl>
+                                          <p:spTgt spid="405"/>
+                                        </p:tgtEl>
+                                      </p:cBhvr>
+                                    </p:animEffect>
+                                  </p:childTnLst>
+                                </p:cTn>
+                              </p:par>
+                              <p:par>
+                                <p:cTn id="117" presetID="10" presetClass="entr" presetSubtype="0" fill="hold" nodeType="withEffect">
+                                  <p:stCondLst>
+                                    <p:cond delay="0"/>
+                                  </p:stCondLst>
+                                  <p:childTnLst>
+                                    <p:set>
+                                      <p:cBhvr>
+                                        <p:cTn id="119" dur="1" fill="hold">
+                                          <p:stCondLst>
+                                            <p:cond delay="0"/>
+                                          </p:stCondLst>
+                                        </p:cTn>
+                                        <p:tgtEl>
+                                          <p:spTgt spid="406"/>
+                                        </p:tgtEl>
+                                        <p:attrNameLst>
+                                          <p:attrName>style.visibility</p:attrName>
+                                        </p:attrNameLst>
+                                      </p:cBhvr>
+                                      <p:to>
+                                        <p:strVal val="visible"/>
+                                      </p:to>
+                                    </p:set>
+                                    <p:animEffect transition="in" filter="fade">
+                                      <p:cBhvr>
+                                        <p:cTn id="118" dur="500"/>
+                                        <p:tgtEl>
+                                          <p:spTgt spid="406"/>
+                                        </p:tgtEl>
+                                      </p:cBhvr>
+                                    </p:animEffect>
+                                  </p:childTnLst>
+                                </p:cTn>
+                              </p:par>
+                              <p:par>
+                                <p:cTn id="120" presetID="10" presetClass="entr" presetSubtype="0" fill="hold" nodeType="withEffect">
+                                  <p:stCondLst>
+                                    <p:cond delay="0"/>
+                                  </p:stCondLst>
+                                  <p:childTnLst>
+                                    <p:set>
+                                      <p:cBhvr>
+                                        <p:cTn id="122" dur="1" fill="hold">
+                                          <p:stCondLst>
+                                            <p:cond delay="0"/>
+                                          </p:stCondLst>
+                                        </p:cTn>
+                                        <p:tgtEl>
+                                          <p:spTgt spid="408"/>
+                                        </p:tgtEl>
+                                        <p:attrNameLst>
+                                          <p:attrName>style.visibility</p:attrName>
+                                        </p:attrNameLst>
+                                      </p:cBhvr>
+                                      <p:to>
+                                        <p:strVal val="visible"/>
+                                      </p:to>
+                                    </p:set>
+                                    <p:animEffect transition="in" filter="fade">
+                                      <p:cBhvr>
+                                        <p:cTn id="121" dur="500"/>
+                                        <p:tgtEl>
+                                          <p:spTgt spid="408"/>
+                                        </p:tgtEl>
+                                      </p:cBhvr>
+                                    </p:animEffect>
+                                  </p:childTnLst>
+                                </p:cTn>
+                              </p:par>
+                              <p:par>
+                                <p:cTn id="123" presetID="10" presetClass="entr" presetSubtype="0" fill="hold" nodeType="withEffect">
+                                  <p:stCondLst>
+                                    <p:cond delay="0"/>
+                                  </p:stCondLst>
+                                  <p:childTnLst>
+                                    <p:set>
+                                      <p:cBhvr>
+                                        <p:cTn id="125" dur="1" fill="hold">
+                                          <p:stCondLst>
+                                            <p:cond delay="0"/>
+                                          </p:stCondLst>
+                                        </p:cTn>
+                                        <p:tgtEl>
+                                          <p:spTgt spid="420"/>
+                                        </p:tgtEl>
+                                        <p:attrNameLst>
+                                          <p:attrName>style.visibility</p:attrName>
+                                        </p:attrNameLst>
+                                      </p:cBhvr>
+                                      <p:to>
+                                        <p:strVal val="visible"/>
+                                      </p:to>
+                                    </p:set>
+                                    <p:animEffect transition="in" filter="fade">
+                                      <p:cBhvr>
+                                        <p:cTn id="124" dur="500"/>
+                                        <p:tgtEl>
+                                          <p:spTgt spid="420"/>
+                                        </p:tgtEl>
+                                      </p:cBhvr>
+                                    </p:animEffect>
+                                  </p:childTnLst>
+                                </p:cTn>
+                              </p:par>
+                              <p:par>
+                                <p:cTn id="126" presetID="10" presetClass="entr" presetSubtype="0" fill="hold" nodeType="withEffect">
+                                  <p:stCondLst>
+                                    <p:cond delay="0"/>
+                                  </p:stCondLst>
+                                  <p:childTnLst>
+                                    <p:set>
+                                      <p:cBhvr>
+                                        <p:cTn id="128" dur="1" fill="hold">
+                                          <p:stCondLst>
+                                            <p:cond delay="0"/>
+                                          </p:stCondLst>
+                                        </p:cTn>
+                                        <p:tgtEl>
+                                          <p:spTgt spid="421"/>
+                                        </p:tgtEl>
+                                        <p:attrNameLst>
+                                          <p:attrName>style.visibility</p:attrName>
+                                        </p:attrNameLst>
+                                      </p:cBhvr>
+                                      <p:to>
+                                        <p:strVal val="visible"/>
+                                      </p:to>
+                                    </p:set>
+                                    <p:animEffect transition="in" filter="fade">
+                                      <p:cBhvr>
+                                        <p:cTn id="127" dur="500"/>
+                                        <p:tgtEl>
+                                          <p:spTgt spid="421"/>
+                                        </p:tgtEl>
+                                      </p:cBhvr>
+                                    </p:animEffect>
+                                  </p:childTnLst>
+                                </p:cTn>
+                              </p:par>
+                              <p:par>
+                                <p:cTn id="129" presetID="10" presetClass="entr" presetSubtype="0" fill="hold" nodeType="withEffect">
+                                  <p:stCondLst>
+                                    <p:cond delay="0"/>
+                                  </p:stCondLst>
+                                  <p:childTnLst>
+                                    <p:set>
+                                      <p:cBhvr>
+                                        <p:cTn id="131" dur="1" fill="hold">
+                                          <p:stCondLst>
+                                            <p:cond delay="0"/>
+                                          </p:stCondLst>
+                                        </p:cTn>
+                                        <p:tgtEl>
+                                          <p:spTgt spid="422"/>
+                                        </p:tgtEl>
+                                        <p:attrNameLst>
+                                          <p:attrName>style.visibility</p:attrName>
+                                        </p:attrNameLst>
+                                      </p:cBhvr>
+                                      <p:to>
+                                        <p:strVal val="visible"/>
+                                      </p:to>
+                                    </p:set>
+                                    <p:animEffect transition="in" filter="fade">
+                                      <p:cBhvr>
+                                        <p:cTn id="130" dur="500"/>
+                                        <p:tgtEl>
+                                          <p:spTgt spid="422"/>
+                                        </p:tgtEl>
+                                      </p:cBhvr>
+                                    </p:animEffect>
+                                  </p:childTnLst>
+                                </p:cTn>
+                              </p:par>
+                              <p:par>
+                                <p:cTn id="132" presetID="10" presetClass="entr" presetSubtype="0" fill="hold" nodeType="withEffect">
+                                  <p:stCondLst>
+                                    <p:cond delay="0"/>
+                                  </p:stCondLst>
+                                  <p:childTnLst>
+                                    <p:set>
+                                      <p:cBhvr>
+                                        <p:cTn id="134" dur="1" fill="hold">
+                                          <p:stCondLst>
+                                            <p:cond delay="0"/>
+                                          </p:stCondLst>
+                                        </p:cTn>
+                                        <p:tgtEl>
+                                          <p:spTgt spid="423"/>
+                                        </p:tgtEl>
+                                        <p:attrNameLst>
+                                          <p:attrName>style.visibility</p:attrName>
+                                        </p:attrNameLst>
+                                      </p:cBhvr>
+                                      <p:to>
+                                        <p:strVal val="visible"/>
+                                      </p:to>
+                                    </p:set>
+                                    <p:animEffect transition="in" filter="fade">
+                                      <p:cBhvr>
+                                        <p:cTn id="133" dur="500"/>
+                                        <p:tgtEl>
+                                          <p:spTgt spid="423"/>
+                                        </p:tgtEl>
+                                      </p:cBhvr>
+                                    </p:animEffect>
+                                  </p:childTnLst>
+                                </p:cTn>
+                              </p:par>
+                              <p:par>
+                                <p:cTn id="135" presetID="10" presetClass="entr" presetSubtype="0" fill="hold" nodeType="withEffect">
+                                  <p:stCondLst>
+                                    <p:cond delay="0"/>
+                                  </p:stCondLst>
+                                  <p:childTnLst>
+                                    <p:set>
+                                      <p:cBhvr>
+                                        <p:cTn id="137" dur="1" fill="hold">
+                                          <p:stCondLst>
+                                            <p:cond delay="0"/>
+                                          </p:stCondLst>
+                                        </p:cTn>
+                                        <p:tgtEl>
+                                          <p:spTgt spid="424"/>
+                                        </p:tgtEl>
+                                        <p:attrNameLst>
+                                          <p:attrName>style.visibility</p:attrName>
+                                        </p:attrNameLst>
+                                      </p:cBhvr>
+                                      <p:to>
+                                        <p:strVal val="visible"/>
+                                      </p:to>
+                                    </p:set>
+                                    <p:animEffect transition="in" filter="fade">
+                                      <p:cBhvr>
+                                        <p:cTn id="136" dur="500"/>
+                                        <p:tgtEl>
+                                          <p:spTgt spid="424"/>
+                                        </p:tgtEl>
+                                      </p:cBhvr>
+                                    </p:animEffect>
+                                  </p:childTnLst>
+                                </p:cTn>
+                              </p:par>
+                              <p:par>
+                                <p:cTn id="138" presetID="10" presetClass="entr" presetSubtype="0" fill="hold" nodeType="withEffect">
+                                  <p:stCondLst>
+                                    <p:cond delay="0"/>
+                                  </p:stCondLst>
+                                  <p:childTnLst>
+                                    <p:set>
+                                      <p:cBhvr>
+                                        <p:cTn id="140" dur="1" fill="hold">
+                                          <p:stCondLst>
+                                            <p:cond delay="0"/>
+                                          </p:stCondLst>
+                                        </p:cTn>
+                                        <p:tgtEl>
+                                          <p:spTgt spid="425"/>
+                                        </p:tgtEl>
+                                        <p:attrNameLst>
+                                          <p:attrName>style.visibility</p:attrName>
+                                        </p:attrNameLst>
+                                      </p:cBhvr>
+                                      <p:to>
+                                        <p:strVal val="visible"/>
+                                      </p:to>
+                                    </p:set>
+                                    <p:animEffect transition="in" filter="fade">
+                                      <p:cBhvr>
+                                        <p:cTn id="139" dur="500"/>
+                                        <p:tgtEl>
+                                          <p:spTgt spid="425"/>
+                                        </p:tgtEl>
+                                      </p:cBhvr>
+                                    </p:animEffect>
+                                  </p:childTnLst>
+                                </p:cTn>
+                              </p:par>
+                              <p:par>
+                                <p:cTn id="141" presetID="10" presetClass="entr" presetSubtype="0" fill="hold" nodeType="withEffect">
+                                  <p:stCondLst>
+                                    <p:cond delay="0"/>
+                                  </p:stCondLst>
+                                  <p:childTnLst>
+                                    <p:set>
+                                      <p:cBhvr>
+                                        <p:cTn id="143" dur="1" fill="hold">
+                                          <p:stCondLst>
+                                            <p:cond delay="0"/>
+                                          </p:stCondLst>
+                                        </p:cTn>
+                                        <p:tgtEl>
+                                          <p:spTgt spid="426"/>
+                                        </p:tgtEl>
+                                        <p:attrNameLst>
+                                          <p:attrName>style.visibility</p:attrName>
+                                        </p:attrNameLst>
+                                      </p:cBhvr>
+                                      <p:to>
+                                        <p:strVal val="visible"/>
+                                      </p:to>
+                                    </p:set>
+                                    <p:animEffect transition="in" filter="fade">
+                                      <p:cBhvr>
+                                        <p:cTn id="142" dur="500"/>
+                                        <p:tgtEl>
+                                          <p:spTgt spid="426"/>
+                                        </p:tgtEl>
+                                      </p:cBhvr>
+                                    </p:animEffect>
+                                  </p:childTnLst>
+                                </p:cTn>
+                              </p:par>
+                              <p:par>
+                                <p:cTn id="144" presetID="10" presetClass="entr" presetSubtype="0" fill="hold" nodeType="withEffect">
+                                  <p:stCondLst>
+                                    <p:cond delay="0"/>
+                                  </p:stCondLst>
+                                  <p:childTnLst>
+                                    <p:set>
+                                      <p:cBhvr>
+                                        <p:cTn id="146" dur="1" fill="hold">
+                                          <p:stCondLst>
+                                            <p:cond delay="0"/>
+                                          </p:stCondLst>
+                                        </p:cTn>
+                                        <p:tgtEl>
+                                          <p:spTgt spid="427"/>
+                                        </p:tgtEl>
+                                        <p:attrNameLst>
+                                          <p:attrName>style.visibility</p:attrName>
+                                        </p:attrNameLst>
+                                      </p:cBhvr>
+                                      <p:to>
+                                        <p:strVal val="visible"/>
+                                      </p:to>
+                                    </p:set>
+                                    <p:animEffect transition="in" filter="fade">
+                                      <p:cBhvr>
+                                        <p:cTn id="145" dur="500"/>
+                                        <p:tgtEl>
+                                          <p:spTgt spid="427"/>
+                                        </p:tgtEl>
+                                      </p:cBhvr>
+                                    </p:animEffect>
+                                  </p:childTnLst>
+                                </p:cTn>
+                              </p:par>
+                              <p:par>
+                                <p:cTn id="147" presetID="10" presetClass="entr" presetSubtype="0" fill="hold" nodeType="withEffect">
+                                  <p:stCondLst>
+                                    <p:cond delay="0"/>
+                                  </p:stCondLst>
+                                  <p:childTnLst>
+                                    <p:set>
+                                      <p:cBhvr>
+                                        <p:cTn id="149" dur="1" fill="hold">
+                                          <p:stCondLst>
+                                            <p:cond delay="0"/>
+                                          </p:stCondLst>
+                                        </p:cTn>
+                                        <p:tgtEl>
+                                          <p:spTgt spid="428"/>
+                                        </p:tgtEl>
+                                        <p:attrNameLst>
+                                          <p:attrName>style.visibility</p:attrName>
+                                        </p:attrNameLst>
+                                      </p:cBhvr>
+                                      <p:to>
+                                        <p:strVal val="visible"/>
+                                      </p:to>
+                                    </p:set>
+                                    <p:animEffect transition="in" filter="fade">
+                                      <p:cBhvr>
+                                        <p:cTn id="148" dur="500"/>
+                                        <p:tgtEl>
+                                          <p:spTgt spid="428"/>
+                                        </p:tgtEl>
+                                      </p:cBhvr>
+                                    </p:animEffect>
+                                  </p:childTnLst>
+                                </p:cTn>
+                              </p:par>
+                              <p:par>
+                                <p:cTn id="150" presetID="10" presetClass="entr" presetSubtype="0" fill="hold" nodeType="withEffect">
+                                  <p:stCondLst>
+                                    <p:cond delay="0"/>
+                                  </p:stCondLst>
+                                  <p:childTnLst>
+                                    <p:set>
+                                      <p:cBhvr>
+                                        <p:cTn id="152" dur="1" fill="hold">
+                                          <p:stCondLst>
+                                            <p:cond delay="0"/>
+                                          </p:stCondLst>
+                                        </p:cTn>
+                                        <p:tgtEl>
+                                          <p:spTgt spid="150"/>
+                                        </p:tgtEl>
+                                        <p:attrNameLst>
+                                          <p:attrName>style.visibility</p:attrName>
+                                        </p:attrNameLst>
+                                      </p:cBhvr>
+                                      <p:to>
+                                        <p:strVal val="visible"/>
+                                      </p:to>
+                                    </p:set>
+                                    <p:animEffect transition="in" filter="fade">
+                                      <p:cBhvr>
+                                        <p:cTn id="151" dur="500"/>
+                                        <p:tgtEl>
+                                          <p:spTgt spid="150"/>
+                                        </p:tgtEl>
+                                      </p:cBhvr>
+                                    </p:animEffect>
+                                  </p:childTnLst>
+                                </p:cTn>
+                              </p:par>
+                            </p:childTnLst>
+                          </p:cTn>
+                        </p:par>
+                      </p:childTnLst>
+                    </p:cTn>
+                  </p:par>
+                </p:childTnLst>
+              </p:cTn>
+              <p:prevCondLst>
+                <p:cond evt="onPrev" delay="0">
+                  <p:tgtEl>
+                    <p:sldTgt/>
+                  </p:tgtEl>
+                </p:cond>
+              </p:prevCondLst>
+              <p:nextCondLst>
+                <p:cond evt="onNext" delay="0">
+                  <p:tgtEl>
+                    <p:sldTgt/>
+                  </p:tgtEl>
+                </p:cond>
+              </p:nextCondLst>
+            </p:seq>
+          </p:childTnLst>
+        </p:cTn>
+      </p:par>
+    </p:tnLst>
+  </p:timing>
 </p:sld>
 </file>
 
@@ -35347,7 +38561,7 @@
               <a:defRPr b="0"/>
             </a:pPr>
             <a:r>
-              <a:rPr lang="en-US" sz="2800" b="1" i="0" dirty="0">
+              <a:rPr lang="en-US" sz="2800" b="0" i="0" dirty="0">
                 <a:solidFill>
                   <a:srgbClr val="000000"/>
                 </a:solidFill>
@@ -36090,7 +39304,7 @@
               <a:defRPr b="0"/>
             </a:pPr>
             <a:r>
-              <a:rPr lang="en-US" sz="2800" b="1" i="0" dirty="0">
+              <a:rPr lang="en-US" sz="2800" b="0" i="0" dirty="0">
                 <a:solidFill>
                   <a:srgbClr val="000000"/>
                 </a:solidFill>
@@ -36838,7 +40052,7 @@
               <a:defRPr b="0"/>
             </a:pPr>
             <a:r>
-              <a:rPr lang="en-US" sz="2800" b="1" i="0" dirty="0">
+              <a:rPr lang="en-US" sz="2800" b="0" i="0" dirty="0">
                 <a:solidFill>
                   <a:srgbClr val="000000"/>
                 </a:solidFill>
@@ -38115,7 +41329,7 @@
               <a:defRPr b="0"/>
             </a:pPr>
             <a:r>
-              <a:rPr lang="en-US" sz="2800" b="1" i="0" dirty="0">
+              <a:rPr lang="en-US" sz="2800" b="0" i="0" dirty="0">
                 <a:solidFill>
                   <a:srgbClr val="000000"/>
                 </a:solidFill>
@@ -38951,7 +42165,7 @@
               <a:defRPr b="0"/>
             </a:pPr>
             <a:r>
-              <a:rPr lang="en-US" sz="2800" b="1" i="0" dirty="0">
+              <a:rPr lang="en-US" sz="2800" b="0" i="0" dirty="0">
                 <a:solidFill>
                   <a:srgbClr val="000000"/>
                 </a:solidFill>
@@ -39246,7 +42460,7 @@
               <a:defRPr b="0"/>
             </a:pPr>
             <a:r>
-              <a:rPr lang="en-US" sz="2800" b="1" i="0" dirty="0">
+              <a:rPr lang="en-US" sz="2800" b="0" i="0" dirty="0">
                 <a:solidFill>
                   <a:srgbClr val="000000"/>
                 </a:solidFill>
@@ -40449,6 +43663,2471 @@
 </p:sld>
 </file>
 
+<file path=ppt/slides/slide55.xml><?xml version="1.0" encoding="utf-8"?>
+<p:sld xmlns:a="http://schemas.openxmlformats.org/drawingml/2006/main" xmlns:r="http://schemas.openxmlformats.org/officeDocument/2006/relationships" xmlns:p="http://schemas.openxmlformats.org/presentationml/2006/main">
+  <p:cSld>
+    <p:spTree>
+      <p:nvGrpSpPr>
+        <p:cNvPr id="1" name=""/>
+        <p:cNvGrpSpPr/>
+        <p:nvPr/>
+      </p:nvGrpSpPr>
+      <p:grpSpPr>
+        <a:xfrm>
+          <a:off x="0" y="0"/>
+          <a:ext cx="0" cy="0"/>
+          <a:chOff x="0" y="0"/>
+          <a:chExt cx="0" cy="0"/>
+        </a:xfrm>
+      </p:grpSpPr>
+      <p:sp>
+        <p:nvSpPr>
+          <p:cNvPr id="2" name="Title 1"/>
+          <p:cNvSpPr>
+            <a:spLocks noGrp="1"/>
+          </p:cNvSpPr>
+          <p:nvPr>
+            <p:ph type="title"/>
+          </p:nvPr>
+        </p:nvSpPr>
+        <p:spPr>
+          <a:xfrm>
+            <a:off x="277148" y="118428"/>
+            <a:ext cx="8590000" cy="638175"/>
+          </a:xfrm>
+        </p:spPr>
+        <p:txBody>
+          <a:bodyPr>
+            <a:normAutofit/>
+          </a:bodyPr>
+          <a:lstStyle/>
+          <a:p>
+            <a:pPr>
+              <a:buNone/>
+              <a:defRPr b="0"/>
+            </a:pPr>
+            <a:r>
+              <a:rPr lang="en-US" sz="2800" b="0" i="0" dirty="0">
+                <a:solidFill>
+                  <a:srgbClr val="000000"/>
+                </a:solidFill>
+              </a:rPr>
+              <a:t>Three ways to obtain evidence</a:t>
+            </a:r>
+          </a:p>
+        </p:txBody>
+      </p:sp>
+      <p:sp>
+        <p:nvSpPr>
+          <p:cNvPr id="3" name="Slide Number Placeholder 3"/>
+          <p:cNvSpPr>
+            <a:spLocks noGrp="1"/>
+          </p:cNvSpPr>
+          <p:nvPr>
+            <p:ph type="sldNum" sz="quarter" idx="4"/>
+          </p:nvPr>
+        </p:nvSpPr>
+        <p:spPr/>
+        <p:txBody>
+          <a:bodyPr/>
+          <a:lstStyle/>
+          <a:p>
+            <a:fld id="{B7EB45DA-9A0D-DC49-8E02-F30A5DDC21C3}" type="slidenum">
+              <a:rPr lang="en-US" smtClean="0"/>
+              <a:t>9</a:t>
+            </a:fld>
+            <a:endParaRPr lang="en-US"/>
+          </a:p>
+        </p:txBody>
+      </p:sp>
+      <p:sp>
+        <p:nvSpPr>
+          <p:cNvPr id="110" name="B110"/>
+          <p:cNvSpPr/>
+          <p:nvPr/>
+        </p:nvSpPr>
+        <p:spPr>
+          <a:xfrm>
+            <a:off x="566928" y="1120000"/>
+            <a:ext cx="2540000" cy="800000"/>
+          </a:xfrm>
+          <a:prstGeom prst="rect">
+            <a:avLst/>
+          </a:prstGeom>
+          <a:solidFill>
+            <a:srgbClr val="8E6F3E"/>
+          </a:solidFill>
+          <a:ln>
+            <a:noFill/>
+          </a:ln>
+        </p:spPr>
+        <p:txBody>
+          <a:bodyPr wrap="square" lIns="91440" tIns="45720" rIns="91440" bIns="45720" anchor="ctr"/>
+          <a:lstStyle/>
+          <a:p>
+            <a:pPr algn="ctr">
+              <a:buNone/>
+            </a:pPr>
+            <a:r>
+              <a:rPr lang="en-US" sz="2200" b="1" i="0" dirty="0">
+                <a:solidFill>
+                  <a:srgbClr val="FFFFFF"/>
+                </a:solidFill>
+              </a:rPr>
+              <a:t>HUMAN</a:t>
+            </a:r>
+          </a:p>
+          <a:p>
+            <a:pPr algn="ctr">
+              <a:buNone/>
+            </a:pPr>
+            <a:r>
+              <a:rPr lang="en-US" sz="2200" b="1" i="0" dirty="0">
+                <a:solidFill>
+                  <a:srgbClr val="FFFFFF"/>
+                </a:solidFill>
+              </a:rPr>
+              <a:t>JUDGMENT</a:t>
+            </a:r>
+          </a:p>
+        </p:txBody>
+      </p:sp>
+      <p:sp>
+        <p:nvSpPr>
+          <p:cNvPr id="120" name="P120"/>
+          <p:cNvSpPr/>
+          <p:nvPr/>
+        </p:nvSpPr>
+        <p:spPr>
+          <a:xfrm>
+            <a:off x="566928" y="3220000"/>
+            <a:ext cx="2540000" cy="1000000"/>
+          </a:xfrm>
+          <a:prstGeom prst="rect">
+            <a:avLst/>
+          </a:prstGeom>
+          <a:solidFill>
+            <a:srgbClr val="F5F1E8"/>
+          </a:solidFill>
+          <a:ln w="12700">
+            <a:solidFill>
+              <a:srgbClr val="C9B991"/>
+            </a:solidFill>
+          </a:ln>
+        </p:spPr>
+        <p:txBody>
+          <a:bodyPr wrap="square" lIns="91440" tIns="45720" rIns="91440" bIns="45720" anchor="ctr"/>
+          <a:lstStyle/>
+          <a:p>
+            <a:pPr algn="ctr">
+              <a:buNone/>
+            </a:pPr>
+            <a:r>
+              <a:rPr lang="en-US" sz="2200" b="1" i="0" dirty="0">
+                <a:solidFill>
+                  <a:srgbClr val="5C4826"/>
+                </a:solidFill>
+              </a:rPr>
+              <a:t>Interpret an artifact</a:t>
+            </a:r>
+          </a:p>
+          <a:p>
+            <a:pPr algn="ctr">
+              <a:buNone/>
+            </a:pPr>
+            <a:r>
+              <a:rPr lang="en-US" sz="2000" b="0" i="1" dirty="0">
+                <a:solidFill>
+                  <a:srgbClr val="555960"/>
+                </a:solidFill>
+              </a:rPr>
+              <a:t>finite attention</a:t>
+            </a:r>
+          </a:p>
+        </p:txBody>
+      </p:sp>
+      <p:sp>
+        <p:nvSpPr>
+          <p:cNvPr id="130" name="L130"/>
+          <p:cNvSpPr/>
+          <p:nvPr/>
+        </p:nvSpPr>
+        <p:spPr>
+          <a:xfrm>
+            <a:off x="566928" y="2120000"/>
+            <a:ext cx="2540000" cy="900000"/>
+          </a:xfrm>
+          <a:prstGeom prst="rect">
+            <a:avLst/>
+          </a:prstGeom>
+          <a:noFill/>
+          <a:ln>
+            <a:noFill/>
+          </a:ln>
+        </p:spPr>
+        <p:txBody>
+          <a:bodyPr wrap="square" lIns="91440" tIns="45720" rIns="91440" bIns="45720" anchor="ctr"/>
+          <a:lstStyle/>
+          <a:p>
+            <a:pPr algn="ctr">
+              <a:buNone/>
+            </a:pPr>
+            <a:r>
+              <a:rPr lang="en-US" sz="4000" b="0" i="0" dirty="0">
+                <a:solidFill>
+                  <a:srgbClr val="5C4826"/>
+                </a:solidFill>
+              </a:rPr>
+              <a:t>👁</a:t>
+            </a:r>
+          </a:p>
+        </p:txBody>
+      </p:sp>
+      <p:sp>
+        <p:nvSpPr>
+          <p:cNvPr id="111" name="B111"/>
+          <p:cNvSpPr/>
+          <p:nvPr/>
+        </p:nvSpPr>
+        <p:spPr>
+          <a:xfrm>
+            <a:off x="3302000" y="1120000"/>
+            <a:ext cx="2540000" cy="800000"/>
+          </a:xfrm>
+          <a:prstGeom prst="rect">
+            <a:avLst/>
+          </a:prstGeom>
+          <a:solidFill>
+            <a:srgbClr val="8E6F3E">
+              <a:alpha val="25000"/>
+            </a:srgbClr>
+          </a:solidFill>
+          <a:ln>
+            <a:noFill/>
+          </a:ln>
+        </p:spPr>
+        <p:txBody>
+          <a:bodyPr wrap="square" lIns="91440" tIns="45720" rIns="91440" bIns="45720" anchor="ctr"/>
+          <a:lstStyle/>
+          <a:p>
+            <a:pPr algn="ctr">
+              <a:buNone/>
+            </a:pPr>
+            <a:r>
+              <a:rPr lang="en-US" sz="2200" b="1" i="0" dirty="0">
+                <a:solidFill>
+                  <a:srgbClr val="FFFFFF">
+                    <a:alpha val="25000"/>
+                  </a:srgbClr>
+                </a:solidFill>
+              </a:rPr>
+              <a:t>REASONING OVER</a:t>
+            </a:r>
+          </a:p>
+          <a:p>
+            <a:pPr algn="ctr">
+              <a:buNone/>
+            </a:pPr>
+            <a:r>
+              <a:rPr lang="en-US" sz="2200" b="1" i="0" dirty="0">
+                <a:solidFill>
+                  <a:srgbClr val="FFFFFF">
+                    <a:alpha val="25000"/>
+                  </a:srgbClr>
+                </a:solidFill>
+              </a:rPr>
+              <a:t>POSSIBLE BEHAVIOR</a:t>
+            </a:r>
+          </a:p>
+        </p:txBody>
+      </p:sp>
+      <p:sp>
+        <p:nvSpPr>
+          <p:cNvPr id="121" name="P121"/>
+          <p:cNvSpPr/>
+          <p:nvPr/>
+        </p:nvSpPr>
+        <p:spPr>
+          <a:xfrm>
+            <a:off x="3302000" y="3220000"/>
+            <a:ext cx="2540000" cy="1000000"/>
+          </a:xfrm>
+          <a:prstGeom prst="rect">
+            <a:avLst/>
+          </a:prstGeom>
+          <a:solidFill>
+            <a:srgbClr val="F5F1E8">
+              <a:alpha val="25000"/>
+            </a:srgbClr>
+          </a:solidFill>
+          <a:ln w="12700">
+            <a:solidFill>
+              <a:srgbClr val="C9B991">
+                <a:alpha val="25000"/>
+              </a:srgbClr>
+            </a:solidFill>
+          </a:ln>
+        </p:spPr>
+        <p:txBody>
+          <a:bodyPr wrap="square" lIns="91440" tIns="45720" rIns="91440" bIns="45720" anchor="ctr"/>
+          <a:lstStyle/>
+          <a:p>
+            <a:pPr algn="ctr">
+              <a:buNone/>
+            </a:pPr>
+            <a:r>
+              <a:rPr lang="en-US" sz="2200" b="1" i="0" dirty="0">
+                <a:solidFill>
+                  <a:srgbClr val="5C4826">
+                    <a:alpha val="25000"/>
+                  </a:srgbClr>
+                </a:solidFill>
+              </a:rPr>
+              <a:t>Analyze a representation</a:t>
+            </a:r>
+          </a:p>
+          <a:p>
+            <a:pPr algn="ctr">
+              <a:buNone/>
+            </a:pPr>
+            <a:r>
+              <a:rPr lang="en-US" sz="2000" b="0" i="1" dirty="0">
+                <a:solidFill>
+                  <a:srgbClr val="555960">
+                    <a:alpha val="25000"/>
+                  </a:srgbClr>
+                </a:solidFill>
+              </a:rPr>
+              <a:t>model limits</a:t>
+            </a:r>
+          </a:p>
+        </p:txBody>
+      </p:sp>
+      <p:sp>
+        <p:nvSpPr>
+          <p:cNvPr id="131" name="L131"/>
+          <p:cNvSpPr/>
+          <p:nvPr/>
+        </p:nvSpPr>
+        <p:spPr>
+          <a:xfrm>
+            <a:off x="3302000" y="2120000"/>
+            <a:ext cx="2540000" cy="900000"/>
+          </a:xfrm>
+          <a:prstGeom prst="rect">
+            <a:avLst/>
+          </a:prstGeom>
+          <a:noFill/>
+          <a:ln>
+            <a:noFill/>
+          </a:ln>
+        </p:spPr>
+        <p:txBody>
+          <a:bodyPr wrap="square" lIns="91440" tIns="45720" rIns="91440" bIns="45720" anchor="ctr"/>
+          <a:lstStyle/>
+          <a:p>
+            <a:pPr algn="ctr">
+              <a:buNone/>
+            </a:pPr>
+            <a:r>
+              <a:rPr lang="en-US" sz="4000" b="0" i="0" dirty="0">
+                <a:solidFill>
+                  <a:srgbClr val="5C4826">
+                    <a:alpha val="25000"/>
+                  </a:srgbClr>
+                </a:solidFill>
+              </a:rPr>
+              <a:t>🗺</a:t>
+            </a:r>
+          </a:p>
+        </p:txBody>
+      </p:sp>
+      <p:sp>
+        <p:nvSpPr>
+          <p:cNvPr id="112" name="B112"/>
+          <p:cNvSpPr/>
+          <p:nvPr/>
+        </p:nvSpPr>
+        <p:spPr>
+          <a:xfrm>
+            <a:off x="6037072" y="1120000"/>
+            <a:ext cx="2540000" cy="800000"/>
+          </a:xfrm>
+          <a:prstGeom prst="rect">
+            <a:avLst/>
+          </a:prstGeom>
+          <a:solidFill>
+            <a:srgbClr val="8E6F3E">
+              <a:alpha val="25000"/>
+            </a:srgbClr>
+          </a:solidFill>
+          <a:ln>
+            <a:noFill/>
+          </a:ln>
+        </p:spPr>
+        <p:txBody>
+          <a:bodyPr wrap="square" lIns="91440" tIns="45720" rIns="91440" bIns="45720" anchor="ctr"/>
+          <a:lstStyle/>
+          <a:p>
+            <a:pPr algn="ctr">
+              <a:buNone/>
+            </a:pPr>
+            <a:r>
+              <a:rPr lang="en-US" sz="2200" b="1" i="0" dirty="0">
+                <a:solidFill>
+                  <a:srgbClr val="FFFFFF">
+                    <a:alpha val="25000"/>
+                  </a:srgbClr>
+                </a:solidFill>
+              </a:rPr>
+              <a:t>OBSERVING</a:t>
+            </a:r>
+          </a:p>
+          <a:p>
+            <a:pPr algn="ctr">
+              <a:buNone/>
+            </a:pPr>
+            <a:r>
+              <a:rPr lang="en-US" sz="2200" b="1" i="0" dirty="0">
+                <a:solidFill>
+                  <a:srgbClr val="FFFFFF">
+                    <a:alpha val="25000"/>
+                  </a:srgbClr>
+                </a:solidFill>
+              </a:rPr>
+              <a:t>EXECUTION</a:t>
+            </a:r>
+          </a:p>
+        </p:txBody>
+      </p:sp>
+      <p:sp>
+        <p:nvSpPr>
+          <p:cNvPr id="122" name="P122"/>
+          <p:cNvSpPr/>
+          <p:nvPr/>
+        </p:nvSpPr>
+        <p:spPr>
+          <a:xfrm>
+            <a:off x="6037072" y="3220000"/>
+            <a:ext cx="2540000" cy="1000000"/>
+          </a:xfrm>
+          <a:prstGeom prst="rect">
+            <a:avLst/>
+          </a:prstGeom>
+          <a:solidFill>
+            <a:srgbClr val="F5F1E8">
+              <a:alpha val="25000"/>
+            </a:srgbClr>
+          </a:solidFill>
+          <a:ln w="12700">
+            <a:solidFill>
+              <a:srgbClr val="C9B991">
+                <a:alpha val="25000"/>
+              </a:srgbClr>
+            </a:solidFill>
+          </a:ln>
+        </p:spPr>
+        <p:txBody>
+          <a:bodyPr wrap="square" lIns="91440" tIns="45720" rIns="91440" bIns="45720" anchor="ctr"/>
+          <a:lstStyle/>
+          <a:p>
+            <a:pPr algn="ctr">
+              <a:buNone/>
+            </a:pPr>
+            <a:r>
+              <a:rPr lang="en-US" sz="2200" b="1" i="0" dirty="0">
+                <a:solidFill>
+                  <a:srgbClr val="5C4826">
+                    <a:alpha val="25000"/>
+                  </a:srgbClr>
+                </a:solidFill>
+              </a:rPr>
+              <a:t>Run and observe</a:t>
+            </a:r>
+          </a:p>
+          <a:p>
+            <a:pPr algn="ctr">
+              <a:buNone/>
+            </a:pPr>
+            <a:r>
+              <a:rPr lang="en-US" sz="2000" b="0" i="1" dirty="0">
+                <a:solidFill>
+                  <a:srgbClr val="555960">
+                    <a:alpha val="25000"/>
+                  </a:srgbClr>
+                </a:solidFill>
+              </a:rPr>
+              <a:t>selected executions</a:t>
+            </a:r>
+          </a:p>
+        </p:txBody>
+      </p:sp>
+      <p:sp>
+        <p:nvSpPr>
+          <p:cNvPr id="132" name="L132"/>
+          <p:cNvSpPr/>
+          <p:nvPr/>
+        </p:nvSpPr>
+        <p:spPr>
+          <a:xfrm>
+            <a:off x="6037072" y="2120000"/>
+            <a:ext cx="2540000" cy="900000"/>
+          </a:xfrm>
+          <a:prstGeom prst="rect">
+            <a:avLst/>
+          </a:prstGeom>
+          <a:noFill/>
+          <a:ln>
+            <a:noFill/>
+          </a:ln>
+        </p:spPr>
+        <p:txBody>
+          <a:bodyPr wrap="square" lIns="91440" tIns="45720" rIns="91440" bIns="45720" anchor="ctr"/>
+          <a:lstStyle/>
+          <a:p>
+            <a:pPr algn="ctr">
+              <a:buNone/>
+            </a:pPr>
+            <a:r>
+              <a:rPr lang="en-US" sz="4000" b="0" i="0" dirty="0">
+                <a:solidFill>
+                  <a:srgbClr val="5C4826">
+                    <a:alpha val="25000"/>
+                  </a:srgbClr>
+                </a:solidFill>
+              </a:rPr>
+              <a:t>▶</a:t>
+            </a:r>
+          </a:p>
+        </p:txBody>
+      </p:sp>
+      <p:sp>
+        <p:nvSpPr>
+          <p:cNvPr id="140" name="E140"/>
+          <p:cNvSpPr/>
+          <p:nvPr/>
+        </p:nvSpPr>
+        <p:spPr>
+          <a:xfrm>
+            <a:off x="566928" y="4550000"/>
+            <a:ext cx="8010144" cy="950000"/>
+          </a:xfrm>
+          <a:prstGeom prst="rect">
+            <a:avLst/>
+          </a:prstGeom>
+          <a:solidFill>
+            <a:srgbClr val="FBF8F2"/>
+          </a:solidFill>
+          <a:ln w="19050">
+            <a:solidFill>
+              <a:srgbClr val="5C4826"/>
+            </a:solidFill>
+          </a:ln>
+        </p:spPr>
+        <p:txBody>
+          <a:bodyPr wrap="square" lIns="91440" tIns="45720" rIns="91440" bIns="45720" anchor="ctr"/>
+          <a:lstStyle/>
+          <a:p>
+            <a:pPr algn="ctr">
+              <a:buNone/>
+            </a:pPr>
+            <a:r>
+              <a:rPr lang="en-US" sz="2400" b="1" i="0" dirty="0">
+                <a:solidFill>
+                  <a:srgbClr val="5C4826"/>
+                </a:solidFill>
+              </a:rPr>
+              <a:t>Mechanism and scope are independent choices.</a:t>
+            </a:r>
+          </a:p>
+          <a:p>
+            <a:pPr algn="ctr">
+              <a:buNone/>
+            </a:pPr>
+            <a:r>
+              <a:rPr lang="en-US" sz="2000" b="0" i="1" dirty="0">
+                <a:solidFill>
+                  <a:srgbClr val="555960"/>
+                </a:solidFill>
+              </a:rPr>
+              <a:t>A unit, a subsystem, or the whole system can be judged, reasoned about, or executed.</a:t>
+            </a:r>
+          </a:p>
+        </p:txBody>
+      </p:sp>
+      <p:sp>
+        <p:nvSpPr>
+          <p:cNvPr id="150" name="FooterBand"/>
+          <p:cNvSpPr/>
+          <p:nvPr/>
+        </p:nvSpPr>
+        <p:spPr>
+          <a:xfrm>
+            <a:off x="274320" y="5852160"/>
+            <a:ext cx="8595360" cy="566928"/>
+          </a:xfrm>
+          <a:prstGeom prst="rect">
+            <a:avLst/>
+          </a:prstGeom>
+          <a:solidFill>
+            <a:srgbClr val="8E6F3E"/>
+          </a:solidFill>
+          <a:ln>
+            <a:noFill/>
+          </a:ln>
+        </p:spPr>
+        <p:txBody>
+          <a:bodyPr wrap="square" lIns="91440" tIns="45720" rIns="91440" bIns="45720" anchor="ctr"/>
+          <a:lstStyle/>
+          <a:p>
+            <a:pPr algn="ctr">
+              <a:buNone/>
+            </a:pPr>
+            <a:r>
+              <a:rPr lang="en-US" sz="2000" b="1" i="0" dirty="0">
+                <a:solidFill>
+                  <a:srgbClr val="FFFFFF"/>
+                </a:solidFill>
+              </a:rPr>
+              <a:t>Three ways engineers come to know things about software.</a:t>
+            </a:r>
+          </a:p>
+        </p:txBody>
+      </p:sp>
+      <p:sp>
+        <p:nvSpPr>
+          <p:cNvPr id="900" name="NowMarker"/>
+          <p:cNvSpPr/>
+          <p:nvPr/>
+        </p:nvSpPr>
+        <p:spPr>
+          <a:xfrm>
+            <a:off x="566928" y="780000"/>
+            <a:ext cx="2540000" cy="320000"/>
+          </a:xfrm>
+          <a:prstGeom prst="rect">
+            <a:avLst/>
+          </a:prstGeom>
+          <a:noFill/>
+          <a:ln>
+            <a:noFill/>
+          </a:ln>
+        </p:spPr>
+        <p:txBody>
+          <a:bodyPr wrap="square" lIns="0" tIns="0" rIns="0" bIns="0" anchor="ctr"/>
+          <a:lstStyle/>
+          <a:p>
+            <a:pPr algn="ctr">
+              <a:buNone/>
+            </a:pPr>
+            <a:r>
+              <a:rPr lang="en-US" sz="2000" b="1" i="0" dirty="0">
+                <a:solidFill>
+                  <a:srgbClr val="8E6F3E"/>
+                </a:solidFill>
+              </a:rPr>
+              <a:t>NOW ▼</a:t>
+            </a:r>
+          </a:p>
+        </p:txBody>
+      </p:sp>
+    </p:spTree>
+  </p:cSld>
+  <p:clrMapOvr>
+    <a:masterClrMapping/>
+  </p:clrMapOvr>
+</p:sld>
+</file>
+
+<file path=ppt/slides/slide56.xml><?xml version="1.0" encoding="utf-8"?>
+<p:sld xmlns:a="http://schemas.openxmlformats.org/drawingml/2006/main" xmlns:r="http://schemas.openxmlformats.org/officeDocument/2006/relationships" xmlns:p="http://schemas.openxmlformats.org/presentationml/2006/main">
+  <p:cSld>
+    <p:spTree>
+      <p:nvGrpSpPr>
+        <p:cNvPr id="1" name=""/>
+        <p:cNvGrpSpPr/>
+        <p:nvPr/>
+      </p:nvGrpSpPr>
+      <p:grpSpPr>
+        <a:xfrm>
+          <a:off x="0" y="0"/>
+          <a:ext cx="0" cy="0"/>
+          <a:chOff x="0" y="0"/>
+          <a:chExt cx="0" cy="0"/>
+        </a:xfrm>
+      </p:grpSpPr>
+      <p:sp>
+        <p:nvSpPr>
+          <p:cNvPr id="2" name="Title 1"/>
+          <p:cNvSpPr>
+            <a:spLocks noGrp="1"/>
+          </p:cNvSpPr>
+          <p:nvPr>
+            <p:ph type="title"/>
+          </p:nvPr>
+        </p:nvSpPr>
+        <p:spPr>
+          <a:xfrm>
+            <a:off x="277148" y="118428"/>
+            <a:ext cx="8590000" cy="638175"/>
+          </a:xfrm>
+        </p:spPr>
+        <p:txBody>
+          <a:bodyPr>
+            <a:normAutofit/>
+          </a:bodyPr>
+          <a:lstStyle/>
+          <a:p>
+            <a:pPr>
+              <a:buNone/>
+              <a:defRPr b="0"/>
+            </a:pPr>
+            <a:r>
+              <a:rPr lang="en-US" sz="2800" b="0" i="0" dirty="0">
+                <a:solidFill>
+                  <a:srgbClr val="000000"/>
+                </a:solidFill>
+              </a:rPr>
+              <a:t>Three ways to obtain evidence</a:t>
+            </a:r>
+          </a:p>
+        </p:txBody>
+      </p:sp>
+      <p:sp>
+        <p:nvSpPr>
+          <p:cNvPr id="3" name="Slide Number Placeholder 3"/>
+          <p:cNvSpPr>
+            <a:spLocks noGrp="1"/>
+          </p:cNvSpPr>
+          <p:nvPr>
+            <p:ph type="sldNum" sz="quarter" idx="4"/>
+          </p:nvPr>
+        </p:nvSpPr>
+        <p:spPr/>
+        <p:txBody>
+          <a:bodyPr/>
+          <a:lstStyle/>
+          <a:p>
+            <a:fld id="{B7EB45DA-9A0D-DC49-8E02-F30A5DDC21C3}" type="slidenum">
+              <a:rPr lang="en-US" smtClean="0"/>
+              <a:t>9</a:t>
+            </a:fld>
+            <a:endParaRPr lang="en-US"/>
+          </a:p>
+        </p:txBody>
+      </p:sp>
+      <p:sp>
+        <p:nvSpPr>
+          <p:cNvPr id="110" name="B110"/>
+          <p:cNvSpPr/>
+          <p:nvPr/>
+        </p:nvSpPr>
+        <p:spPr>
+          <a:xfrm>
+            <a:off x="566928" y="1120000"/>
+            <a:ext cx="2540000" cy="800000"/>
+          </a:xfrm>
+          <a:prstGeom prst="rect">
+            <a:avLst/>
+          </a:prstGeom>
+          <a:solidFill>
+            <a:srgbClr val="8E6F3E">
+              <a:alpha val="25000"/>
+            </a:srgbClr>
+          </a:solidFill>
+          <a:ln>
+            <a:noFill/>
+          </a:ln>
+        </p:spPr>
+        <p:txBody>
+          <a:bodyPr wrap="square" lIns="91440" tIns="45720" rIns="91440" bIns="45720" anchor="ctr"/>
+          <a:lstStyle/>
+          <a:p>
+            <a:pPr algn="ctr">
+              <a:buNone/>
+            </a:pPr>
+            <a:r>
+              <a:rPr lang="en-US" sz="2200" b="1" i="0" dirty="0">
+                <a:solidFill>
+                  <a:srgbClr val="FFFFFF">
+                    <a:alpha val="25000"/>
+                  </a:srgbClr>
+                </a:solidFill>
+              </a:rPr>
+              <a:t>HUMAN</a:t>
+            </a:r>
+          </a:p>
+          <a:p>
+            <a:pPr algn="ctr">
+              <a:buNone/>
+            </a:pPr>
+            <a:r>
+              <a:rPr lang="en-US" sz="2200" b="1" i="0" dirty="0">
+                <a:solidFill>
+                  <a:srgbClr val="FFFFFF">
+                    <a:alpha val="25000"/>
+                  </a:srgbClr>
+                </a:solidFill>
+              </a:rPr>
+              <a:t>JUDGMENT</a:t>
+            </a:r>
+          </a:p>
+        </p:txBody>
+      </p:sp>
+      <p:sp>
+        <p:nvSpPr>
+          <p:cNvPr id="120" name="P120"/>
+          <p:cNvSpPr/>
+          <p:nvPr/>
+        </p:nvSpPr>
+        <p:spPr>
+          <a:xfrm>
+            <a:off x="566928" y="3220000"/>
+            <a:ext cx="2540000" cy="1000000"/>
+          </a:xfrm>
+          <a:prstGeom prst="rect">
+            <a:avLst/>
+          </a:prstGeom>
+          <a:solidFill>
+            <a:srgbClr val="F5F1E8">
+              <a:alpha val="25000"/>
+            </a:srgbClr>
+          </a:solidFill>
+          <a:ln w="12700">
+            <a:solidFill>
+              <a:srgbClr val="C9B991">
+                <a:alpha val="25000"/>
+              </a:srgbClr>
+            </a:solidFill>
+          </a:ln>
+        </p:spPr>
+        <p:txBody>
+          <a:bodyPr wrap="square" lIns="91440" tIns="45720" rIns="91440" bIns="45720" anchor="ctr"/>
+          <a:lstStyle/>
+          <a:p>
+            <a:pPr algn="ctr">
+              <a:buNone/>
+            </a:pPr>
+            <a:r>
+              <a:rPr lang="en-US" sz="2200" b="1" i="0" dirty="0">
+                <a:solidFill>
+                  <a:srgbClr val="5C4826">
+                    <a:alpha val="25000"/>
+                  </a:srgbClr>
+                </a:solidFill>
+              </a:rPr>
+              <a:t>Interpret an artifact</a:t>
+            </a:r>
+          </a:p>
+          <a:p>
+            <a:pPr algn="ctr">
+              <a:buNone/>
+            </a:pPr>
+            <a:r>
+              <a:rPr lang="en-US" sz="2000" b="0" i="1" dirty="0">
+                <a:solidFill>
+                  <a:srgbClr val="555960">
+                    <a:alpha val="25000"/>
+                  </a:srgbClr>
+                </a:solidFill>
+              </a:rPr>
+              <a:t>finite attention</a:t>
+            </a:r>
+          </a:p>
+        </p:txBody>
+      </p:sp>
+      <p:sp>
+        <p:nvSpPr>
+          <p:cNvPr id="130" name="L130"/>
+          <p:cNvSpPr/>
+          <p:nvPr/>
+        </p:nvSpPr>
+        <p:spPr>
+          <a:xfrm>
+            <a:off x="566928" y="2120000"/>
+            <a:ext cx="2540000" cy="900000"/>
+          </a:xfrm>
+          <a:prstGeom prst="rect">
+            <a:avLst/>
+          </a:prstGeom>
+          <a:noFill/>
+          <a:ln>
+            <a:noFill/>
+          </a:ln>
+        </p:spPr>
+        <p:txBody>
+          <a:bodyPr wrap="square" lIns="91440" tIns="45720" rIns="91440" bIns="45720" anchor="ctr"/>
+          <a:lstStyle/>
+          <a:p>
+            <a:pPr algn="ctr">
+              <a:buNone/>
+            </a:pPr>
+            <a:r>
+              <a:rPr lang="en-US" sz="4000" b="0" i="0" dirty="0">
+                <a:solidFill>
+                  <a:srgbClr val="5C4826">
+                    <a:alpha val="25000"/>
+                  </a:srgbClr>
+                </a:solidFill>
+              </a:rPr>
+              <a:t>👁</a:t>
+            </a:r>
+          </a:p>
+        </p:txBody>
+      </p:sp>
+      <p:sp>
+        <p:nvSpPr>
+          <p:cNvPr id="111" name="B111"/>
+          <p:cNvSpPr/>
+          <p:nvPr/>
+        </p:nvSpPr>
+        <p:spPr>
+          <a:xfrm>
+            <a:off x="3302000" y="1120000"/>
+            <a:ext cx="2540000" cy="800000"/>
+          </a:xfrm>
+          <a:prstGeom prst="rect">
+            <a:avLst/>
+          </a:prstGeom>
+          <a:solidFill>
+            <a:srgbClr val="8E6F3E"/>
+          </a:solidFill>
+          <a:ln>
+            <a:noFill/>
+          </a:ln>
+        </p:spPr>
+        <p:txBody>
+          <a:bodyPr wrap="square" lIns="91440" tIns="45720" rIns="91440" bIns="45720" anchor="ctr"/>
+          <a:lstStyle/>
+          <a:p>
+            <a:pPr algn="ctr">
+              <a:buNone/>
+            </a:pPr>
+            <a:r>
+              <a:rPr lang="en-US" sz="2200" b="1" i="0" dirty="0">
+                <a:solidFill>
+                  <a:srgbClr val="FFFFFF"/>
+                </a:solidFill>
+              </a:rPr>
+              <a:t>REASONING OVER</a:t>
+            </a:r>
+          </a:p>
+          <a:p>
+            <a:pPr algn="ctr">
+              <a:buNone/>
+            </a:pPr>
+            <a:r>
+              <a:rPr lang="en-US" sz="2200" b="1" i="0" dirty="0">
+                <a:solidFill>
+                  <a:srgbClr val="FFFFFF"/>
+                </a:solidFill>
+              </a:rPr>
+              <a:t>POSSIBLE BEHAVIOR</a:t>
+            </a:r>
+          </a:p>
+        </p:txBody>
+      </p:sp>
+      <p:sp>
+        <p:nvSpPr>
+          <p:cNvPr id="121" name="P121"/>
+          <p:cNvSpPr/>
+          <p:nvPr/>
+        </p:nvSpPr>
+        <p:spPr>
+          <a:xfrm>
+            <a:off x="3302000" y="3220000"/>
+            <a:ext cx="2540000" cy="1000000"/>
+          </a:xfrm>
+          <a:prstGeom prst="rect">
+            <a:avLst/>
+          </a:prstGeom>
+          <a:solidFill>
+            <a:srgbClr val="F5F1E8"/>
+          </a:solidFill>
+          <a:ln w="12700">
+            <a:solidFill>
+              <a:srgbClr val="C9B991"/>
+            </a:solidFill>
+          </a:ln>
+        </p:spPr>
+        <p:txBody>
+          <a:bodyPr wrap="square" lIns="91440" tIns="45720" rIns="91440" bIns="45720" anchor="ctr"/>
+          <a:lstStyle/>
+          <a:p>
+            <a:pPr algn="ctr">
+              <a:buNone/>
+            </a:pPr>
+            <a:r>
+              <a:rPr lang="en-US" sz="2200" b="1" i="0" dirty="0">
+                <a:solidFill>
+                  <a:srgbClr val="5C4826"/>
+                </a:solidFill>
+              </a:rPr>
+              <a:t>Analyze a representation</a:t>
+            </a:r>
+          </a:p>
+          <a:p>
+            <a:pPr algn="ctr">
+              <a:buNone/>
+            </a:pPr>
+            <a:r>
+              <a:rPr lang="en-US" sz="2000" b="0" i="1" dirty="0">
+                <a:solidFill>
+                  <a:srgbClr val="555960"/>
+                </a:solidFill>
+              </a:rPr>
+              <a:t>model limits</a:t>
+            </a:r>
+          </a:p>
+        </p:txBody>
+      </p:sp>
+      <p:sp>
+        <p:nvSpPr>
+          <p:cNvPr id="131" name="L131"/>
+          <p:cNvSpPr/>
+          <p:nvPr/>
+        </p:nvSpPr>
+        <p:spPr>
+          <a:xfrm>
+            <a:off x="3302000" y="2120000"/>
+            <a:ext cx="2540000" cy="900000"/>
+          </a:xfrm>
+          <a:prstGeom prst="rect">
+            <a:avLst/>
+          </a:prstGeom>
+          <a:noFill/>
+          <a:ln>
+            <a:noFill/>
+          </a:ln>
+        </p:spPr>
+        <p:txBody>
+          <a:bodyPr wrap="square" lIns="91440" tIns="45720" rIns="91440" bIns="45720" anchor="ctr"/>
+          <a:lstStyle/>
+          <a:p>
+            <a:pPr algn="ctr">
+              <a:buNone/>
+            </a:pPr>
+            <a:r>
+              <a:rPr lang="en-US" sz="4000" b="0" i="0" dirty="0">
+                <a:solidFill>
+                  <a:srgbClr val="5C4826"/>
+                </a:solidFill>
+              </a:rPr>
+              <a:t>🗺</a:t>
+            </a:r>
+          </a:p>
+        </p:txBody>
+      </p:sp>
+      <p:sp>
+        <p:nvSpPr>
+          <p:cNvPr id="112" name="B112"/>
+          <p:cNvSpPr/>
+          <p:nvPr/>
+        </p:nvSpPr>
+        <p:spPr>
+          <a:xfrm>
+            <a:off x="6037072" y="1120000"/>
+            <a:ext cx="2540000" cy="800000"/>
+          </a:xfrm>
+          <a:prstGeom prst="rect">
+            <a:avLst/>
+          </a:prstGeom>
+          <a:solidFill>
+            <a:srgbClr val="8E6F3E">
+              <a:alpha val="25000"/>
+            </a:srgbClr>
+          </a:solidFill>
+          <a:ln>
+            <a:noFill/>
+          </a:ln>
+        </p:spPr>
+        <p:txBody>
+          <a:bodyPr wrap="square" lIns="91440" tIns="45720" rIns="91440" bIns="45720" anchor="ctr"/>
+          <a:lstStyle/>
+          <a:p>
+            <a:pPr algn="ctr">
+              <a:buNone/>
+            </a:pPr>
+            <a:r>
+              <a:rPr lang="en-US" sz="2200" b="1" i="0" dirty="0">
+                <a:solidFill>
+                  <a:srgbClr val="FFFFFF">
+                    <a:alpha val="25000"/>
+                  </a:srgbClr>
+                </a:solidFill>
+              </a:rPr>
+              <a:t>OBSERVING</a:t>
+            </a:r>
+          </a:p>
+          <a:p>
+            <a:pPr algn="ctr">
+              <a:buNone/>
+            </a:pPr>
+            <a:r>
+              <a:rPr lang="en-US" sz="2200" b="1" i="0" dirty="0">
+                <a:solidFill>
+                  <a:srgbClr val="FFFFFF">
+                    <a:alpha val="25000"/>
+                  </a:srgbClr>
+                </a:solidFill>
+              </a:rPr>
+              <a:t>EXECUTION</a:t>
+            </a:r>
+          </a:p>
+        </p:txBody>
+      </p:sp>
+      <p:sp>
+        <p:nvSpPr>
+          <p:cNvPr id="122" name="P122"/>
+          <p:cNvSpPr/>
+          <p:nvPr/>
+        </p:nvSpPr>
+        <p:spPr>
+          <a:xfrm>
+            <a:off x="6037072" y="3220000"/>
+            <a:ext cx="2540000" cy="1000000"/>
+          </a:xfrm>
+          <a:prstGeom prst="rect">
+            <a:avLst/>
+          </a:prstGeom>
+          <a:solidFill>
+            <a:srgbClr val="F5F1E8">
+              <a:alpha val="25000"/>
+            </a:srgbClr>
+          </a:solidFill>
+          <a:ln w="12700">
+            <a:solidFill>
+              <a:srgbClr val="C9B991">
+                <a:alpha val="25000"/>
+              </a:srgbClr>
+            </a:solidFill>
+          </a:ln>
+        </p:spPr>
+        <p:txBody>
+          <a:bodyPr wrap="square" lIns="91440" tIns="45720" rIns="91440" bIns="45720" anchor="ctr"/>
+          <a:lstStyle/>
+          <a:p>
+            <a:pPr algn="ctr">
+              <a:buNone/>
+            </a:pPr>
+            <a:r>
+              <a:rPr lang="en-US" sz="2200" b="1" i="0" dirty="0">
+                <a:solidFill>
+                  <a:srgbClr val="5C4826">
+                    <a:alpha val="25000"/>
+                  </a:srgbClr>
+                </a:solidFill>
+              </a:rPr>
+              <a:t>Run and observe</a:t>
+            </a:r>
+          </a:p>
+          <a:p>
+            <a:pPr algn="ctr">
+              <a:buNone/>
+            </a:pPr>
+            <a:r>
+              <a:rPr lang="en-US" sz="2000" b="0" i="1" dirty="0">
+                <a:solidFill>
+                  <a:srgbClr val="555960">
+                    <a:alpha val="25000"/>
+                  </a:srgbClr>
+                </a:solidFill>
+              </a:rPr>
+              <a:t>selected executions</a:t>
+            </a:r>
+          </a:p>
+        </p:txBody>
+      </p:sp>
+      <p:sp>
+        <p:nvSpPr>
+          <p:cNvPr id="132" name="L132"/>
+          <p:cNvSpPr/>
+          <p:nvPr/>
+        </p:nvSpPr>
+        <p:spPr>
+          <a:xfrm>
+            <a:off x="6037072" y="2120000"/>
+            <a:ext cx="2540000" cy="900000"/>
+          </a:xfrm>
+          <a:prstGeom prst="rect">
+            <a:avLst/>
+          </a:prstGeom>
+          <a:noFill/>
+          <a:ln>
+            <a:noFill/>
+          </a:ln>
+        </p:spPr>
+        <p:txBody>
+          <a:bodyPr wrap="square" lIns="91440" tIns="45720" rIns="91440" bIns="45720" anchor="ctr"/>
+          <a:lstStyle/>
+          <a:p>
+            <a:pPr algn="ctr">
+              <a:buNone/>
+            </a:pPr>
+            <a:r>
+              <a:rPr lang="en-US" sz="4000" b="0" i="0" dirty="0">
+                <a:solidFill>
+                  <a:srgbClr val="5C4826">
+                    <a:alpha val="25000"/>
+                  </a:srgbClr>
+                </a:solidFill>
+              </a:rPr>
+              <a:t>▶</a:t>
+            </a:r>
+          </a:p>
+        </p:txBody>
+      </p:sp>
+      <p:sp>
+        <p:nvSpPr>
+          <p:cNvPr id="140" name="E140"/>
+          <p:cNvSpPr/>
+          <p:nvPr/>
+        </p:nvSpPr>
+        <p:spPr>
+          <a:xfrm>
+            <a:off x="566928" y="4550000"/>
+            <a:ext cx="8010144" cy="950000"/>
+          </a:xfrm>
+          <a:prstGeom prst="rect">
+            <a:avLst/>
+          </a:prstGeom>
+          <a:solidFill>
+            <a:srgbClr val="FBF8F2"/>
+          </a:solidFill>
+          <a:ln w="19050">
+            <a:solidFill>
+              <a:srgbClr val="5C4826"/>
+            </a:solidFill>
+          </a:ln>
+        </p:spPr>
+        <p:txBody>
+          <a:bodyPr wrap="square" lIns="91440" tIns="45720" rIns="91440" bIns="45720" anchor="ctr"/>
+          <a:lstStyle/>
+          <a:p>
+            <a:pPr algn="ctr">
+              <a:buNone/>
+            </a:pPr>
+            <a:r>
+              <a:rPr lang="en-US" sz="2400" b="1" i="0" dirty="0">
+                <a:solidFill>
+                  <a:srgbClr val="5C4826"/>
+                </a:solidFill>
+              </a:rPr>
+              <a:t>Mechanism and scope are independent choices.</a:t>
+            </a:r>
+          </a:p>
+          <a:p>
+            <a:pPr algn="ctr">
+              <a:buNone/>
+            </a:pPr>
+            <a:r>
+              <a:rPr lang="en-US" sz="2000" b="0" i="1" dirty="0">
+                <a:solidFill>
+                  <a:srgbClr val="555960"/>
+                </a:solidFill>
+              </a:rPr>
+              <a:t>A unit, a subsystem, or the whole system can be judged, reasoned about, or executed.</a:t>
+            </a:r>
+          </a:p>
+        </p:txBody>
+      </p:sp>
+      <p:sp>
+        <p:nvSpPr>
+          <p:cNvPr id="150" name="FooterBand"/>
+          <p:cNvSpPr/>
+          <p:nvPr/>
+        </p:nvSpPr>
+        <p:spPr>
+          <a:xfrm>
+            <a:off x="274320" y="5852160"/>
+            <a:ext cx="8595360" cy="566928"/>
+          </a:xfrm>
+          <a:prstGeom prst="rect">
+            <a:avLst/>
+          </a:prstGeom>
+          <a:solidFill>
+            <a:srgbClr val="8E6F3E"/>
+          </a:solidFill>
+          <a:ln>
+            <a:noFill/>
+          </a:ln>
+        </p:spPr>
+        <p:txBody>
+          <a:bodyPr wrap="square" lIns="91440" tIns="45720" rIns="91440" bIns="45720" anchor="ctr"/>
+          <a:lstStyle/>
+          <a:p>
+            <a:pPr algn="ctr">
+              <a:buNone/>
+            </a:pPr>
+            <a:r>
+              <a:rPr lang="en-US" sz="2000" b="1" i="0" dirty="0">
+                <a:solidFill>
+                  <a:srgbClr val="FFFFFF"/>
+                </a:solidFill>
+              </a:rPr>
+              <a:t>Three ways engineers come to know things about software.</a:t>
+            </a:r>
+          </a:p>
+        </p:txBody>
+      </p:sp>
+      <p:sp>
+        <p:nvSpPr>
+          <p:cNvPr id="900" name="NowMarker"/>
+          <p:cNvSpPr/>
+          <p:nvPr/>
+        </p:nvSpPr>
+        <p:spPr>
+          <a:xfrm>
+            <a:off x="3302000" y="780000"/>
+            <a:ext cx="2540000" cy="320000"/>
+          </a:xfrm>
+          <a:prstGeom prst="rect">
+            <a:avLst/>
+          </a:prstGeom>
+          <a:noFill/>
+          <a:ln>
+            <a:noFill/>
+          </a:ln>
+        </p:spPr>
+        <p:txBody>
+          <a:bodyPr wrap="square" lIns="0" tIns="0" rIns="0" bIns="0" anchor="ctr"/>
+          <a:lstStyle/>
+          <a:p>
+            <a:pPr algn="ctr">
+              <a:buNone/>
+            </a:pPr>
+            <a:r>
+              <a:rPr lang="en-US" sz="2000" b="1" i="0" dirty="0">
+                <a:solidFill>
+                  <a:srgbClr val="8E6F3E"/>
+                </a:solidFill>
+              </a:rPr>
+              <a:t>NOW ▼</a:t>
+            </a:r>
+          </a:p>
+        </p:txBody>
+      </p:sp>
+    </p:spTree>
+  </p:cSld>
+  <p:clrMapOvr>
+    <a:masterClrMapping/>
+  </p:clrMapOvr>
+</p:sld>
+</file>
+
+<file path=ppt/slides/slide57.xml><?xml version="1.0" encoding="utf-8"?>
+<p:sld xmlns:a="http://schemas.openxmlformats.org/drawingml/2006/main" xmlns:r="http://schemas.openxmlformats.org/officeDocument/2006/relationships" xmlns:p="http://schemas.openxmlformats.org/presentationml/2006/main">
+  <p:cSld>
+    <p:spTree>
+      <p:nvGrpSpPr>
+        <p:cNvPr id="1" name=""/>
+        <p:cNvGrpSpPr/>
+        <p:nvPr/>
+      </p:nvGrpSpPr>
+      <p:grpSpPr>
+        <a:xfrm>
+          <a:off x="0" y="0"/>
+          <a:ext cx="0" cy="0"/>
+          <a:chOff x="0" y="0"/>
+          <a:chExt cx="0" cy="0"/>
+        </a:xfrm>
+      </p:grpSpPr>
+      <p:sp>
+        <p:nvSpPr>
+          <p:cNvPr id="2" name="Title 1"/>
+          <p:cNvSpPr>
+            <a:spLocks noGrp="1"/>
+          </p:cNvSpPr>
+          <p:nvPr>
+            <p:ph type="title"/>
+          </p:nvPr>
+        </p:nvSpPr>
+        <p:spPr>
+          <a:xfrm>
+            <a:off x="277148" y="118428"/>
+            <a:ext cx="8590000" cy="638175"/>
+          </a:xfrm>
+        </p:spPr>
+        <p:txBody>
+          <a:bodyPr>
+            <a:normAutofit/>
+          </a:bodyPr>
+          <a:lstStyle/>
+          <a:p>
+            <a:pPr>
+              <a:buNone/>
+              <a:defRPr b="0"/>
+            </a:pPr>
+            <a:r>
+              <a:rPr lang="en-US" sz="2800" b="0" i="0" dirty="0">
+                <a:solidFill>
+                  <a:srgbClr val="000000"/>
+                </a:solidFill>
+              </a:rPr>
+              <a:t>Three ways to obtain evidence</a:t>
+            </a:r>
+          </a:p>
+        </p:txBody>
+      </p:sp>
+      <p:sp>
+        <p:nvSpPr>
+          <p:cNvPr id="3" name="Slide Number Placeholder 3"/>
+          <p:cNvSpPr>
+            <a:spLocks noGrp="1"/>
+          </p:cNvSpPr>
+          <p:nvPr>
+            <p:ph type="sldNum" sz="quarter" idx="4"/>
+          </p:nvPr>
+        </p:nvSpPr>
+        <p:spPr/>
+        <p:txBody>
+          <a:bodyPr/>
+          <a:lstStyle/>
+          <a:p>
+            <a:fld id="{B7EB45DA-9A0D-DC49-8E02-F30A5DDC21C3}" type="slidenum">
+              <a:rPr lang="en-US" smtClean="0"/>
+              <a:t>9</a:t>
+            </a:fld>
+            <a:endParaRPr lang="en-US"/>
+          </a:p>
+        </p:txBody>
+      </p:sp>
+      <p:sp>
+        <p:nvSpPr>
+          <p:cNvPr id="110" name="B110"/>
+          <p:cNvSpPr/>
+          <p:nvPr/>
+        </p:nvSpPr>
+        <p:spPr>
+          <a:xfrm>
+            <a:off x="566928" y="1120000"/>
+            <a:ext cx="2540000" cy="800000"/>
+          </a:xfrm>
+          <a:prstGeom prst="rect">
+            <a:avLst/>
+          </a:prstGeom>
+          <a:solidFill>
+            <a:srgbClr val="8E6F3E">
+              <a:alpha val="25000"/>
+            </a:srgbClr>
+          </a:solidFill>
+          <a:ln>
+            <a:noFill/>
+          </a:ln>
+        </p:spPr>
+        <p:txBody>
+          <a:bodyPr wrap="square" lIns="91440" tIns="45720" rIns="91440" bIns="45720" anchor="ctr"/>
+          <a:lstStyle/>
+          <a:p>
+            <a:pPr algn="ctr">
+              <a:buNone/>
+            </a:pPr>
+            <a:r>
+              <a:rPr lang="en-US" sz="2200" b="1" i="0" dirty="0">
+                <a:solidFill>
+                  <a:srgbClr val="FFFFFF">
+                    <a:alpha val="25000"/>
+                  </a:srgbClr>
+                </a:solidFill>
+              </a:rPr>
+              <a:t>HUMAN</a:t>
+            </a:r>
+          </a:p>
+          <a:p>
+            <a:pPr algn="ctr">
+              <a:buNone/>
+            </a:pPr>
+            <a:r>
+              <a:rPr lang="en-US" sz="2200" b="1" i="0" dirty="0">
+                <a:solidFill>
+                  <a:srgbClr val="FFFFFF">
+                    <a:alpha val="25000"/>
+                  </a:srgbClr>
+                </a:solidFill>
+              </a:rPr>
+              <a:t>JUDGMENT</a:t>
+            </a:r>
+          </a:p>
+        </p:txBody>
+      </p:sp>
+      <p:sp>
+        <p:nvSpPr>
+          <p:cNvPr id="120" name="P120"/>
+          <p:cNvSpPr/>
+          <p:nvPr/>
+        </p:nvSpPr>
+        <p:spPr>
+          <a:xfrm>
+            <a:off x="566928" y="3220000"/>
+            <a:ext cx="2540000" cy="1000000"/>
+          </a:xfrm>
+          <a:prstGeom prst="rect">
+            <a:avLst/>
+          </a:prstGeom>
+          <a:solidFill>
+            <a:srgbClr val="F5F1E8">
+              <a:alpha val="25000"/>
+            </a:srgbClr>
+          </a:solidFill>
+          <a:ln w="12700">
+            <a:solidFill>
+              <a:srgbClr val="C9B991">
+                <a:alpha val="25000"/>
+              </a:srgbClr>
+            </a:solidFill>
+          </a:ln>
+        </p:spPr>
+        <p:txBody>
+          <a:bodyPr wrap="square" lIns="91440" tIns="45720" rIns="91440" bIns="45720" anchor="ctr"/>
+          <a:lstStyle/>
+          <a:p>
+            <a:pPr algn="ctr">
+              <a:buNone/>
+            </a:pPr>
+            <a:r>
+              <a:rPr lang="en-US" sz="2200" b="1" i="0" dirty="0">
+                <a:solidFill>
+                  <a:srgbClr val="5C4826">
+                    <a:alpha val="25000"/>
+                  </a:srgbClr>
+                </a:solidFill>
+              </a:rPr>
+              <a:t>Interpret an artifact</a:t>
+            </a:r>
+          </a:p>
+          <a:p>
+            <a:pPr algn="ctr">
+              <a:buNone/>
+            </a:pPr>
+            <a:r>
+              <a:rPr lang="en-US" sz="2000" b="0" i="1" dirty="0">
+                <a:solidFill>
+                  <a:srgbClr val="555960">
+                    <a:alpha val="25000"/>
+                  </a:srgbClr>
+                </a:solidFill>
+              </a:rPr>
+              <a:t>finite attention</a:t>
+            </a:r>
+          </a:p>
+        </p:txBody>
+      </p:sp>
+      <p:sp>
+        <p:nvSpPr>
+          <p:cNvPr id="130" name="L130"/>
+          <p:cNvSpPr/>
+          <p:nvPr/>
+        </p:nvSpPr>
+        <p:spPr>
+          <a:xfrm>
+            <a:off x="566928" y="2120000"/>
+            <a:ext cx="2540000" cy="900000"/>
+          </a:xfrm>
+          <a:prstGeom prst="rect">
+            <a:avLst/>
+          </a:prstGeom>
+          <a:noFill/>
+          <a:ln>
+            <a:noFill/>
+          </a:ln>
+        </p:spPr>
+        <p:txBody>
+          <a:bodyPr wrap="square" lIns="91440" tIns="45720" rIns="91440" bIns="45720" anchor="ctr"/>
+          <a:lstStyle/>
+          <a:p>
+            <a:pPr algn="ctr">
+              <a:buNone/>
+            </a:pPr>
+            <a:r>
+              <a:rPr lang="en-US" sz="4000" b="0" i="0" dirty="0">
+                <a:solidFill>
+                  <a:srgbClr val="5C4826">
+                    <a:alpha val="25000"/>
+                  </a:srgbClr>
+                </a:solidFill>
+              </a:rPr>
+              <a:t>👁</a:t>
+            </a:r>
+          </a:p>
+        </p:txBody>
+      </p:sp>
+      <p:sp>
+        <p:nvSpPr>
+          <p:cNvPr id="111" name="B111"/>
+          <p:cNvSpPr/>
+          <p:nvPr/>
+        </p:nvSpPr>
+        <p:spPr>
+          <a:xfrm>
+            <a:off x="3302000" y="1120000"/>
+            <a:ext cx="2540000" cy="800000"/>
+          </a:xfrm>
+          <a:prstGeom prst="rect">
+            <a:avLst/>
+          </a:prstGeom>
+          <a:solidFill>
+            <a:srgbClr val="8E6F3E">
+              <a:alpha val="25000"/>
+            </a:srgbClr>
+          </a:solidFill>
+          <a:ln>
+            <a:noFill/>
+          </a:ln>
+        </p:spPr>
+        <p:txBody>
+          <a:bodyPr wrap="square" lIns="91440" tIns="45720" rIns="91440" bIns="45720" anchor="ctr"/>
+          <a:lstStyle/>
+          <a:p>
+            <a:pPr algn="ctr">
+              <a:buNone/>
+            </a:pPr>
+            <a:r>
+              <a:rPr lang="en-US" sz="2200" b="1" i="0" dirty="0">
+                <a:solidFill>
+                  <a:srgbClr val="FFFFFF">
+                    <a:alpha val="25000"/>
+                  </a:srgbClr>
+                </a:solidFill>
+              </a:rPr>
+              <a:t>REASONING OVER</a:t>
+            </a:r>
+          </a:p>
+          <a:p>
+            <a:pPr algn="ctr">
+              <a:buNone/>
+            </a:pPr>
+            <a:r>
+              <a:rPr lang="en-US" sz="2200" b="1" i="0" dirty="0">
+                <a:solidFill>
+                  <a:srgbClr val="FFFFFF">
+                    <a:alpha val="25000"/>
+                  </a:srgbClr>
+                </a:solidFill>
+              </a:rPr>
+              <a:t>POSSIBLE BEHAVIOR</a:t>
+            </a:r>
+          </a:p>
+        </p:txBody>
+      </p:sp>
+      <p:sp>
+        <p:nvSpPr>
+          <p:cNvPr id="121" name="P121"/>
+          <p:cNvSpPr/>
+          <p:nvPr/>
+        </p:nvSpPr>
+        <p:spPr>
+          <a:xfrm>
+            <a:off x="3302000" y="3220000"/>
+            <a:ext cx="2540000" cy="1000000"/>
+          </a:xfrm>
+          <a:prstGeom prst="rect">
+            <a:avLst/>
+          </a:prstGeom>
+          <a:solidFill>
+            <a:srgbClr val="F5F1E8">
+              <a:alpha val="25000"/>
+            </a:srgbClr>
+          </a:solidFill>
+          <a:ln w="12700">
+            <a:solidFill>
+              <a:srgbClr val="C9B991">
+                <a:alpha val="25000"/>
+              </a:srgbClr>
+            </a:solidFill>
+          </a:ln>
+        </p:spPr>
+        <p:txBody>
+          <a:bodyPr wrap="square" lIns="91440" tIns="45720" rIns="91440" bIns="45720" anchor="ctr"/>
+          <a:lstStyle/>
+          <a:p>
+            <a:pPr algn="ctr">
+              <a:buNone/>
+            </a:pPr>
+            <a:r>
+              <a:rPr lang="en-US" sz="2200" b="1" i="0" dirty="0">
+                <a:solidFill>
+                  <a:srgbClr val="5C4826">
+                    <a:alpha val="25000"/>
+                  </a:srgbClr>
+                </a:solidFill>
+              </a:rPr>
+              <a:t>Analyze a representation</a:t>
+            </a:r>
+          </a:p>
+          <a:p>
+            <a:pPr algn="ctr">
+              <a:buNone/>
+            </a:pPr>
+            <a:r>
+              <a:rPr lang="en-US" sz="2000" b="0" i="1" dirty="0">
+                <a:solidFill>
+                  <a:srgbClr val="555960">
+                    <a:alpha val="25000"/>
+                  </a:srgbClr>
+                </a:solidFill>
+              </a:rPr>
+              <a:t>model limits</a:t>
+            </a:r>
+          </a:p>
+        </p:txBody>
+      </p:sp>
+      <p:sp>
+        <p:nvSpPr>
+          <p:cNvPr id="131" name="L131"/>
+          <p:cNvSpPr/>
+          <p:nvPr/>
+        </p:nvSpPr>
+        <p:spPr>
+          <a:xfrm>
+            <a:off x="3302000" y="2120000"/>
+            <a:ext cx="2540000" cy="900000"/>
+          </a:xfrm>
+          <a:prstGeom prst="rect">
+            <a:avLst/>
+          </a:prstGeom>
+          <a:noFill/>
+          <a:ln>
+            <a:noFill/>
+          </a:ln>
+        </p:spPr>
+        <p:txBody>
+          <a:bodyPr wrap="square" lIns="91440" tIns="45720" rIns="91440" bIns="45720" anchor="ctr"/>
+          <a:lstStyle/>
+          <a:p>
+            <a:pPr algn="ctr">
+              <a:buNone/>
+            </a:pPr>
+            <a:r>
+              <a:rPr lang="en-US" sz="4000" b="0" i="0" dirty="0">
+                <a:solidFill>
+                  <a:srgbClr val="5C4826">
+                    <a:alpha val="25000"/>
+                  </a:srgbClr>
+                </a:solidFill>
+              </a:rPr>
+              <a:t>🗺</a:t>
+            </a:r>
+          </a:p>
+        </p:txBody>
+      </p:sp>
+      <p:sp>
+        <p:nvSpPr>
+          <p:cNvPr id="112" name="B112"/>
+          <p:cNvSpPr/>
+          <p:nvPr/>
+        </p:nvSpPr>
+        <p:spPr>
+          <a:xfrm>
+            <a:off x="6037072" y="1120000"/>
+            <a:ext cx="2540000" cy="800000"/>
+          </a:xfrm>
+          <a:prstGeom prst="rect">
+            <a:avLst/>
+          </a:prstGeom>
+          <a:solidFill>
+            <a:srgbClr val="8E6F3E"/>
+          </a:solidFill>
+          <a:ln>
+            <a:noFill/>
+          </a:ln>
+        </p:spPr>
+        <p:txBody>
+          <a:bodyPr wrap="square" lIns="91440" tIns="45720" rIns="91440" bIns="45720" anchor="ctr"/>
+          <a:lstStyle/>
+          <a:p>
+            <a:pPr algn="ctr">
+              <a:buNone/>
+            </a:pPr>
+            <a:r>
+              <a:rPr lang="en-US" sz="2200" b="1" i="0" dirty="0">
+                <a:solidFill>
+                  <a:srgbClr val="FFFFFF"/>
+                </a:solidFill>
+              </a:rPr>
+              <a:t>OBSERVING</a:t>
+            </a:r>
+          </a:p>
+          <a:p>
+            <a:pPr algn="ctr">
+              <a:buNone/>
+            </a:pPr>
+            <a:r>
+              <a:rPr lang="en-US" sz="2200" b="1" i="0" dirty="0">
+                <a:solidFill>
+                  <a:srgbClr val="FFFFFF"/>
+                </a:solidFill>
+              </a:rPr>
+              <a:t>EXECUTION</a:t>
+            </a:r>
+          </a:p>
+        </p:txBody>
+      </p:sp>
+      <p:sp>
+        <p:nvSpPr>
+          <p:cNvPr id="122" name="P122"/>
+          <p:cNvSpPr/>
+          <p:nvPr/>
+        </p:nvSpPr>
+        <p:spPr>
+          <a:xfrm>
+            <a:off x="6037072" y="3220000"/>
+            <a:ext cx="2540000" cy="1000000"/>
+          </a:xfrm>
+          <a:prstGeom prst="rect">
+            <a:avLst/>
+          </a:prstGeom>
+          <a:solidFill>
+            <a:srgbClr val="F5F1E8"/>
+          </a:solidFill>
+          <a:ln w="12700">
+            <a:solidFill>
+              <a:srgbClr val="C9B991"/>
+            </a:solidFill>
+          </a:ln>
+        </p:spPr>
+        <p:txBody>
+          <a:bodyPr wrap="square" lIns="91440" tIns="45720" rIns="91440" bIns="45720" anchor="ctr"/>
+          <a:lstStyle/>
+          <a:p>
+            <a:pPr algn="ctr">
+              <a:buNone/>
+            </a:pPr>
+            <a:r>
+              <a:rPr lang="en-US" sz="2200" b="1" i="0" dirty="0">
+                <a:solidFill>
+                  <a:srgbClr val="5C4826"/>
+                </a:solidFill>
+              </a:rPr>
+              <a:t>Run and observe</a:t>
+            </a:r>
+          </a:p>
+          <a:p>
+            <a:pPr algn="ctr">
+              <a:buNone/>
+            </a:pPr>
+            <a:r>
+              <a:rPr lang="en-US" sz="2000" b="0" i="1" dirty="0">
+                <a:solidFill>
+                  <a:srgbClr val="555960"/>
+                </a:solidFill>
+              </a:rPr>
+              <a:t>selected executions</a:t>
+            </a:r>
+          </a:p>
+        </p:txBody>
+      </p:sp>
+      <p:sp>
+        <p:nvSpPr>
+          <p:cNvPr id="132" name="L132"/>
+          <p:cNvSpPr/>
+          <p:nvPr/>
+        </p:nvSpPr>
+        <p:spPr>
+          <a:xfrm>
+            <a:off x="6037072" y="2120000"/>
+            <a:ext cx="2540000" cy="900000"/>
+          </a:xfrm>
+          <a:prstGeom prst="rect">
+            <a:avLst/>
+          </a:prstGeom>
+          <a:noFill/>
+          <a:ln>
+            <a:noFill/>
+          </a:ln>
+        </p:spPr>
+        <p:txBody>
+          <a:bodyPr wrap="square" lIns="91440" tIns="45720" rIns="91440" bIns="45720" anchor="ctr"/>
+          <a:lstStyle/>
+          <a:p>
+            <a:pPr algn="ctr">
+              <a:buNone/>
+            </a:pPr>
+            <a:r>
+              <a:rPr lang="en-US" sz="4000" b="0" i="0" dirty="0">
+                <a:solidFill>
+                  <a:srgbClr val="5C4826"/>
+                </a:solidFill>
+              </a:rPr>
+              <a:t>▶</a:t>
+            </a:r>
+          </a:p>
+        </p:txBody>
+      </p:sp>
+      <p:sp>
+        <p:nvSpPr>
+          <p:cNvPr id="140" name="E140"/>
+          <p:cNvSpPr/>
+          <p:nvPr/>
+        </p:nvSpPr>
+        <p:spPr>
+          <a:xfrm>
+            <a:off x="566928" y="4550000"/>
+            <a:ext cx="8010144" cy="950000"/>
+          </a:xfrm>
+          <a:prstGeom prst="rect">
+            <a:avLst/>
+          </a:prstGeom>
+          <a:solidFill>
+            <a:srgbClr val="FBF8F2"/>
+          </a:solidFill>
+          <a:ln w="19050">
+            <a:solidFill>
+              <a:srgbClr val="5C4826"/>
+            </a:solidFill>
+          </a:ln>
+        </p:spPr>
+        <p:txBody>
+          <a:bodyPr wrap="square" lIns="91440" tIns="45720" rIns="91440" bIns="45720" anchor="ctr"/>
+          <a:lstStyle/>
+          <a:p>
+            <a:pPr algn="ctr">
+              <a:buNone/>
+            </a:pPr>
+            <a:r>
+              <a:rPr lang="en-US" sz="2400" b="1" i="0" dirty="0">
+                <a:solidFill>
+                  <a:srgbClr val="5C4826"/>
+                </a:solidFill>
+              </a:rPr>
+              <a:t>Mechanism and scope are independent choices.</a:t>
+            </a:r>
+          </a:p>
+          <a:p>
+            <a:pPr algn="ctr">
+              <a:buNone/>
+            </a:pPr>
+            <a:r>
+              <a:rPr lang="en-US" sz="2000" b="0" i="1" dirty="0">
+                <a:solidFill>
+                  <a:srgbClr val="555960"/>
+                </a:solidFill>
+              </a:rPr>
+              <a:t>A unit, a subsystem, or the whole system can be judged, reasoned about, or executed.</a:t>
+            </a:r>
+          </a:p>
+        </p:txBody>
+      </p:sp>
+      <p:sp>
+        <p:nvSpPr>
+          <p:cNvPr id="150" name="FooterBand"/>
+          <p:cNvSpPr/>
+          <p:nvPr/>
+        </p:nvSpPr>
+        <p:spPr>
+          <a:xfrm>
+            <a:off x="274320" y="5852160"/>
+            <a:ext cx="8595360" cy="566928"/>
+          </a:xfrm>
+          <a:prstGeom prst="rect">
+            <a:avLst/>
+          </a:prstGeom>
+          <a:solidFill>
+            <a:srgbClr val="8E6F3E"/>
+          </a:solidFill>
+          <a:ln>
+            <a:noFill/>
+          </a:ln>
+        </p:spPr>
+        <p:txBody>
+          <a:bodyPr wrap="square" lIns="91440" tIns="45720" rIns="91440" bIns="45720" anchor="ctr"/>
+          <a:lstStyle/>
+          <a:p>
+            <a:pPr algn="ctr">
+              <a:buNone/>
+            </a:pPr>
+            <a:r>
+              <a:rPr lang="en-US" sz="2000" b="1" i="0" dirty="0">
+                <a:solidFill>
+                  <a:srgbClr val="FFFFFF"/>
+                </a:solidFill>
+              </a:rPr>
+              <a:t>Three ways engineers come to know things about software.</a:t>
+            </a:r>
+          </a:p>
+        </p:txBody>
+      </p:sp>
+      <p:sp>
+        <p:nvSpPr>
+          <p:cNvPr id="900" name="NowMarker"/>
+          <p:cNvSpPr/>
+          <p:nvPr/>
+        </p:nvSpPr>
+        <p:spPr>
+          <a:xfrm>
+            <a:off x="6037072" y="780000"/>
+            <a:ext cx="2540000" cy="320000"/>
+          </a:xfrm>
+          <a:prstGeom prst="rect">
+            <a:avLst/>
+          </a:prstGeom>
+          <a:noFill/>
+          <a:ln>
+            <a:noFill/>
+          </a:ln>
+        </p:spPr>
+        <p:txBody>
+          <a:bodyPr wrap="square" lIns="0" tIns="0" rIns="0" bIns="0" anchor="ctr"/>
+          <a:lstStyle/>
+          <a:p>
+            <a:pPr algn="ctr">
+              <a:buNone/>
+            </a:pPr>
+            <a:r>
+              <a:rPr lang="en-US" sz="2000" b="1" i="0" dirty="0">
+                <a:solidFill>
+                  <a:srgbClr val="8E6F3E"/>
+                </a:solidFill>
+              </a:rPr>
+              <a:t>NOW ▼</a:t>
+            </a:r>
+          </a:p>
+        </p:txBody>
+      </p:sp>
+    </p:spTree>
+  </p:cSld>
+  <p:clrMapOvr>
+    <a:masterClrMapping/>
+  </p:clrMapOvr>
+</p:sld>
+</file>
+
+<file path=ppt/slides/slide58.xml><?xml version="1.0" encoding="utf-8"?>
+<p:sld xmlns:a="http://schemas.openxmlformats.org/drawingml/2006/main" xmlns:r="http://schemas.openxmlformats.org/officeDocument/2006/relationships" xmlns:p="http://schemas.openxmlformats.org/presentationml/2006/main">
+  <p:cSld>
+    <p:spTree>
+      <p:nvGrpSpPr>
+        <p:cNvPr id="1" name=""/>
+        <p:cNvGrpSpPr/>
+        <p:nvPr/>
+      </p:nvGrpSpPr>
+      <p:grpSpPr>
+        <a:xfrm>
+          <a:off x="0" y="0"/>
+          <a:ext cx="0" cy="0"/>
+          <a:chOff x="0" y="0"/>
+          <a:chExt cx="0" cy="0"/>
+        </a:xfrm>
+      </p:grpSpPr>
+      <p:sp>
+        <p:nvSpPr>
+          <p:cNvPr id="2" name="Title 1"/>
+          <p:cNvSpPr>
+            <a:spLocks noGrp="1"/>
+          </p:cNvSpPr>
+          <p:nvPr>
+            <p:ph type="title"/>
+          </p:nvPr>
+        </p:nvSpPr>
+        <p:spPr>
+          <a:xfrm>
+            <a:off x="685800" y="2050000"/>
+            <a:ext cx="7772400" cy="900000"/>
+          </a:xfrm>
+        </p:spPr>
+        <p:txBody>
+          <a:bodyPr>
+            <a:normAutofit/>
+          </a:bodyPr>
+          <a:lstStyle/>
+          <a:p>
+            <a:pPr algn="ctr">
+              <a:buNone/>
+              <a:defRPr b="0"/>
+            </a:pPr>
+            <a:r>
+              <a:rPr lang="en-US" sz="4400" b="0" i="0" dirty="0">
+                <a:solidFill>
+                  <a:srgbClr val="000000"/>
+                </a:solidFill>
+              </a:rPr>
+              <a:t>Choosing Evidence</a:t>
+            </a:r>
+          </a:p>
+        </p:txBody>
+      </p:sp>
+      <p:sp>
+        <p:nvSpPr>
+          <p:cNvPr id="3" name="Slide Number Placeholder 3"/>
+          <p:cNvSpPr>
+            <a:spLocks noGrp="1"/>
+          </p:cNvSpPr>
+          <p:nvPr>
+            <p:ph type="sldNum" sz="quarter" idx="4"/>
+          </p:nvPr>
+        </p:nvSpPr>
+        <p:spPr/>
+        <p:txBody>
+          <a:bodyPr/>
+          <a:lstStyle/>
+          <a:p>
+            <a:fld id="{B7EB45DA-9A0D-DC49-8E02-F30A5DDC21C3}" type="slidenum">
+              <a:rPr lang="en-US" smtClean="0"/>
+              <a:t>22</a:t>
+            </a:fld>
+            <a:endParaRPr lang="en-US"/>
+          </a:p>
+        </p:txBody>
+      </p:sp>
+      <p:sp>
+        <p:nvSpPr>
+          <p:cNvPr id="110" name="M110"/>
+          <p:cNvSpPr/>
+          <p:nvPr/>
+        </p:nvSpPr>
+        <p:spPr>
+          <a:xfrm>
+            <a:off x="566928" y="840000"/>
+            <a:ext cx="2540000" cy="680000"/>
+          </a:xfrm>
+          <a:prstGeom prst="rect">
+            <a:avLst/>
+          </a:prstGeom>
+          <a:solidFill>
+            <a:srgbClr val="8E6F3E">
+              <a:alpha val="45000"/>
+            </a:srgbClr>
+          </a:solidFill>
+          <a:ln>
+            <a:noFill/>
+          </a:ln>
+        </p:spPr>
+        <p:txBody>
+          <a:bodyPr wrap="square" lIns="45720" tIns="45720" rIns="45720" bIns="45720" anchor="ctr"/>
+          <a:lstStyle/>
+          <a:p>
+            <a:pPr algn="ctr">
+              <a:buNone/>
+            </a:pPr>
+            <a:r>
+              <a:rPr lang="en-US" sz="2000" b="1" i="0" dirty="0">
+                <a:solidFill>
+                  <a:srgbClr val="FFFFFF"/>
+                </a:solidFill>
+              </a:rPr>
+              <a:t>HUMAN</a:t>
+            </a:r>
+          </a:p>
+          <a:p>
+            <a:pPr algn="ctr">
+              <a:buNone/>
+            </a:pPr>
+            <a:r>
+              <a:rPr lang="en-US" sz="2000" b="1" i="0" dirty="0">
+                <a:solidFill>
+                  <a:srgbClr val="FFFFFF"/>
+                </a:solidFill>
+              </a:rPr>
+              <a:t>JUDGMENT</a:t>
+            </a:r>
+          </a:p>
+        </p:txBody>
+      </p:sp>
+      <p:sp>
+        <p:nvSpPr>
+          <p:cNvPr id="111" name="M111"/>
+          <p:cNvSpPr/>
+          <p:nvPr/>
+        </p:nvSpPr>
+        <p:spPr>
+          <a:xfrm>
+            <a:off x="3302000" y="840000"/>
+            <a:ext cx="2540000" cy="680000"/>
+          </a:xfrm>
+          <a:prstGeom prst="rect">
+            <a:avLst/>
+          </a:prstGeom>
+          <a:solidFill>
+            <a:srgbClr val="8E6F3E">
+              <a:alpha val="45000"/>
+            </a:srgbClr>
+          </a:solidFill>
+          <a:ln>
+            <a:noFill/>
+          </a:ln>
+        </p:spPr>
+        <p:txBody>
+          <a:bodyPr wrap="square" lIns="45720" tIns="45720" rIns="45720" bIns="45720" anchor="ctr"/>
+          <a:lstStyle/>
+          <a:p>
+            <a:pPr algn="ctr">
+              <a:buNone/>
+            </a:pPr>
+            <a:r>
+              <a:rPr lang="en-US" sz="2000" b="1" i="0" dirty="0">
+                <a:solidFill>
+                  <a:srgbClr val="FFFFFF"/>
+                </a:solidFill>
+              </a:rPr>
+              <a:t>REASONING OVER</a:t>
+            </a:r>
+          </a:p>
+          <a:p>
+            <a:pPr algn="ctr">
+              <a:buNone/>
+            </a:pPr>
+            <a:r>
+              <a:rPr lang="en-US" sz="2000" b="1" i="0" dirty="0">
+                <a:solidFill>
+                  <a:srgbClr val="FFFFFF"/>
+                </a:solidFill>
+              </a:rPr>
+              <a:t>POSSIBLE BEHAVIOR</a:t>
+            </a:r>
+          </a:p>
+        </p:txBody>
+      </p:sp>
+      <p:sp>
+        <p:nvSpPr>
+          <p:cNvPr id="112" name="M112"/>
+          <p:cNvSpPr/>
+          <p:nvPr/>
+        </p:nvSpPr>
+        <p:spPr>
+          <a:xfrm>
+            <a:off x="6037072" y="840000"/>
+            <a:ext cx="2540000" cy="680000"/>
+          </a:xfrm>
+          <a:prstGeom prst="rect">
+            <a:avLst/>
+          </a:prstGeom>
+          <a:solidFill>
+            <a:srgbClr val="8E6F3E">
+              <a:alpha val="45000"/>
+            </a:srgbClr>
+          </a:solidFill>
+          <a:ln>
+            <a:noFill/>
+          </a:ln>
+        </p:spPr>
+        <p:txBody>
+          <a:bodyPr wrap="square" lIns="45720" tIns="45720" rIns="45720" bIns="45720" anchor="ctr"/>
+          <a:lstStyle/>
+          <a:p>
+            <a:pPr algn="ctr">
+              <a:buNone/>
+            </a:pPr>
+            <a:r>
+              <a:rPr lang="en-US" sz="2000" b="1" i="0" dirty="0">
+                <a:solidFill>
+                  <a:srgbClr val="FFFFFF"/>
+                </a:solidFill>
+              </a:rPr>
+              <a:t>OBSERVING</a:t>
+            </a:r>
+          </a:p>
+          <a:p>
+            <a:pPr algn="ctr">
+              <a:buNone/>
+            </a:pPr>
+            <a:r>
+              <a:rPr lang="en-US" sz="2000" b="1" i="0" dirty="0">
+                <a:solidFill>
+                  <a:srgbClr val="FFFFFF"/>
+                </a:solidFill>
+              </a:rPr>
+              <a:t>EXECUTION</a:t>
+            </a:r>
+          </a:p>
+        </p:txBody>
+      </p:sp>
+      <p:sp>
+        <p:nvSpPr>
+          <p:cNvPr id="115" name="T115"/>
+          <p:cNvSpPr/>
+          <p:nvPr/>
+        </p:nvSpPr>
+        <p:spPr>
+          <a:xfrm>
+            <a:off x="566928" y="1580000"/>
+            <a:ext cx="8010144" cy="320000"/>
+          </a:xfrm>
+          <a:prstGeom prst="rect">
+            <a:avLst/>
+          </a:prstGeom>
+          <a:noFill/>
+          <a:ln>
+            <a:noFill/>
+          </a:ln>
+        </p:spPr>
+        <p:txBody>
+          <a:bodyPr wrap="square" lIns="0" tIns="0" rIns="0" bIns="0" anchor="ctr"/>
+          <a:lstStyle/>
+          <a:p>
+            <a:pPr algn="ctr">
+              <a:buNone/>
+            </a:pPr>
+            <a:r>
+              <a:rPr lang="en-US" sz="2000" b="0" i="1" dirty="0">
+                <a:solidFill>
+                  <a:srgbClr val="555960"/>
+                </a:solidFill>
+              </a:rPr>
+              <a:t>what we already established</a:t>
+            </a:r>
+          </a:p>
+        </p:txBody>
+      </p:sp>
+      <p:sp>
+        <p:nvSpPr>
+          <p:cNvPr id="101" name="Rule"/>
+          <p:cNvSpPr/>
+          <p:nvPr/>
+        </p:nvSpPr>
+        <p:spPr>
+          <a:xfrm>
+            <a:off x="3429000" y="3060000"/>
+            <a:ext cx="2286000" cy="50800"/>
+          </a:xfrm>
+          <a:prstGeom prst="rect">
+            <a:avLst/>
+          </a:prstGeom>
+          <a:solidFill>
+            <a:srgbClr val="8E6F3E"/>
+          </a:solidFill>
+          <a:ln>
+            <a:noFill/>
+          </a:ln>
+        </p:spPr>
+        <p:txBody>
+          <a:bodyPr wrap="square" lIns="91440" tIns="45720" rIns="91440" bIns="45720" anchor="ctr"/>
+          <a:lstStyle/>
+          <a:p>
+            <a:pPr algn="ctr">
+              <a:buNone/>
+            </a:pPr>
+            <a:endParaRPr/>
+          </a:p>
+        </p:txBody>
+      </p:sp>
+      <p:sp>
+        <p:nvSpPr>
+          <p:cNvPr id="120" name="T120"/>
+          <p:cNvSpPr/>
+          <p:nvPr/>
+        </p:nvSpPr>
+        <p:spPr>
+          <a:xfrm>
+            <a:off x="685800" y="3280000"/>
+            <a:ext cx="7772400" cy="820000"/>
+          </a:xfrm>
+          <a:prstGeom prst="rect">
+            <a:avLst/>
+          </a:prstGeom>
+          <a:noFill/>
+          <a:ln>
+            <a:noFill/>
+          </a:ln>
+        </p:spPr>
+        <p:txBody>
+          <a:bodyPr wrap="square" lIns="0" tIns="0" rIns="0" bIns="0" anchor="ctr"/>
+          <a:lstStyle/>
+          <a:p>
+            <a:pPr algn="ctr">
+              <a:buNone/>
+            </a:pPr>
+            <a:r>
+              <a:rPr lang="en-US" sz="2400" b="0" i="0" dirty="0">
+                <a:solidFill>
+                  <a:srgbClr val="000000"/>
+                </a:solidFill>
+              </a:rPr>
+              <a:t>We have ways to obtain evidence.</a:t>
+            </a:r>
+          </a:p>
+          <a:p>
+            <a:pPr algn="ctr">
+              <a:buNone/>
+            </a:pPr>
+            <a:r>
+              <a:rPr lang="en-US" sz="2400" b="1" i="0" dirty="0">
+                <a:solidFill>
+                  <a:srgbClr val="5C4826"/>
+                </a:solidFill>
+              </a:rPr>
+              <a:t>Now: which evidence should we seek?</a:t>
+            </a:r>
+          </a:p>
+        </p:txBody>
+      </p:sp>
+      <p:sp>
+        <p:nvSpPr>
+          <p:cNvPr id="130" name="Arrow130"/>
+          <p:cNvSpPr/>
+          <p:nvPr/>
+        </p:nvSpPr>
+        <p:spPr>
+          <a:xfrm>
+            <a:off x="4272000" y="4280000"/>
+            <a:ext cx="600000" cy="580000"/>
+          </a:xfrm>
+          <a:prstGeom prst="downArrow">
+            <a:avLst/>
+          </a:prstGeom>
+          <a:solidFill>
+            <a:srgbClr val="8E6F3E"/>
+          </a:solidFill>
+          <a:ln>
+            <a:noFill/>
+          </a:ln>
+        </p:spPr>
+        <p:txBody>
+          <a:bodyPr wrap="square" lIns="0" tIns="0" rIns="0" bIns="0" anchor="ctr"/>
+          <a:lstStyle/>
+          <a:p>
+            <a:pPr algn="ctr">
+              <a:buNone/>
+            </a:pPr>
+            <a:endParaRPr/>
+          </a:p>
+        </p:txBody>
+      </p:sp>
+      <p:sp>
+        <p:nvSpPr>
+          <p:cNvPr id="140" name="Band140"/>
+          <p:cNvSpPr/>
+          <p:nvPr/>
+        </p:nvSpPr>
+        <p:spPr>
+          <a:xfrm>
+            <a:off x="1071928" y="5060000"/>
+            <a:ext cx="7000144" cy="760000"/>
+          </a:xfrm>
+          <a:prstGeom prst="rect">
+            <a:avLst/>
+          </a:prstGeom>
+          <a:solidFill>
+            <a:srgbClr val="8E6F3E"/>
+          </a:solidFill>
+          <a:ln>
+            <a:noFill/>
+          </a:ln>
+        </p:spPr>
+        <p:txBody>
+          <a:bodyPr wrap="square" lIns="91440" tIns="45720" rIns="91440" bIns="45720" anchor="ctr"/>
+          <a:lstStyle/>
+          <a:p>
+            <a:pPr algn="ctr">
+              <a:buNone/>
+            </a:pPr>
+            <a:r>
+              <a:rPr lang="en-US" sz="2800" b="1" i="0" dirty="0">
+                <a:solidFill>
+                  <a:srgbClr val="FFFFFF"/>
+                </a:solidFill>
+              </a:rPr>
+              <a:t>STRATEGY  →  STRENGTH  →  SUFFICIENCY</a:t>
+            </a:r>
+          </a:p>
+        </p:txBody>
+      </p:sp>
+    </p:spTree>
+  </p:cSld>
+  <p:clrMapOvr>
+    <a:masterClrMapping/>
+  </p:clrMapOvr>
+</p:sld>
+</file>
+
 <file path=ppt/slides/slide6.xml><?xml version="1.0" encoding="utf-8"?>
 <p:sld xmlns:a="http://schemas.openxmlformats.org/drawingml/2006/main" xmlns:r="http://schemas.openxmlformats.org/officeDocument/2006/relationships" xmlns:p="http://schemas.openxmlformats.org/presentationml/2006/main">
   <p:cSld>
@@ -40493,7 +46172,7 @@
               <a:defRPr b="0"/>
             </a:pPr>
             <a:r>
-              <a:rPr lang="en-US" sz="2800" b="1" i="0" dirty="0">
+              <a:rPr lang="en-US" sz="2800" b="0" i="0" dirty="0">
                 <a:solidFill>
                   <a:srgbClr val="000000"/>
                 </a:solidFill>
@@ -41768,7 +47447,7 @@
               <a:defRPr b="0"/>
             </a:pPr>
             <a:r>
-              <a:rPr lang="en-US" sz="2800" b="1" i="0" dirty="0">
+              <a:rPr lang="en-US" sz="2800" b="0" i="0" dirty="0">
                 <a:solidFill>
                   <a:srgbClr val="000000"/>
                 </a:solidFill>
@@ -42725,7 +48404,7 @@
               <a:defRPr b="0"/>
             </a:pPr>
             <a:r>
-              <a:rPr lang="en-US" sz="2800" b="1" i="0" dirty="0">
+              <a:rPr lang="en-US" sz="2800" b="0" i="0" dirty="0">
                 <a:solidFill>
                   <a:srgbClr val="000000"/>
                 </a:solidFill>
@@ -43863,7 +49542,7 @@
               <a:defRPr b="0"/>
             </a:pPr>
             <a:r>
-              <a:rPr lang="en-US" sz="2800" b="1" i="0" dirty="0">
+              <a:rPr lang="en-US" sz="2800" b="0" i="0" dirty="0">
                 <a:solidFill>
                   <a:srgbClr val="000000"/>
                 </a:solidFill>

--- a/course/lectures/act-1-foundations/08-validation/1-8-Validation.pptx
+++ b/course/lectures/act-1-foundations/08-validation/1-8-Validation.pptx
@@ -10433,38 +10433,73 @@
       </p:grpSpPr>
       <p:sp>
         <p:nvSpPr>
-          <p:cNvPr id="2" name="T2"/>
-          <p:cNvSpPr txBox="1"/>
-          <p:nvPr/>
-        </p:nvSpPr>
-        <p:spPr>
-          <a:xfrm>
-            <a:off x="439339" y="565150"/>
-            <a:ext cx="8265319" cy="700000"/>
+          <p:cNvPr id="2" name="Title 2">
+            <a:extLst>
+              <a:ext uri="{FF2B5EF4-FFF2-40B4-BE49-F238E27FC236}">
+                <a16:creationId xmlns:a16="http://schemas.microsoft.com/office/drawing/2014/main" id="{DD7291C3-5AE9-477A-3F39-34A06A62D99C}"/>
+              </a:ext>
+            </a:extLst>
+          </p:cNvPr>
+          <p:cNvSpPr txBox="1">
+            <a:spLocks/>
+          </p:cNvSpPr>
+          <p:nvPr/>
+        </p:nvSpPr>
+        <p:spPr bwMode="black">
+          <a:xfrm>
+            <a:off x="439339" y="565149"/>
+            <a:ext cx="8265319" cy="1195411"/>
           </a:xfrm>
           <a:prstGeom prst="rect">
             <a:avLst/>
           </a:prstGeom>
-          <a:noFill/>
-          <a:ln>
+          <a:solidFill>
+            <a:srgbClr val="FFFFFF"/>
+          </a:solidFill>
+          <a:ln w="31750" cap="sq">
             <a:noFill/>
-          </a:ln>
-        </p:spPr>
-        <p:txBody>
-          <a:bodyPr wrap="square" lIns="0" tIns="0" rIns="0" bIns="0" anchor="t"/>
-          <a:lstStyle/>
-          <a:p>
-            <a:pPr algn="ctr">
-              <a:buNone/>
-            </a:pPr>
-            <a:r>
-              <a:rPr lang="en-US" sz="2000" b="0" i="0" dirty="0">
+            <a:miter lim="800000"/>
+          </a:ln>
+        </p:spPr>
+        <p:txBody>
+          <a:bodyPr vert="horz" lIns="182880" tIns="182880" rIns="182880" bIns="182880" rtlCol="0" anchor="ctr">
+            <a:normAutofit/>
+          </a:bodyPr>
+          <a:lstStyle>
+            <a:lvl1pPr algn="ctr" defTabSz="914400" rtl="0" eaLnBrk="1" latinLnBrk="0" hangingPunct="1">
+              <a:lnSpc>
+                <a:spcPct val="90000"/>
+              </a:lnSpc>
+              <a:spcBef>
+                <a:spcPct val="0"/>
+              </a:spcBef>
+              <a:buNone/>
+              <a:defRPr sz="3600" kern="1200" cap="none" spc="200" baseline="0">
                 <a:solidFill>
                   <a:srgbClr val="000000"/>
                 </a:solidFill>
-              </a:rPr>
-              <a:t>ECE 30861/46100: Software Engineering</a:t>
-            </a:r>
+                <a:latin typeface="Calibri" panose="020F0502020204030204" pitchFamily="34" charset="0"/>
+                <a:ea typeface="+mj-ea"/>
+                <a:cs typeface="Calibri" panose="020F0502020204030204" pitchFamily="34" charset="0"/>
+              </a:defRPr>
+            </a:lvl1pPr>
+          </a:lstStyle>
+          <a:p>
+            <a:r>
+              <a:rPr lang="en-US" sz="2000" i="1" dirty="0"/>
+              <a:t>Software Engineering</a:t>
+            </a:r>
+            <a:br>
+              <a:rPr lang="en-US" sz="2000" i="1" dirty="0"/>
+            </a:br>
+            <a:br>
+              <a:rPr lang="en-US" sz="2000" i="1" dirty="0"/>
+            </a:br>
+            <a:r>
+              <a:rPr lang="en-US" sz="1600" i="1" dirty="0"/>
+              <a:t>ECE 30861 / CSCI 45000</a:t>
+            </a:r>
+            <a:endParaRPr lang="en-US" sz="2000" i="1" dirty="0"/>
           </a:p>
         </p:txBody>
       </p:sp>

--- a/course/lectures/act-1-foundations/08-validation/1-8-Validation.pptx
+++ b/course/lectures/act-1-foundations/08-validation/1-8-Validation.pptx
@@ -7142,49 +7142,32 @@
       </p:sp>
       <p:pic>
         <p:nvPicPr>
-          <p:cNvPr id="1026" name="Picture 2" descr="Electrical and Computer Engineering Black and Gold Co-Brand Logo">
+          <p:cNvPr id="1026" name="Purdue CoBrand">
             <a:extLst>
               <a:ext uri="{FF2B5EF4-FFF2-40B4-BE49-F238E27FC236}">
-                <a16:creationId xmlns:a16="http://schemas.microsoft.com/office/drawing/2014/main" id="{DA2A365A-4E3B-2A48-8812-990B2A2EE92D}"/>
+                <a16:creationId xmlns:a16="http://schemas.microsoft.com/office/drawing/2014/main" id="{BCBD89D8-43BD-5D41-99C6-91B0B6A51904}"/>
               </a:ext>
             </a:extLst>
           </p:cNvPr>
           <p:cNvPicPr>
-            <a:picLocks noChangeAspect="1" noChangeArrowheads="1"/>
+            <a:picLocks noChangeAspect="1"/>
           </p:cNvPicPr>
           <p:nvPr userDrawn="1"/>
         </p:nvPicPr>
         <p:blipFill>
-          <a:blip r:embed="rId2">
-            <a:extLst>
-              <a:ext uri="{28A0092B-C50C-407E-A947-70E740481C1C}">
-                <a14:useLocalDpi xmlns:a14="http://schemas.microsoft.com/office/drawing/2010/main" val="0"/>
-              </a:ext>
-            </a:extLst>
-          </a:blip>
-          <a:srcRect/>
+          <a:blip r:embed="rId2"/>
           <a:stretch>
             <a:fillRect/>
           </a:stretch>
         </p:blipFill>
-        <p:spPr bwMode="auto">
-          <a:xfrm>
-            <a:off x="3876158" y="5721845"/>
-            <a:ext cx="1264684" cy="999630"/>
+        <p:spPr>
+          <a:xfrm>
+            <a:off x="2097131" y="5715964"/>
+            <a:ext cx="5091026" cy="542584"/>
           </a:xfrm>
           <a:prstGeom prst="rect">
             <a:avLst/>
           </a:prstGeom>
-          <a:noFill/>
-          <a:extLst>
-            <a:ext uri="{909E8E84-426E-40DD-AFC4-6F175D3DCCD1}">
-              <a14:hiddenFill xmlns:a14="http://schemas.microsoft.com/office/drawing/2010/main">
-                <a:solidFill>
-                  <a:srgbClr val="FFFFFF"/>
-                </a:solidFill>
-              </a14:hiddenFill>
-            </a:ext>
-          </a:extLst>
         </p:spPr>
       </p:pic>
     </p:spTree>
